--- a/Software Development/Functionalities.pptx
+++ b/Software Development/Functionalities.pptx
@@ -1,31 +1,127 @@
 
 <file path=ppt/presentation.xml><?xml version="1.0" encoding="utf-8"?>
-<p:presentation xmlns:a="http://schemas.openxmlformats.org/drawingml/2006/main" xmlns:p="http://schemas.openxmlformats.org/presentationml/2006/main" xmlns:r="http://schemas.openxmlformats.org/officeDocument/2006/relationships" xmlns:p14="http://schemas.microsoft.com/office/powerpoint/2010/main" xmlns:p15="http://schemas.microsoft.com/office/powerpoint/2012/main" xmlns:mc="http://schemas.openxmlformats.org/markup-compatibility/2006">
+<p:presentation xmlns:a="http://schemas.openxmlformats.org/drawingml/2006/main" xmlns:r="http://schemas.openxmlformats.org/officeDocument/2006/relationships" xmlns:p="http://schemas.openxmlformats.org/presentationml/2006/main">
   <p:sldMasterIdLst>
-    <p:sldMasterId id="2147483648" r:id="rId2"/>
+    <p:sldMasterId id="2147483648" r:id="rId1"/>
   </p:sldMasterIdLst>
   <p:sldIdLst>
-    <p:sldId id="256" r:id="rId3"/>
-    <p:sldId id="257" r:id="rId4"/>
-    <p:sldId id="258" r:id="rId5"/>
-    <p:sldId id="259" r:id="rId6"/>
-    <p:sldId id="260" r:id="rId7"/>
-    <p:sldId id="261" r:id="rId8"/>
-    <p:sldId id="262" r:id="rId9"/>
-    <p:sldId id="263" r:id="rId10"/>
-    <p:sldId id="264" r:id="rId11"/>
-    <p:sldId id="265" r:id="rId12"/>
-    <p:sldId id="266" r:id="rId13"/>
-    <p:sldId id="267" r:id="rId14"/>
-    <p:sldId id="268" r:id="rId15"/>
+    <p:sldId id="256" r:id="rId2"/>
+    <p:sldId id="257" r:id="rId3"/>
+    <p:sldId id="258" r:id="rId4"/>
+    <p:sldId id="259" r:id="rId5"/>
+    <p:sldId id="260" r:id="rId6"/>
+    <p:sldId id="261" r:id="rId7"/>
+    <p:sldId id="262" r:id="rId8"/>
+    <p:sldId id="263" r:id="rId9"/>
+    <p:sldId id="264" r:id="rId10"/>
+    <p:sldId id="265" r:id="rId11"/>
+    <p:sldId id="266" r:id="rId12"/>
+    <p:sldId id="267" r:id="rId13"/>
+    <p:sldId id="268" r:id="rId14"/>
+    <p:sldId id="269" r:id="rId15"/>
   </p:sldIdLst>
   <p:sldSz cx="10080625" cy="5670550"/>
   <p:notesSz cx="7772400" cy="10058400"/>
+  <p:defaultTextStyle>
+    <a:defPPr>
+      <a:defRPr lang="ro-RO"/>
+    </a:defPPr>
+    <a:lvl1pPr marL="0" algn="l" defTabSz="914400" rtl="0" eaLnBrk="1" latinLnBrk="0" hangingPunct="1">
+      <a:defRPr sz="1800" kern="1200">
+        <a:solidFill>
+          <a:schemeClr val="tx1"/>
+        </a:solidFill>
+        <a:latin typeface="+mn-lt"/>
+        <a:ea typeface="+mn-ea"/>
+        <a:cs typeface="+mn-cs"/>
+      </a:defRPr>
+    </a:lvl1pPr>
+    <a:lvl2pPr marL="457200" algn="l" defTabSz="914400" rtl="0" eaLnBrk="1" latinLnBrk="0" hangingPunct="1">
+      <a:defRPr sz="1800" kern="1200">
+        <a:solidFill>
+          <a:schemeClr val="tx1"/>
+        </a:solidFill>
+        <a:latin typeface="+mn-lt"/>
+        <a:ea typeface="+mn-ea"/>
+        <a:cs typeface="+mn-cs"/>
+      </a:defRPr>
+    </a:lvl2pPr>
+    <a:lvl3pPr marL="914400" algn="l" defTabSz="914400" rtl="0" eaLnBrk="1" latinLnBrk="0" hangingPunct="1">
+      <a:defRPr sz="1800" kern="1200">
+        <a:solidFill>
+          <a:schemeClr val="tx1"/>
+        </a:solidFill>
+        <a:latin typeface="+mn-lt"/>
+        <a:ea typeface="+mn-ea"/>
+        <a:cs typeface="+mn-cs"/>
+      </a:defRPr>
+    </a:lvl3pPr>
+    <a:lvl4pPr marL="1371600" algn="l" defTabSz="914400" rtl="0" eaLnBrk="1" latinLnBrk="0" hangingPunct="1">
+      <a:defRPr sz="1800" kern="1200">
+        <a:solidFill>
+          <a:schemeClr val="tx1"/>
+        </a:solidFill>
+        <a:latin typeface="+mn-lt"/>
+        <a:ea typeface="+mn-ea"/>
+        <a:cs typeface="+mn-cs"/>
+      </a:defRPr>
+    </a:lvl4pPr>
+    <a:lvl5pPr marL="1828800" algn="l" defTabSz="914400" rtl="0" eaLnBrk="1" latinLnBrk="0" hangingPunct="1">
+      <a:defRPr sz="1800" kern="1200">
+        <a:solidFill>
+          <a:schemeClr val="tx1"/>
+        </a:solidFill>
+        <a:latin typeface="+mn-lt"/>
+        <a:ea typeface="+mn-ea"/>
+        <a:cs typeface="+mn-cs"/>
+      </a:defRPr>
+    </a:lvl5pPr>
+    <a:lvl6pPr marL="2286000" algn="l" defTabSz="914400" rtl="0" eaLnBrk="1" latinLnBrk="0" hangingPunct="1">
+      <a:defRPr sz="1800" kern="1200">
+        <a:solidFill>
+          <a:schemeClr val="tx1"/>
+        </a:solidFill>
+        <a:latin typeface="+mn-lt"/>
+        <a:ea typeface="+mn-ea"/>
+        <a:cs typeface="+mn-cs"/>
+      </a:defRPr>
+    </a:lvl6pPr>
+    <a:lvl7pPr marL="2743200" algn="l" defTabSz="914400" rtl="0" eaLnBrk="1" latinLnBrk="0" hangingPunct="1">
+      <a:defRPr sz="1800" kern="1200">
+        <a:solidFill>
+          <a:schemeClr val="tx1"/>
+        </a:solidFill>
+        <a:latin typeface="+mn-lt"/>
+        <a:ea typeface="+mn-ea"/>
+        <a:cs typeface="+mn-cs"/>
+      </a:defRPr>
+    </a:lvl7pPr>
+    <a:lvl8pPr marL="3200400" algn="l" defTabSz="914400" rtl="0" eaLnBrk="1" latinLnBrk="0" hangingPunct="1">
+      <a:defRPr sz="1800" kern="1200">
+        <a:solidFill>
+          <a:schemeClr val="tx1"/>
+        </a:solidFill>
+        <a:latin typeface="+mn-lt"/>
+        <a:ea typeface="+mn-ea"/>
+        <a:cs typeface="+mn-cs"/>
+      </a:defRPr>
+    </a:lvl8pPr>
+    <a:lvl9pPr marL="3657600" algn="l" defTabSz="914400" rtl="0" eaLnBrk="1" latinLnBrk="0" hangingPunct="1">
+      <a:defRPr sz="1800" kern="1200">
+        <a:solidFill>
+          <a:schemeClr val="tx1"/>
+        </a:solidFill>
+        <a:latin typeface="+mn-lt"/>
+        <a:ea typeface="+mn-ea"/>
+        <a:cs typeface="+mn-cs"/>
+      </a:defRPr>
+    </a:lvl9pPr>
+  </p:defaultTextStyle>
 </p:presentation>
 </file>
 
 <file path=ppt/slideLayouts/slideLayout1.xml><?xml version="1.0" encoding="utf-8"?>
-<p:sldLayout xmlns:a="http://schemas.openxmlformats.org/drawingml/2006/main" xmlns:p="http://schemas.openxmlformats.org/presentationml/2006/main" xmlns:r="http://schemas.openxmlformats.org/officeDocument/2006/relationships" xmlns:p14="http://schemas.microsoft.com/office/powerpoint/2010/main" xmlns:p15="http://schemas.microsoft.com/office/powerpoint/2012/main" xmlns:mc="http://schemas.openxmlformats.org/markup-compatibility/2006" type="tx" preserve="1">
+<p:sldLayout xmlns:a="http://schemas.openxmlformats.org/drawingml/2006/main" xmlns:r="http://schemas.openxmlformats.org/officeDocument/2006/relationships" xmlns:p="http://schemas.openxmlformats.org/presentationml/2006/main" type="tx" preserve="1">
   <p:cSld name="Default">
     <p:spTree>
       <p:nvGrpSpPr>
@@ -68,6 +164,7 @@
           <a:bodyPr lIns="0" tIns="0" rIns="0" bIns="0" anchor="ctr">
             <a:spAutoFit/>
           </a:bodyPr>
+          <a:lstStyle/>
           <a:p>
             <a:pPr indent="0" algn="ctr">
               <a:buNone/>
@@ -110,6 +207,7 @@
           <a:bodyPr lIns="0" tIns="0" rIns="0" bIns="0" anchor="t">
             <a:normAutofit/>
           </a:bodyPr>
+          <a:lstStyle/>
           <a:p>
             <a:pPr indent="0" algn="l">
               <a:spcBef>
@@ -141,6 +239,7 @@
         <p:spPr/>
         <p:txBody>
           <a:bodyPr/>
+          <a:lstStyle/>
           <a:p>
             <a:r>
               <a:t>Footer</a:t>
@@ -161,10 +260,12 @@
         <p:spPr/>
         <p:txBody>
           <a:bodyPr/>
+          <a:lstStyle/>
           <a:p>
             <a:fld id="{F97F1F0A-6B63-464F-B771-41A0AA95C262}" type="slidenum">
-              <a:t>&lt;#&gt;</a:t>
+              <a:t>‹#›</a:t>
             </a:fld>
+            <a:endParaRPr/>
           </a:p>
         </p:txBody>
       </p:sp>
@@ -181,21 +282,22 @@
         <p:spPr/>
         <p:txBody>
           <a:bodyPr/>
-          <a:p>
-            <a:r>
-              <a:rPr lang="en-US"/>
-              <a:t/>
-            </a:r>
+          <a:lstStyle/>
+          <a:p>
+            <a:endParaRPr/>
           </a:p>
         </p:txBody>
       </p:sp>
     </p:spTree>
   </p:cSld>
+  <p:clrMapOvr>
+    <a:masterClrMapping/>
+  </p:clrMapOvr>
 </p:sldLayout>
 </file>
 
 <file path=ppt/slideLayouts/slideLayout2.xml><?xml version="1.0" encoding="utf-8"?>
-<p:sldLayout xmlns:a="http://schemas.openxmlformats.org/drawingml/2006/main" xmlns:p="http://schemas.openxmlformats.org/presentationml/2006/main" xmlns:r="http://schemas.openxmlformats.org/officeDocument/2006/relationships" xmlns:p14="http://schemas.microsoft.com/office/powerpoint/2010/main" xmlns:p15="http://schemas.microsoft.com/office/powerpoint/2012/main" xmlns:mc="http://schemas.openxmlformats.org/markup-compatibility/2006" type="title" preserve="1">
+<p:sldLayout xmlns:a="http://schemas.openxmlformats.org/drawingml/2006/main" xmlns:r="http://schemas.openxmlformats.org/officeDocument/2006/relationships" xmlns:p="http://schemas.openxmlformats.org/presentationml/2006/main" type="title" preserve="1">
   <p:cSld name="Default">
     <p:spTree>
       <p:nvGrpSpPr>
@@ -238,6 +340,7 @@
           <a:bodyPr lIns="0" tIns="0" rIns="0" bIns="0" anchor="ctr">
             <a:spAutoFit/>
           </a:bodyPr>
+          <a:lstStyle/>
           <a:p>
             <a:pPr indent="0" algn="ctr">
               <a:buNone/>
@@ -280,6 +383,7 @@
           <a:bodyPr lIns="0" tIns="0" rIns="0" bIns="0" anchor="ctr">
             <a:spAutoFit/>
           </a:bodyPr>
+          <a:lstStyle/>
           <a:p>
             <a:pPr indent="0" algn="ctr">
               <a:buNone/>
@@ -308,6 +412,7 @@
         <p:spPr/>
         <p:txBody>
           <a:bodyPr/>
+          <a:lstStyle/>
           <a:p>
             <a:r>
               <a:t>Footer</a:t>
@@ -328,10 +433,12 @@
         <p:spPr/>
         <p:txBody>
           <a:bodyPr/>
+          <a:lstStyle/>
           <a:p>
             <a:fld id="{0CD852D0-1AED-445C-8A3F-E86FE0BFA602}" type="slidenum">
-              <a:t>&lt;#&gt;</a:t>
+              <a:t>‹#›</a:t>
             </a:fld>
+            <a:endParaRPr/>
           </a:p>
         </p:txBody>
       </p:sp>
@@ -348,22 +455,28 @@
         <p:spPr/>
         <p:txBody>
           <a:bodyPr/>
-          <a:p>
-            <a:r>
-              <a:rPr lang="en-US"/>
-              <a:t/>
-            </a:r>
+          <a:lstStyle/>
+          <a:p>
+            <a:endParaRPr/>
           </a:p>
         </p:txBody>
       </p:sp>
     </p:spTree>
   </p:cSld>
+  <p:clrMapOvr>
+    <a:masterClrMapping/>
+  </p:clrMapOvr>
 </p:sldLayout>
 </file>
 
 <file path=ppt/slideMasters/slideMaster1.xml><?xml version="1.0" encoding="utf-8"?>
-<p:sldMaster xmlns:a="http://schemas.openxmlformats.org/drawingml/2006/main" xmlns:p="http://schemas.openxmlformats.org/presentationml/2006/main" xmlns:r="http://schemas.openxmlformats.org/officeDocument/2006/relationships" xmlns:p14="http://schemas.microsoft.com/office/powerpoint/2010/main" xmlns:p15="http://schemas.microsoft.com/office/powerpoint/2012/main" xmlns:mc="http://schemas.openxmlformats.org/markup-compatibility/2006">
+<p:sldMaster xmlns:a="http://schemas.openxmlformats.org/drawingml/2006/main" xmlns:r="http://schemas.openxmlformats.org/officeDocument/2006/relationships" xmlns:p="http://schemas.openxmlformats.org/presentationml/2006/main">
   <p:cSld>
+    <p:bg>
+      <p:bgRef idx="1001">
+        <a:schemeClr val="bg1"/>
+      </p:bgRef>
+    </p:bg>
     <p:spTree>
       <p:nvGrpSpPr>
         <p:cNvPr id="1" name=""/>
@@ -433,14 +546,6 @@
               </a:rPr>
               <a:t>Click to edit the title text format</a:t>
             </a:r>
-            <a:endParaRPr lang="en-US" sz="4400" b="0" u="none" strike="noStrike">
-              <a:solidFill>
-                <a:srgbClr val="000000"/>
-              </a:solidFill>
-              <a:effectLst/>
-              <a:uFillTx/>
-              <a:latin typeface="Arial"/>
-            </a:endParaRPr>
           </a:p>
         </p:txBody>
       </p:sp>
@@ -629,14 +734,6 @@
               </a:rPr>
               <a:t>Click to edit the outline text format</a:t>
             </a:r>
-            <a:endParaRPr lang="en-US" sz="3200" b="0" u="none" strike="noStrike">
-              <a:solidFill>
-                <a:srgbClr val="000000"/>
-              </a:solidFill>
-              <a:effectLst/>
-              <a:uFillTx/>
-              <a:latin typeface="Arial"/>
-            </a:endParaRPr>
           </a:p>
           <a:p>
             <a:pPr marL="864000" lvl="1" indent="-324000" algn="l">
@@ -661,14 +758,6 @@
               </a:rPr>
               <a:t>Second Outline Level</a:t>
             </a:r>
-            <a:endParaRPr lang="en-US" sz="2800" b="0" u="none" strike="noStrike">
-              <a:solidFill>
-                <a:srgbClr val="000000"/>
-              </a:solidFill>
-              <a:effectLst/>
-              <a:uFillTx/>
-              <a:latin typeface="Arial"/>
-            </a:endParaRPr>
           </a:p>
           <a:p>
             <a:pPr marL="1296000" lvl="2" indent="-288000" algn="l">
@@ -693,14 +782,6 @@
               </a:rPr>
               <a:t>Third Outline Level</a:t>
             </a:r>
-            <a:endParaRPr lang="en-US" sz="2400" b="0" u="none" strike="noStrike">
-              <a:solidFill>
-                <a:srgbClr val="000000"/>
-              </a:solidFill>
-              <a:effectLst/>
-              <a:uFillTx/>
-              <a:latin typeface="Arial"/>
-            </a:endParaRPr>
           </a:p>
           <a:p>
             <a:pPr marL="1728000" lvl="3" indent="-216000" algn="l">
@@ -725,14 +806,6 @@
               </a:rPr>
               <a:t>Fourth Outline Level</a:t>
             </a:r>
-            <a:endParaRPr lang="en-US" sz="2000" b="0" u="none" strike="noStrike">
-              <a:solidFill>
-                <a:srgbClr val="000000"/>
-              </a:solidFill>
-              <a:effectLst/>
-              <a:uFillTx/>
-              <a:latin typeface="Arial"/>
-            </a:endParaRPr>
           </a:p>
           <a:p>
             <a:pPr marL="2160000" lvl="4" indent="-216000" algn="l">
@@ -757,14 +830,6 @@
               </a:rPr>
               <a:t>Fifth Outline Level</a:t>
             </a:r>
-            <a:endParaRPr lang="en-US" sz="2000" b="0" u="none" strike="noStrike">
-              <a:solidFill>
-                <a:srgbClr val="000000"/>
-              </a:solidFill>
-              <a:effectLst/>
-              <a:uFillTx/>
-              <a:latin typeface="Arial"/>
-            </a:endParaRPr>
           </a:p>
           <a:p>
             <a:pPr marL="2592000" lvl="5" indent="-216000" algn="l">
@@ -789,14 +854,6 @@
               </a:rPr>
               <a:t>Sixth Outline Level</a:t>
             </a:r>
-            <a:endParaRPr lang="en-US" sz="2000" b="0" u="none" strike="noStrike">
-              <a:solidFill>
-                <a:srgbClr val="000000"/>
-              </a:solidFill>
-              <a:effectLst/>
-              <a:uFillTx/>
-              <a:latin typeface="Arial"/>
-            </a:endParaRPr>
           </a:p>
           <a:p>
             <a:pPr marL="3024000" lvl="6" indent="-216000" algn="l">
@@ -821,14 +878,6 @@
               </a:rPr>
               <a:t>Seventh Outline Level</a:t>
             </a:r>
-            <a:endParaRPr lang="en-US" sz="2000" b="0" u="none" strike="noStrike">
-              <a:solidFill>
-                <a:srgbClr val="000000"/>
-              </a:solidFill>
-              <a:effectLst/>
-              <a:uFillTx/>
-              <a:latin typeface="Arial"/>
-            </a:endParaRPr>
           </a:p>
         </p:txBody>
       </p:sp>
@@ -887,14 +936,6 @@
               </a:rPr>
               <a:t>&lt;date/time&gt;</a:t>
             </a:r>
-            <a:endParaRPr lang="en-US" sz="1400" b="0" u="none" strike="noStrike">
-              <a:solidFill>
-                <a:srgbClr val="000000"/>
-              </a:solidFill>
-              <a:effectLst/>
-              <a:uFillTx/>
-              <a:latin typeface="Times New Roman"/>
-            </a:endParaRPr>
           </a:p>
         </p:txBody>
       </p:sp>
@@ -953,14 +994,6 @@
               </a:rPr>
               <a:t>&lt;footer&gt;</a:t>
             </a:r>
-            <a:endParaRPr lang="en-US" sz="1400" b="0" u="none" strike="noStrike">
-              <a:solidFill>
-                <a:srgbClr val="000000"/>
-              </a:solidFill>
-              <a:effectLst/>
-              <a:uFillTx/>
-              <a:latin typeface="Times New Roman"/>
-            </a:endParaRPr>
           </a:p>
         </p:txBody>
       </p:sp>
@@ -1017,7 +1050,7 @@
                 <a:uFillTx/>
                 <a:latin typeface="Times New Roman"/>
               </a:rPr>
-              <a:t>&lt;number&gt;</a:t>
+              <a:t>‹#›</a:t>
             </a:fld>
             <a:endParaRPr lang="en-US" sz="1400" b="0" u="none" strike="noStrike">
               <a:solidFill>
@@ -1034,14 +1067,19 @@
   </p:cSld>
   <p:clrMap bg1="lt1" tx1="dk1" bg2="lt2" tx2="dk2" accent1="accent1" accent2="accent2" accent3="accent3" accent4="accent4" accent5="accent5" accent6="accent6" hlink="hlink" folHlink="folHlink"/>
   <p:sldLayoutIdLst>
-    <p:sldLayoutId id="2147483649" r:id="rId2"/>
-    <p:sldLayoutId id="2147483650" r:id="rId3"/>
+    <p:sldLayoutId id="2147483649" r:id="rId1"/>
+    <p:sldLayoutId id="2147483650" r:id="rId2"/>
   </p:sldLayoutIdLst>
+  <p:txStyles>
+    <p:titleStyle/>
+    <p:bodyStyle/>
+    <p:otherStyle/>
+  </p:txStyles>
 </p:sldMaster>
 </file>
 
 <file path=ppt/slides/slide1.xml><?xml version="1.0" encoding="utf-8"?>
-<p:sld xmlns:a="http://schemas.openxmlformats.org/drawingml/2006/main" xmlns:p="http://schemas.openxmlformats.org/presentationml/2006/main" xmlns:r="http://schemas.openxmlformats.org/officeDocument/2006/relationships" xmlns:p14="http://schemas.microsoft.com/office/powerpoint/2010/main" xmlns:p15="http://schemas.microsoft.com/office/powerpoint/2012/main" xmlns:mc="http://schemas.openxmlformats.org/markup-compatibility/2006">
+<p:sld xmlns:a="http://schemas.openxmlformats.org/drawingml/2006/main" xmlns:r="http://schemas.openxmlformats.org/officeDocument/2006/relationships" xmlns:p="http://schemas.openxmlformats.org/presentationml/2006/main">
   <p:cSld>
     <p:spTree>
       <p:nvGrpSpPr>
@@ -1084,6 +1122,7 @@
           <a:bodyPr lIns="0" tIns="0" rIns="0" bIns="0" anchor="ctr">
             <a:spAutoFit/>
           </a:bodyPr>
+          <a:lstStyle/>
           <a:p>
             <a:pPr indent="0" algn="ctr">
               <a:buNone/>
@@ -1099,14 +1138,6 @@
               </a:rPr>
               <a:t>Transport Company Management System</a:t>
             </a:r>
-            <a:endParaRPr lang="en-US" sz="4400" b="0" u="none" strike="noStrike">
-              <a:solidFill>
-                <a:srgbClr val="000000"/>
-              </a:solidFill>
-              <a:effectLst/>
-              <a:uFillTx/>
-              <a:latin typeface="Arial"/>
-            </a:endParaRPr>
           </a:p>
         </p:txBody>
       </p:sp>
@@ -1137,6 +1168,7 @@
           <a:bodyPr lIns="0" tIns="0" rIns="0" bIns="0" anchor="ctr">
             <a:spAutoFit/>
           </a:bodyPr>
+          <a:lstStyle/>
           <a:p>
             <a:pPr indent="0" algn="ctr">
               <a:buNone/>
@@ -1152,32 +1184,34 @@
               </a:rPr>
               <a:t>Functionalities</a:t>
             </a:r>
-            <a:endParaRPr lang="en-US" sz="3200" b="0" u="none" strike="noStrike">
-              <a:solidFill>
-                <a:srgbClr val="000000"/>
-              </a:solidFill>
-              <a:effectLst/>
-              <a:uFillTx/>
-              <a:latin typeface="Arial"/>
-            </a:endParaRPr>
           </a:p>
         </p:txBody>
       </p:sp>
     </p:spTree>
   </p:cSld>
-  <mc:AlternateContent>
+  <p:clrMapOvr>
+    <a:masterClrMapping/>
+  </p:clrMapOvr>
+  <mc:AlternateContent xmlns:mc="http://schemas.openxmlformats.org/markup-compatibility/2006" xmlns:p14="http://schemas.microsoft.com/office/powerpoint/2010/main">
     <mc:Choice Requires="p14">
       <p:transition spd="slow" p14:dur="2000"/>
     </mc:Choice>
-    <mc:Fallback>
+    <mc:Fallback xmlns="" xmlns:p15="http://schemas.microsoft.com/office/powerpoint/2012/main">
       <p:transition spd="slow"/>
     </mc:Fallback>
   </mc:AlternateContent>
+  <p:timing>
+    <p:tnLst>
+      <p:par>
+        <p:cTn id="1" dur="indefinite" restart="never" nodeType="tmRoot"/>
+      </p:par>
+    </p:tnLst>
+  </p:timing>
 </p:sld>
 </file>
 
 <file path=ppt/slides/slide10.xml><?xml version="1.0" encoding="utf-8"?>
-<p:sld xmlns:a="http://schemas.openxmlformats.org/drawingml/2006/main" xmlns:p="http://schemas.openxmlformats.org/presentationml/2006/main" xmlns:r="http://schemas.openxmlformats.org/officeDocument/2006/relationships" xmlns:p14="http://schemas.microsoft.com/office/powerpoint/2010/main" xmlns:p15="http://schemas.microsoft.com/office/powerpoint/2012/main" xmlns:mc="http://schemas.openxmlformats.org/markup-compatibility/2006">
+<p:sld xmlns:a="http://schemas.openxmlformats.org/drawingml/2006/main" xmlns:r="http://schemas.openxmlformats.org/officeDocument/2006/relationships" xmlns:p="http://schemas.openxmlformats.org/presentationml/2006/main">
   <p:cSld>
     <p:spTree>
       <p:nvGrpSpPr>
@@ -1220,6 +1254,7 @@
           <a:bodyPr lIns="0" tIns="0" rIns="0" bIns="0" anchor="ctr">
             <a:spAutoFit/>
           </a:bodyPr>
+          <a:lstStyle/>
           <a:p>
             <a:pPr indent="0" algn="l">
               <a:buNone/>
@@ -1271,44 +1306,70 @@
         </p:spPr>
         <p:txBody>
           <a:bodyPr lIns="0" tIns="0" rIns="0" bIns="0" anchor="t">
-            <a:normAutofit fontScale="77500" lnSpcReduction="19999"/>
+            <a:normAutofit fontScale="77500" lnSpcReduction="20000"/>
           </a:bodyPr>
-          <a:p>
-            <a:pPr indent="0" algn="l">
+          <a:lstStyle/>
+          <a:p>
+            <a:pPr algn="l">
               <a:spcBef>
                 <a:spcPts val="1417"/>
               </a:spcBef>
-              <a:buNone/>
-            </a:pPr>
-            <a:r>
-              <a:rPr lang="en-US" sz="2000" b="0" u="none" strike="noStrike">
-                <a:solidFill>
-                  <a:srgbClr val="000000"/>
-                </a:solidFill>
-                <a:effectLst/>
-                <a:uFillTx/>
-                <a:latin typeface="New times roman"/>
-              </a:rPr>
-              <a:t>REQ-64: Once accepted, the system will schedule the transport job.</a:t>
-            </a:r>
-            <a:endParaRPr lang="en-US" sz="2000" b="0" u="none" strike="noStrike">
-              <a:solidFill>
-                <a:srgbClr val="000000"/>
-              </a:solidFill>
-              <a:effectLst/>
-              <a:uFillTx/>
-              <a:latin typeface="Times New Roman"/>
-            </a:endParaRPr>
-          </a:p>
-          <a:p>
-            <a:pPr indent="0" algn="l">
+            </a:pPr>
+            <a:r>
+              <a:rPr lang="en-US" sz="1600" dirty="0"/>
+              <a:t>✔</a:t>
+            </a:r>
+            <a:r>
+              <a:rPr lang="ro-RO" sz="1600" dirty="0"/>
+              <a:t> </a:t>
+            </a:r>
+            <a:r>
+              <a:rPr lang="en-US" sz="2000" b="0" u="none" strike="noStrike" dirty="0" smtClean="0">
+                <a:solidFill>
+                  <a:srgbClr val="000000"/>
+                </a:solidFill>
+                <a:effectLst/>
+                <a:uFillTx/>
+                <a:latin typeface="New times roman"/>
+              </a:rPr>
+              <a:t>REQ-64</a:t>
+            </a:r>
+            <a:r>
+              <a:rPr lang="en-US" sz="2000" b="0" u="none" strike="noStrike" dirty="0">
+                <a:solidFill>
+                  <a:srgbClr val="000000"/>
+                </a:solidFill>
+                <a:effectLst/>
+                <a:uFillTx/>
+                <a:latin typeface="New times roman"/>
+              </a:rPr>
+              <a:t>: Once accepted, the system will schedule the transport job.</a:t>
+            </a:r>
+            <a:endParaRPr lang="en-US" sz="2000" b="0" u="none" strike="noStrike" dirty="0">
+              <a:solidFill>
+                <a:srgbClr val="000000"/>
+              </a:solidFill>
+              <a:effectLst/>
+              <a:uFillTx/>
+              <a:latin typeface="Times New Roman"/>
+            </a:endParaRPr>
+          </a:p>
+          <a:p>
+            <a:pPr algn="l">
               <a:spcBef>
                 <a:spcPts val="1417"/>
               </a:spcBef>
-              <a:buNone/>
-            </a:pPr>
-            <a:r>
-              <a:rPr lang="en-US" sz="2000" b="0" u="none" strike="noStrike">
+            </a:pPr>
+            <a:r>
+              <a:rPr lang="en-US" sz="1600" dirty="0"/>
+              <a:t>✔</a:t>
+            </a:r>
+            <a:r>
+              <a:rPr lang="ro-RO" sz="1600" dirty="0"/>
+              <a:t> </a:t>
+            </a:r>
+            <a:r>
+              <a:rPr lang="en-US" sz="2000" b="0" u="none" strike="noStrike" dirty="0" smtClean="0">
                 <a:solidFill>
                   <a:srgbClr val="000000"/>
                 </a:solidFill>
@@ -1318,169 +1379,277 @@
               </a:rPr>
               <a:t>REQ-65: The system will track the transport job.</a:t>
             </a:r>
-            <a:endParaRPr lang="en-US" sz="2000" b="0" u="none" strike="noStrike">
-              <a:solidFill>
-                <a:srgbClr val="000000"/>
-              </a:solidFill>
-              <a:effectLst/>
-              <a:uFillTx/>
-              <a:latin typeface="Times New Roman"/>
-            </a:endParaRPr>
-          </a:p>
-          <a:p>
-            <a:pPr indent="0" algn="l">
+            <a:endParaRPr lang="en-US" sz="2000" b="0" u="none" strike="noStrike" dirty="0" smtClean="0">
+              <a:solidFill>
+                <a:srgbClr val="000000"/>
+              </a:solidFill>
+              <a:effectLst/>
+              <a:uFillTx/>
+              <a:latin typeface="Times New Roman"/>
+            </a:endParaRPr>
+          </a:p>
+          <a:p>
+            <a:pPr algn="l">
               <a:spcBef>
                 <a:spcPts val="1417"/>
               </a:spcBef>
-              <a:buNone/>
-            </a:pPr>
-            <a:r>
-              <a:rPr lang="en-US" sz="2000" b="0" u="none" strike="noStrike">
-                <a:solidFill>
-                  <a:srgbClr val="000000"/>
-                </a:solidFill>
-                <a:effectLst/>
-                <a:uFillTx/>
-                <a:latin typeface="New times roman"/>
-              </a:rPr>
-              <a:t>REQ-66: The system will update the availability of the assigned vehicle.</a:t>
-            </a:r>
-            <a:endParaRPr lang="en-US" sz="2000" b="0" u="none" strike="noStrike">
-              <a:solidFill>
-                <a:srgbClr val="000000"/>
-              </a:solidFill>
-              <a:effectLst/>
-              <a:uFillTx/>
-              <a:latin typeface="Times New Roman"/>
-            </a:endParaRPr>
-          </a:p>
-          <a:p>
-            <a:pPr indent="0" algn="l">
+            </a:pPr>
+            <a:r>
+              <a:rPr lang="en-US" sz="1600" dirty="0"/>
+              <a:t>✔</a:t>
+            </a:r>
+            <a:r>
+              <a:rPr lang="ro-RO" sz="1600" dirty="0"/>
+              <a:t> </a:t>
+            </a:r>
+            <a:r>
+              <a:rPr lang="en-US" sz="2000" b="0" u="none" strike="noStrike" dirty="0" smtClean="0">
+                <a:solidFill>
+                  <a:srgbClr val="000000"/>
+                </a:solidFill>
+                <a:effectLst/>
+                <a:uFillTx/>
+                <a:latin typeface="New times roman"/>
+              </a:rPr>
+              <a:t>REQ-66</a:t>
+            </a:r>
+            <a:r>
+              <a:rPr lang="en-US" sz="2000" b="0" u="none" strike="noStrike" dirty="0">
+                <a:solidFill>
+                  <a:srgbClr val="000000"/>
+                </a:solidFill>
+                <a:effectLst/>
+                <a:uFillTx/>
+                <a:latin typeface="New times roman"/>
+              </a:rPr>
+              <a:t>: The system will update the availability of the assigned vehicle.</a:t>
+            </a:r>
+            <a:endParaRPr lang="en-US" sz="2000" b="0" u="none" strike="noStrike" dirty="0">
+              <a:solidFill>
+                <a:srgbClr val="000000"/>
+              </a:solidFill>
+              <a:effectLst/>
+              <a:uFillTx/>
+              <a:latin typeface="Times New Roman"/>
+            </a:endParaRPr>
+          </a:p>
+          <a:p>
+            <a:pPr algn="l">
               <a:spcBef>
                 <a:spcPts val="1417"/>
               </a:spcBef>
-              <a:buNone/>
-            </a:pPr>
-            <a:r>
-              <a:rPr lang="en-US" sz="2000" b="0" u="none" strike="noStrike">
-                <a:solidFill>
-                  <a:srgbClr val="000000"/>
-                </a:solidFill>
-                <a:effectLst/>
-                <a:uFillTx/>
-                <a:latin typeface="New times roman"/>
-              </a:rPr>
-              <a:t>REQ-67: The system will update the availability of the assigned driver.</a:t>
-            </a:r>
-            <a:endParaRPr lang="en-US" sz="2000" b="0" u="none" strike="noStrike">
-              <a:solidFill>
-                <a:srgbClr val="000000"/>
-              </a:solidFill>
-              <a:effectLst/>
-              <a:uFillTx/>
-              <a:latin typeface="Times New Roman"/>
-            </a:endParaRPr>
-          </a:p>
-          <a:p>
-            <a:pPr indent="0" algn="l">
+            </a:pPr>
+            <a:r>
+              <a:rPr lang="en-US" sz="1600" dirty="0"/>
+              <a:t>✔</a:t>
+            </a:r>
+            <a:r>
+              <a:rPr lang="ro-RO" sz="1600" dirty="0"/>
+              <a:t> </a:t>
+            </a:r>
+            <a:r>
+              <a:rPr lang="en-US" sz="2000" b="0" u="none" strike="noStrike" dirty="0" smtClean="0">
+                <a:solidFill>
+                  <a:srgbClr val="000000"/>
+                </a:solidFill>
+                <a:effectLst/>
+                <a:uFillTx/>
+                <a:latin typeface="New times roman"/>
+              </a:rPr>
+              <a:t>REQ-67</a:t>
+            </a:r>
+            <a:r>
+              <a:rPr lang="en-US" sz="2000" b="0" u="none" strike="noStrike" dirty="0">
+                <a:solidFill>
+                  <a:srgbClr val="000000"/>
+                </a:solidFill>
+                <a:effectLst/>
+                <a:uFillTx/>
+                <a:latin typeface="New times roman"/>
+              </a:rPr>
+              <a:t>: The system will update the availability of the assigned driver.</a:t>
+            </a:r>
+            <a:endParaRPr lang="en-US" sz="2000" b="0" u="none" strike="noStrike" dirty="0">
+              <a:solidFill>
+                <a:srgbClr val="000000"/>
+              </a:solidFill>
+              <a:effectLst/>
+              <a:uFillTx/>
+              <a:latin typeface="Times New Roman"/>
+            </a:endParaRPr>
+          </a:p>
+          <a:p>
+            <a:pPr algn="l">
               <a:spcBef>
                 <a:spcPts val="1417"/>
               </a:spcBef>
-              <a:buNone/>
-            </a:pPr>
-            <a:r>
-              <a:rPr lang="en-US" sz="2000" b="0" u="none" strike="noStrike">
-                <a:solidFill>
-                  <a:srgbClr val="000000"/>
-                </a:solidFill>
-                <a:effectLst/>
-                <a:uFillTx/>
-                <a:latin typeface="New times roman"/>
-              </a:rPr>
-              <a:t>REQ-68: The system shall allow staff to update the job status (e.g., In Transit, Delivered).</a:t>
-            </a:r>
-            <a:endParaRPr lang="en-US" sz="2000" b="0" u="none" strike="noStrike">
-              <a:solidFill>
-                <a:srgbClr val="000000"/>
-              </a:solidFill>
-              <a:effectLst/>
-              <a:uFillTx/>
-              <a:latin typeface="Times New Roman"/>
-            </a:endParaRPr>
-          </a:p>
-          <a:p>
-            <a:pPr indent="0" algn="l">
+            </a:pPr>
+            <a:r>
+              <a:rPr lang="en-US" sz="1600" dirty="0"/>
+              <a:t>✔</a:t>
+            </a:r>
+            <a:r>
+              <a:rPr lang="ro-RO" sz="1600" dirty="0"/>
+              <a:t> </a:t>
+            </a:r>
+            <a:r>
+              <a:rPr lang="en-US" sz="2000" b="0" u="none" strike="noStrike" dirty="0" smtClean="0">
+                <a:solidFill>
+                  <a:srgbClr val="000000"/>
+                </a:solidFill>
+                <a:effectLst/>
+                <a:uFillTx/>
+                <a:latin typeface="New times roman"/>
+              </a:rPr>
+              <a:t>REQ-68</a:t>
+            </a:r>
+            <a:r>
+              <a:rPr lang="en-US" sz="2000" b="0" u="none" strike="noStrike" dirty="0">
+                <a:solidFill>
+                  <a:srgbClr val="000000"/>
+                </a:solidFill>
+                <a:effectLst/>
+                <a:uFillTx/>
+                <a:latin typeface="New times roman"/>
+              </a:rPr>
+              <a:t>: The system shall allow staff to update the job status (e.g., In Transit, Delivered).</a:t>
+            </a:r>
+            <a:endParaRPr lang="en-US" sz="2000" b="0" u="none" strike="noStrike" dirty="0">
+              <a:solidFill>
+                <a:srgbClr val="000000"/>
+              </a:solidFill>
+              <a:effectLst/>
+              <a:uFillTx/>
+              <a:latin typeface="Times New Roman"/>
+            </a:endParaRPr>
+          </a:p>
+          <a:p>
+            <a:pPr algn="l">
               <a:spcBef>
                 <a:spcPts val="1417"/>
               </a:spcBef>
-              <a:buNone/>
-            </a:pPr>
-            <a:r>
-              <a:rPr lang="en-US" sz="2000" b="0" u="none" strike="noStrike">
-                <a:solidFill>
-                  <a:srgbClr val="000000"/>
-                </a:solidFill>
-                <a:effectLst/>
-                <a:uFillTx/>
-                <a:latin typeface="New times roman"/>
-              </a:rPr>
-              <a:t>REQ-69: The system shall mark the vehicle as available again once the job is marked "Delivered".</a:t>
-            </a:r>
-            <a:endParaRPr lang="en-US" sz="2000" b="0" u="none" strike="noStrike">
-              <a:solidFill>
-                <a:srgbClr val="000000"/>
-              </a:solidFill>
-              <a:effectLst/>
-              <a:uFillTx/>
-              <a:latin typeface="Times New Roman"/>
-            </a:endParaRPr>
-          </a:p>
-          <a:p>
-            <a:pPr indent="0" algn="l">
+            </a:pPr>
+            <a:r>
+              <a:rPr lang="en-US" sz="1600" dirty="0"/>
+              <a:t>✔</a:t>
+            </a:r>
+            <a:r>
+              <a:rPr lang="ro-RO" sz="1600" dirty="0"/>
+              <a:t> </a:t>
+            </a:r>
+            <a:r>
+              <a:rPr lang="en-US" sz="2000" b="0" u="none" strike="noStrike" dirty="0" smtClean="0">
+                <a:solidFill>
+                  <a:srgbClr val="000000"/>
+                </a:solidFill>
+                <a:effectLst/>
+                <a:uFillTx/>
+                <a:latin typeface="New times roman"/>
+              </a:rPr>
+              <a:t>REQ-69</a:t>
+            </a:r>
+            <a:r>
+              <a:rPr lang="en-US" sz="2000" b="0" u="none" strike="noStrike" dirty="0">
+                <a:solidFill>
+                  <a:srgbClr val="000000"/>
+                </a:solidFill>
+                <a:effectLst/>
+                <a:uFillTx/>
+                <a:latin typeface="New times roman"/>
+              </a:rPr>
+              <a:t>: The system shall mark the vehicle as available again once the job is marked "Delivered".</a:t>
+            </a:r>
+            <a:endParaRPr lang="en-US" sz="2000" b="0" u="none" strike="noStrike" dirty="0">
+              <a:solidFill>
+                <a:srgbClr val="000000"/>
+              </a:solidFill>
+              <a:effectLst/>
+              <a:uFillTx/>
+              <a:latin typeface="Times New Roman"/>
+            </a:endParaRPr>
+          </a:p>
+          <a:p>
+            <a:pPr algn="l">
               <a:spcBef>
                 <a:spcPts val="1417"/>
               </a:spcBef>
-              <a:buNone/>
-            </a:pPr>
-            <a:r>
-              <a:rPr lang="en-US" sz="2000" b="0" u="none" strike="noStrike">
-                <a:solidFill>
-                  <a:srgbClr val="000000"/>
-                </a:solidFill>
-                <a:effectLst/>
-                <a:uFillTx/>
-                <a:latin typeface="New times roman"/>
-              </a:rPr>
-              <a:t>REQ-70: The system shall mark the driver as available again once the job is marked "Delivered".</a:t>
-            </a:r>
-            <a:endParaRPr lang="en-US" sz="2000" b="0" u="none" strike="noStrike">
-              <a:solidFill>
-                <a:srgbClr val="000000"/>
-              </a:solidFill>
-              <a:effectLst/>
-              <a:uFillTx/>
-              <a:latin typeface="Times New Roman"/>
-            </a:endParaRPr>
-          </a:p>
-          <a:p>
-            <a:pPr indent="0" algn="l">
+            </a:pPr>
+            <a:r>
+              <a:rPr lang="en-US" sz="1600" dirty="0"/>
+              <a:t>✔</a:t>
+            </a:r>
+            <a:r>
+              <a:rPr lang="ro-RO" sz="1600" dirty="0"/>
+              <a:t> </a:t>
+            </a:r>
+            <a:r>
+              <a:rPr lang="en-US" sz="2000" b="0" u="none" strike="noStrike" dirty="0" smtClean="0">
+                <a:solidFill>
+                  <a:srgbClr val="000000"/>
+                </a:solidFill>
+                <a:effectLst/>
+                <a:uFillTx/>
+                <a:latin typeface="New times roman"/>
+              </a:rPr>
+              <a:t>REQ-70</a:t>
+            </a:r>
+            <a:r>
+              <a:rPr lang="en-US" sz="2000" b="0" u="none" strike="noStrike" dirty="0">
+                <a:solidFill>
+                  <a:srgbClr val="000000"/>
+                </a:solidFill>
+                <a:effectLst/>
+                <a:uFillTx/>
+                <a:latin typeface="New times roman"/>
+              </a:rPr>
+              <a:t>: The system shall mark the driver as available again once the job is marked "Delivered".</a:t>
+            </a:r>
+            <a:endParaRPr lang="en-US" sz="2000" b="0" u="none" strike="noStrike" dirty="0">
+              <a:solidFill>
+                <a:srgbClr val="000000"/>
+              </a:solidFill>
+              <a:effectLst/>
+              <a:uFillTx/>
+              <a:latin typeface="Times New Roman"/>
+            </a:endParaRPr>
+          </a:p>
+          <a:p>
+            <a:pPr algn="l">
               <a:spcBef>
                 <a:spcPts val="1417"/>
               </a:spcBef>
-              <a:buNone/>
-            </a:pPr>
-            <a:r>
-              <a:rPr lang="en-US" sz="2000" b="0" u="none" strike="noStrike">
-                <a:solidFill>
-                  <a:srgbClr val="000000"/>
-                </a:solidFill>
-                <a:effectLst/>
-                <a:uFillTx/>
-                <a:latin typeface="New times roman"/>
-              </a:rPr>
-              <a:t>REQ-71: The system shall log the completion timestamp of the job.</a:t>
-            </a:r>
-            <a:endParaRPr lang="en-US" sz="2000" b="0" u="none" strike="noStrike">
+            </a:pPr>
+            <a:r>
+              <a:rPr lang="en-US" sz="1600" dirty="0"/>
+              <a:t>✔</a:t>
+            </a:r>
+            <a:r>
+              <a:rPr lang="ro-RO" sz="1600" dirty="0"/>
+              <a:t> </a:t>
+            </a:r>
+            <a:r>
+              <a:rPr lang="en-US" sz="2000" b="0" u="none" strike="noStrike" dirty="0" smtClean="0">
+                <a:solidFill>
+                  <a:srgbClr val="000000"/>
+                </a:solidFill>
+                <a:effectLst/>
+                <a:uFillTx/>
+                <a:latin typeface="New times roman"/>
+              </a:rPr>
+              <a:t>REQ-71</a:t>
+            </a:r>
+            <a:r>
+              <a:rPr lang="en-US" sz="2000" b="0" u="none" strike="noStrike" dirty="0">
+                <a:solidFill>
+                  <a:srgbClr val="000000"/>
+                </a:solidFill>
+                <a:effectLst/>
+                <a:uFillTx/>
+                <a:latin typeface="New times roman"/>
+              </a:rPr>
+              <a:t>: The system shall log the completion timestamp of the job.</a:t>
+            </a:r>
+            <a:endParaRPr lang="en-US" sz="2000" b="0" u="none" strike="noStrike" dirty="0">
               <a:solidFill>
                 <a:srgbClr val="000000"/>
               </a:solidFill>
@@ -1493,11 +1662,14 @@
       </p:sp>
     </p:spTree>
   </p:cSld>
-  <mc:AlternateContent>
+  <p:clrMapOvr>
+    <a:masterClrMapping/>
+  </p:clrMapOvr>
+  <mc:AlternateContent xmlns:mc="http://schemas.openxmlformats.org/markup-compatibility/2006" xmlns:p14="http://schemas.microsoft.com/office/powerpoint/2010/main">
     <mc:Choice Requires="p14">
       <p:transition spd="slow" p14:dur="2000"/>
     </mc:Choice>
-    <mc:Fallback>
+    <mc:Fallback xmlns="" xmlns:p15="http://schemas.microsoft.com/office/powerpoint/2012/main">
       <p:transition spd="slow"/>
     </mc:Fallback>
   </mc:AlternateContent>
@@ -1505,7 +1677,7 @@
 </file>
 
 <file path=ppt/slides/slide11.xml><?xml version="1.0" encoding="utf-8"?>
-<p:sld xmlns:a="http://schemas.openxmlformats.org/drawingml/2006/main" xmlns:p="http://schemas.openxmlformats.org/presentationml/2006/main" xmlns:r="http://schemas.openxmlformats.org/officeDocument/2006/relationships" xmlns:p14="http://schemas.microsoft.com/office/powerpoint/2010/main" xmlns:p15="http://schemas.microsoft.com/office/powerpoint/2012/main" xmlns:mc="http://schemas.openxmlformats.org/markup-compatibility/2006">
+<p:sld xmlns:a="http://schemas.openxmlformats.org/drawingml/2006/main" xmlns:r="http://schemas.openxmlformats.org/officeDocument/2006/relationships" xmlns:p="http://schemas.openxmlformats.org/presentationml/2006/main">
   <p:cSld>
     <p:spTree>
       <p:nvGrpSpPr>
@@ -1548,6 +1720,7 @@
           <a:bodyPr lIns="0" tIns="0" rIns="0" bIns="0" anchor="ctr">
             <a:spAutoFit/>
           </a:bodyPr>
+          <a:lstStyle/>
           <a:p>
             <a:pPr indent="0" algn="l">
               <a:buNone/>
@@ -1599,27 +1772,46 @@
         </p:spPr>
         <p:txBody>
           <a:bodyPr lIns="0" tIns="0" rIns="0" bIns="0" anchor="t">
-            <a:normAutofit fontScale="47500" lnSpcReduction="19999"/>
+            <a:normAutofit fontScale="40000" lnSpcReduction="20000"/>
           </a:bodyPr>
-          <a:p>
-            <a:pPr indent="0" algn="l">
+          <a:lstStyle/>
+          <a:p>
+            <a:pPr algn="l">
               <a:spcBef>
                 <a:spcPts val="1417"/>
               </a:spcBef>
-              <a:buNone/>
-            </a:pPr>
-            <a:r>
-              <a:rPr lang="en-US" sz="2000" b="0" u="none" strike="noStrike">
-                <a:solidFill>
-                  <a:srgbClr val="000000"/>
-                </a:solidFill>
-                <a:effectLst/>
-                <a:uFillTx/>
-                <a:latin typeface="New times roman"/>
-              </a:rPr>
-              <a:t>REQ-72: The system will allow searching for vehicles, drivers, or transport requests by name, type, status, or date.</a:t>
-            </a:r>
-            <a:endParaRPr lang="en-US" sz="2000" b="0" u="none" strike="noStrike">
+            </a:pPr>
+            <a:r>
+              <a:rPr lang="en-US" sz="1000" dirty="0"/>
+              <a:t>✔</a:t>
+            </a:r>
+            <a:r>
+              <a:rPr lang="ro-RO" sz="1000" dirty="0"/>
+              <a:t> </a:t>
+            </a:r>
+            <a:r>
+              <a:rPr lang="en-US" sz="2000" b="0" u="none" strike="noStrike" dirty="0" smtClean="0">
+                <a:solidFill>
+                  <a:srgbClr val="000000"/>
+                </a:solidFill>
+                <a:effectLst/>
+                <a:uFillTx/>
+                <a:latin typeface="New times roman"/>
+              </a:rPr>
+              <a:t>REQ-72</a:t>
+            </a:r>
+            <a:r>
+              <a:rPr lang="en-US" sz="2000" b="0" u="none" strike="noStrike" dirty="0">
+                <a:solidFill>
+                  <a:srgbClr val="000000"/>
+                </a:solidFill>
+                <a:effectLst/>
+                <a:uFillTx/>
+                <a:latin typeface="New times roman"/>
+              </a:rPr>
+              <a:t>: The system will allow searching for vehicles, drivers, or transport requests by name, type, status, or date.</a:t>
+            </a:r>
+            <a:endParaRPr lang="en-US" sz="2000" b="0" u="none" strike="noStrike" dirty="0">
               <a:solidFill>
                 <a:srgbClr val="000000"/>
               </a:solidFill>
@@ -1629,297 +1821,477 @@
             </a:endParaRPr>
           </a:p>
           <a:p>
-            <a:pPr indent="0" algn="l">
+            <a:pPr algn="l">
               <a:spcBef>
                 <a:spcPts val="879"/>
               </a:spcBef>
               <a:spcAft>
                 <a:spcPts val="879"/>
               </a:spcAft>
-              <a:buNone/>
-            </a:pPr>
-            <a:r>
-              <a:rPr lang="en-US" sz="2000" b="0" u="none" strike="noStrike">
-                <a:solidFill>
-                  <a:srgbClr val="000000"/>
-                </a:solidFill>
-                <a:effectLst/>
-                <a:uFillTx/>
-                <a:latin typeface="New times roman"/>
-              </a:rPr>
-              <a:t>REQ-73: The system shall record the username of the last staff member who modified a transport request, fulfilling the "fingerprint" requirement.</a:t>
-            </a:r>
-            <a:endParaRPr lang="en-US" sz="2000" b="0" u="none" strike="noStrike">
-              <a:solidFill>
-                <a:srgbClr val="000000"/>
-              </a:solidFill>
-              <a:effectLst/>
-              <a:uFillTx/>
-              <a:latin typeface="Times New Roman"/>
-            </a:endParaRPr>
-          </a:p>
-          <a:p>
-            <a:pPr indent="0" algn="l">
+            </a:pPr>
+            <a:r>
+              <a:rPr lang="en-US" sz="1000" dirty="0"/>
+              <a:t>✔</a:t>
+            </a:r>
+            <a:r>
+              <a:rPr lang="ro-RO" sz="1000" dirty="0"/>
+              <a:t> </a:t>
+            </a:r>
+            <a:r>
+              <a:rPr lang="en-US" sz="2000" b="0" u="none" strike="noStrike" dirty="0" smtClean="0">
+                <a:solidFill>
+                  <a:srgbClr val="000000"/>
+                </a:solidFill>
+                <a:effectLst/>
+                <a:uFillTx/>
+                <a:latin typeface="New times roman"/>
+              </a:rPr>
+              <a:t>REQ-73</a:t>
+            </a:r>
+            <a:r>
+              <a:rPr lang="en-US" sz="2000" b="0" u="none" strike="noStrike" dirty="0">
+                <a:solidFill>
+                  <a:srgbClr val="000000"/>
+                </a:solidFill>
+                <a:effectLst/>
+                <a:uFillTx/>
+                <a:latin typeface="New times roman"/>
+              </a:rPr>
+              <a:t>: The system shall record the username of the last staff member who modified a transport request, fulfilling the "fingerprint" requirement.</a:t>
+            </a:r>
+            <a:endParaRPr lang="en-US" sz="2000" b="0" u="none" strike="noStrike" dirty="0">
+              <a:solidFill>
+                <a:srgbClr val="000000"/>
+              </a:solidFill>
+              <a:effectLst/>
+              <a:uFillTx/>
+              <a:latin typeface="Times New Roman"/>
+            </a:endParaRPr>
+          </a:p>
+          <a:p>
+            <a:pPr algn="l">
               <a:spcBef>
                 <a:spcPts val="879"/>
               </a:spcBef>
               <a:spcAft>
                 <a:spcPts val="879"/>
               </a:spcAft>
-              <a:buNone/>
-            </a:pPr>
-            <a:r>
-              <a:rPr lang="en-US" sz="2000" b="0" u="none" strike="noStrike">
-                <a:solidFill>
-                  <a:srgbClr val="000000"/>
-                </a:solidFill>
-                <a:effectLst/>
-                <a:uFillTx/>
-                <a:latin typeface="New times roman"/>
-              </a:rPr>
-              <a:t>REQ-74: The system shall record the exact timestamp when the transport request was last modified.</a:t>
-            </a:r>
-            <a:endParaRPr lang="en-US" sz="2000" b="0" u="none" strike="noStrike">
-              <a:solidFill>
-                <a:srgbClr val="000000"/>
-              </a:solidFill>
-              <a:effectLst/>
-              <a:uFillTx/>
-              <a:latin typeface="Times New Roman"/>
-            </a:endParaRPr>
-          </a:p>
-          <a:p>
-            <a:pPr indent="0" algn="l">
+            </a:pPr>
+            <a:r>
+              <a:rPr lang="en-US" sz="1000" dirty="0"/>
+              <a:t>✔</a:t>
+            </a:r>
+            <a:r>
+              <a:rPr lang="ro-RO" sz="1000" dirty="0"/>
+              <a:t> </a:t>
+            </a:r>
+            <a:r>
+              <a:rPr lang="en-US" sz="2000" b="0" u="none" strike="noStrike" dirty="0" smtClean="0">
+                <a:solidFill>
+                  <a:srgbClr val="000000"/>
+                </a:solidFill>
+                <a:effectLst/>
+                <a:uFillTx/>
+                <a:latin typeface="New times roman"/>
+              </a:rPr>
+              <a:t>REQ-74</a:t>
+            </a:r>
+            <a:r>
+              <a:rPr lang="en-US" sz="2000" b="0" u="none" strike="noStrike" dirty="0">
+                <a:solidFill>
+                  <a:srgbClr val="000000"/>
+                </a:solidFill>
+                <a:effectLst/>
+                <a:uFillTx/>
+                <a:latin typeface="New times roman"/>
+              </a:rPr>
+              <a:t>: The system shall record the exact timestamp when the transport request was last modified.</a:t>
+            </a:r>
+            <a:endParaRPr lang="en-US" sz="2000" b="0" u="none" strike="noStrike" dirty="0">
+              <a:solidFill>
+                <a:srgbClr val="000000"/>
+              </a:solidFill>
+              <a:effectLst/>
+              <a:uFillTx/>
+              <a:latin typeface="Times New Roman"/>
+            </a:endParaRPr>
+          </a:p>
+          <a:p>
+            <a:pPr algn="l">
               <a:spcBef>
                 <a:spcPts val="879"/>
               </a:spcBef>
               <a:spcAft>
                 <a:spcPts val="879"/>
               </a:spcAft>
-              <a:buNone/>
-            </a:pPr>
-            <a:r>
-              <a:rPr lang="en-US" sz="2000" b="0" u="none" strike="noStrike">
-                <a:solidFill>
-                  <a:srgbClr val="000000"/>
-                </a:solidFill>
-                <a:effectLst/>
-                <a:uFillTx/>
-                <a:latin typeface="New times roman"/>
-              </a:rPr>
-              <a:t>REQ-75: The system shall record the username of the last staff member who modified a resource assignment (vehicle/driver).</a:t>
-            </a:r>
-            <a:endParaRPr lang="en-US" sz="2000" b="0" u="none" strike="noStrike">
-              <a:solidFill>
-                <a:srgbClr val="000000"/>
-              </a:solidFill>
-              <a:effectLst/>
-              <a:uFillTx/>
-              <a:latin typeface="Times New Roman"/>
-            </a:endParaRPr>
-          </a:p>
-          <a:p>
-            <a:pPr indent="0" algn="l">
+            </a:pPr>
+            <a:r>
+              <a:rPr lang="en-US" sz="1000" dirty="0"/>
+              <a:t>✔</a:t>
+            </a:r>
+            <a:r>
+              <a:rPr lang="ro-RO" sz="1000" dirty="0"/>
+              <a:t> </a:t>
+            </a:r>
+            <a:r>
+              <a:rPr lang="en-US" sz="2000" b="0" u="none" strike="noStrike" dirty="0" smtClean="0">
+                <a:solidFill>
+                  <a:srgbClr val="000000"/>
+                </a:solidFill>
+                <a:effectLst/>
+                <a:uFillTx/>
+                <a:latin typeface="New times roman"/>
+              </a:rPr>
+              <a:t>REQ-75</a:t>
+            </a:r>
+            <a:r>
+              <a:rPr lang="en-US" sz="2000" b="0" u="none" strike="noStrike" dirty="0">
+                <a:solidFill>
+                  <a:srgbClr val="000000"/>
+                </a:solidFill>
+                <a:effectLst/>
+                <a:uFillTx/>
+                <a:latin typeface="New times roman"/>
+              </a:rPr>
+              <a:t>: The system shall record the username of the last staff member who modified a resource assignment (vehicle/driver).</a:t>
+            </a:r>
+            <a:endParaRPr lang="en-US" sz="2000" b="0" u="none" strike="noStrike" dirty="0">
+              <a:solidFill>
+                <a:srgbClr val="000000"/>
+              </a:solidFill>
+              <a:effectLst/>
+              <a:uFillTx/>
+              <a:latin typeface="Times New Roman"/>
+            </a:endParaRPr>
+          </a:p>
+          <a:p>
+            <a:pPr algn="l">
               <a:spcBef>
                 <a:spcPts val="879"/>
               </a:spcBef>
               <a:spcAft>
                 <a:spcPts val="879"/>
               </a:spcAft>
-              <a:buNone/>
-            </a:pPr>
-            <a:r>
-              <a:rPr lang="en-US" sz="2000" b="0" u="none" strike="noStrike">
-                <a:solidFill>
-                  <a:srgbClr val="000000"/>
-                </a:solidFill>
-                <a:effectLst/>
-                <a:uFillTx/>
-                <a:latin typeface="New times roman"/>
-              </a:rPr>
-              <a:t>REQ-76: The system shall assign a specific graphic representation (e.g., a specific icon or image) to each vehicle type.</a:t>
-            </a:r>
-            <a:endParaRPr lang="en-US" sz="2000" b="0" u="none" strike="noStrike">
-              <a:solidFill>
-                <a:srgbClr val="000000"/>
-              </a:solidFill>
-              <a:effectLst/>
-              <a:uFillTx/>
-              <a:latin typeface="Times New Roman"/>
-            </a:endParaRPr>
-          </a:p>
-          <a:p>
-            <a:pPr indent="0" algn="l">
+            </a:pPr>
+            <a:r>
+              <a:rPr lang="en-US" sz="1000" dirty="0"/>
+              <a:t>✔</a:t>
+            </a:r>
+            <a:r>
+              <a:rPr lang="ro-RO" sz="1000" dirty="0"/>
+              <a:t> </a:t>
+            </a:r>
+            <a:r>
+              <a:rPr lang="en-US" sz="2000" b="0" u="none" strike="noStrike" dirty="0" smtClean="0">
+                <a:solidFill>
+                  <a:srgbClr val="000000"/>
+                </a:solidFill>
+                <a:effectLst/>
+                <a:uFillTx/>
+                <a:latin typeface="New times roman"/>
+              </a:rPr>
+              <a:t>REQ-76</a:t>
+            </a:r>
+            <a:r>
+              <a:rPr lang="en-US" sz="2000" b="0" u="none" strike="noStrike" dirty="0">
+                <a:solidFill>
+                  <a:srgbClr val="000000"/>
+                </a:solidFill>
+                <a:effectLst/>
+                <a:uFillTx/>
+                <a:latin typeface="New times roman"/>
+              </a:rPr>
+              <a:t>: The system shall assign a specific graphic representation (e.g., a specific icon or image) to each vehicle type.</a:t>
+            </a:r>
+            <a:endParaRPr lang="en-US" sz="2000" b="0" u="none" strike="noStrike" dirty="0">
+              <a:solidFill>
+                <a:srgbClr val="000000"/>
+              </a:solidFill>
+              <a:effectLst/>
+              <a:uFillTx/>
+              <a:latin typeface="Times New Roman"/>
+            </a:endParaRPr>
+          </a:p>
+          <a:p>
+            <a:pPr algn="l">
               <a:spcBef>
                 <a:spcPts val="879"/>
               </a:spcBef>
               <a:spcAft>
                 <a:spcPts val="879"/>
               </a:spcAft>
-              <a:buNone/>
-            </a:pPr>
-            <a:r>
-              <a:rPr lang="en-US" sz="2000" b="0" u="none" strike="noStrike">
-                <a:solidFill>
-                  <a:srgbClr val="000000"/>
-                </a:solidFill>
-                <a:effectLst/>
-                <a:uFillTx/>
-                <a:latin typeface="New times roman"/>
-              </a:rPr>
-              <a:t>REQ-77: The system shall visually link vehicles, drivers, and active jobs using a node-based graph or oriented lines in the UI.</a:t>
-            </a:r>
-            <a:endParaRPr lang="en-US" sz="2000" b="0" u="none" strike="noStrike">
-              <a:solidFill>
-                <a:srgbClr val="000000"/>
-              </a:solidFill>
-              <a:effectLst/>
-              <a:uFillTx/>
-              <a:latin typeface="Times New Roman"/>
-            </a:endParaRPr>
-          </a:p>
-          <a:p>
-            <a:pPr indent="0" algn="l">
+            </a:pPr>
+            <a:r>
+              <a:rPr lang="en-US" sz="1000" dirty="0"/>
+              <a:t>✔</a:t>
+            </a:r>
+            <a:r>
+              <a:rPr lang="ro-RO" sz="1000" dirty="0"/>
+              <a:t> </a:t>
+            </a:r>
+            <a:r>
+              <a:rPr lang="en-US" sz="2000" b="0" u="none" strike="noStrike" dirty="0" smtClean="0">
+                <a:solidFill>
+                  <a:srgbClr val="000000"/>
+                </a:solidFill>
+                <a:effectLst/>
+                <a:uFillTx/>
+                <a:latin typeface="New times roman"/>
+              </a:rPr>
+              <a:t>REQ-77</a:t>
+            </a:r>
+            <a:r>
+              <a:rPr lang="en-US" sz="2000" b="0" u="none" strike="noStrike" dirty="0">
+                <a:solidFill>
+                  <a:srgbClr val="000000"/>
+                </a:solidFill>
+                <a:effectLst/>
+                <a:uFillTx/>
+                <a:latin typeface="New times roman"/>
+              </a:rPr>
+              <a:t>: The system shall visually link vehicles, drivers, and active jobs using a node-based graph or oriented lines in the UI.</a:t>
+            </a:r>
+            <a:endParaRPr lang="en-US" sz="2000" b="0" u="none" strike="noStrike" dirty="0">
+              <a:solidFill>
+                <a:srgbClr val="000000"/>
+              </a:solidFill>
+              <a:effectLst/>
+              <a:uFillTx/>
+              <a:latin typeface="Times New Roman"/>
+            </a:endParaRPr>
+          </a:p>
+          <a:p>
+            <a:pPr algn="l">
               <a:spcBef>
                 <a:spcPts val="879"/>
               </a:spcBef>
               <a:spcAft>
                 <a:spcPts val="879"/>
               </a:spcAft>
-              <a:buNone/>
-            </a:pPr>
-            <a:r>
-              <a:rPr lang="en-US" sz="2000" b="0" u="none" strike="noStrike">
-                <a:solidFill>
-                  <a:srgbClr val="000000"/>
-                </a:solidFill>
-                <a:effectLst/>
-                <a:uFillTx/>
-                <a:latin typeface="New times roman"/>
-              </a:rPr>
-              <a:t>REQ-78: The system shall display annotations on the oriented lines to describe the exact relationship (e.g., "Assigned to", "Driving").</a:t>
-            </a:r>
-            <a:endParaRPr lang="en-US" sz="2000" b="0" u="none" strike="noStrike">
-              <a:solidFill>
-                <a:srgbClr val="000000"/>
-              </a:solidFill>
-              <a:effectLst/>
-              <a:uFillTx/>
-              <a:latin typeface="Times New Roman"/>
-            </a:endParaRPr>
-          </a:p>
-          <a:p>
-            <a:pPr indent="0" algn="l">
+            </a:pPr>
+            <a:r>
+              <a:rPr lang="en-US" sz="1000" dirty="0"/>
+              <a:t>✔</a:t>
+            </a:r>
+            <a:r>
+              <a:rPr lang="ro-RO" sz="1000" dirty="0"/>
+              <a:t> </a:t>
+            </a:r>
+            <a:r>
+              <a:rPr lang="en-US" sz="2000" b="0" u="none" strike="noStrike" dirty="0" smtClean="0">
+                <a:solidFill>
+                  <a:srgbClr val="000000"/>
+                </a:solidFill>
+                <a:effectLst/>
+                <a:uFillTx/>
+                <a:latin typeface="New times roman"/>
+              </a:rPr>
+              <a:t>REQ-78</a:t>
+            </a:r>
+            <a:r>
+              <a:rPr lang="en-US" sz="2000" b="0" u="none" strike="noStrike" dirty="0">
+                <a:solidFill>
+                  <a:srgbClr val="000000"/>
+                </a:solidFill>
+                <a:effectLst/>
+                <a:uFillTx/>
+                <a:latin typeface="New times roman"/>
+              </a:rPr>
+              <a:t>: The system shall display annotations on the oriented lines to describe the exact relationship (e.g., "Assigned to", "Driving").</a:t>
+            </a:r>
+            <a:endParaRPr lang="en-US" sz="2000" b="0" u="none" strike="noStrike" dirty="0">
+              <a:solidFill>
+                <a:srgbClr val="000000"/>
+              </a:solidFill>
+              <a:effectLst/>
+              <a:uFillTx/>
+              <a:latin typeface="Times New Roman"/>
+            </a:endParaRPr>
+          </a:p>
+          <a:p>
+            <a:pPr algn="l">
               <a:spcBef>
                 <a:spcPts val="879"/>
               </a:spcBef>
               <a:spcAft>
                 <a:spcPts val="879"/>
               </a:spcAft>
-              <a:buNone/>
-            </a:pPr>
-            <a:r>
-              <a:rPr lang="en-US" sz="2000" b="0" u="none" strike="noStrike">
-                <a:solidFill>
-                  <a:srgbClr val="000000"/>
-                </a:solidFill>
-                <a:effectLst/>
-                <a:uFillTx/>
-                <a:latin typeface="New times roman"/>
-              </a:rPr>
-              <a:t>REQ-79: The information system will allow graphical visualization of the entire fleet using a color-coded dashboard.</a:t>
-            </a:r>
-            <a:endParaRPr lang="en-US" sz="2000" b="0" u="none" strike="noStrike">
-              <a:solidFill>
-                <a:srgbClr val="000000"/>
-              </a:solidFill>
-              <a:effectLst/>
-              <a:uFillTx/>
-              <a:latin typeface="Times New Roman"/>
-            </a:endParaRPr>
-          </a:p>
-          <a:p>
-            <a:pPr indent="0" algn="l">
+            </a:pPr>
+            <a:r>
+              <a:rPr lang="en-US" sz="1000" dirty="0"/>
+              <a:t>✔</a:t>
+            </a:r>
+            <a:r>
+              <a:rPr lang="ro-RO" sz="1000" dirty="0"/>
+              <a:t> </a:t>
+            </a:r>
+            <a:r>
+              <a:rPr lang="en-US" sz="2000" b="0" u="none" strike="noStrike" dirty="0" smtClean="0">
+                <a:solidFill>
+                  <a:srgbClr val="000000"/>
+                </a:solidFill>
+                <a:effectLst/>
+                <a:uFillTx/>
+                <a:latin typeface="New times roman"/>
+              </a:rPr>
+              <a:t>REQ-79</a:t>
+            </a:r>
+            <a:r>
+              <a:rPr lang="en-US" sz="2000" b="0" u="none" strike="noStrike" dirty="0">
+                <a:solidFill>
+                  <a:srgbClr val="000000"/>
+                </a:solidFill>
+                <a:effectLst/>
+                <a:uFillTx/>
+                <a:latin typeface="New times roman"/>
+              </a:rPr>
+              <a:t>: The information system will allow graphical visualization of the entire fleet using a color-coded dashboard.</a:t>
+            </a:r>
+            <a:endParaRPr lang="en-US" sz="2000" b="0" u="none" strike="noStrike" dirty="0">
+              <a:solidFill>
+                <a:srgbClr val="000000"/>
+              </a:solidFill>
+              <a:effectLst/>
+              <a:uFillTx/>
+              <a:latin typeface="Times New Roman"/>
+            </a:endParaRPr>
+          </a:p>
+          <a:p>
+            <a:pPr algn="l">
               <a:spcBef>
                 <a:spcPts val="879"/>
               </a:spcBef>
               <a:spcAft>
                 <a:spcPts val="879"/>
               </a:spcAft>
-              <a:buNone/>
-            </a:pPr>
-            <a:r>
-              <a:rPr lang="en-US" sz="2000" b="0" u="none" strike="noStrike">
-                <a:solidFill>
-                  <a:srgbClr val="000000"/>
-                </a:solidFill>
-                <a:effectLst/>
-                <a:uFillTx/>
-                <a:latin typeface="New times roman"/>
-              </a:rPr>
-              <a:t>REQ-80: The information system will allow graphical visualization of the map and the driver availability through a timeline or calendar interface.</a:t>
-            </a:r>
-            <a:endParaRPr lang="en-US" sz="2000" b="0" u="none" strike="noStrike">
-              <a:solidFill>
-                <a:srgbClr val="000000"/>
-              </a:solidFill>
-              <a:effectLst/>
-              <a:uFillTx/>
-              <a:latin typeface="Times New Roman"/>
-            </a:endParaRPr>
-          </a:p>
-          <a:p>
-            <a:pPr indent="0" algn="l">
+            </a:pPr>
+            <a:r>
+              <a:rPr lang="en-US" sz="1000" dirty="0"/>
+              <a:t>✔</a:t>
+            </a:r>
+            <a:r>
+              <a:rPr lang="ro-RO" sz="1000" dirty="0"/>
+              <a:t> </a:t>
+            </a:r>
+            <a:r>
+              <a:rPr lang="en-US" sz="2000" b="0" u="none" strike="noStrike" dirty="0" smtClean="0">
+                <a:solidFill>
+                  <a:srgbClr val="000000"/>
+                </a:solidFill>
+                <a:effectLst/>
+                <a:uFillTx/>
+                <a:latin typeface="New times roman"/>
+              </a:rPr>
+              <a:t>REQ-80</a:t>
+            </a:r>
+            <a:r>
+              <a:rPr lang="en-US" sz="2000" b="0" u="none" strike="noStrike" dirty="0">
+                <a:solidFill>
+                  <a:srgbClr val="000000"/>
+                </a:solidFill>
+                <a:effectLst/>
+                <a:uFillTx/>
+                <a:latin typeface="New times roman"/>
+              </a:rPr>
+              <a:t>: The information system will allow graphical visualization of the map and the driver availability through a timeline or calendar interface.</a:t>
+            </a:r>
+            <a:endParaRPr lang="en-US" sz="2000" b="0" u="none" strike="noStrike" dirty="0">
+              <a:solidFill>
+                <a:srgbClr val="000000"/>
+              </a:solidFill>
+              <a:effectLst/>
+              <a:uFillTx/>
+              <a:latin typeface="Times New Roman"/>
+            </a:endParaRPr>
+          </a:p>
+          <a:p>
+            <a:pPr algn="l">
               <a:spcBef>
                 <a:spcPts val="879"/>
               </a:spcBef>
               <a:spcAft>
                 <a:spcPts val="879"/>
               </a:spcAft>
-              <a:buNone/>
-            </a:pPr>
-            <a:r>
-              <a:rPr lang="en-US" sz="2000" b="0" u="none" strike="noStrike">
-                <a:solidFill>
-                  <a:srgbClr val="000000"/>
-                </a:solidFill>
-                <a:effectLst/>
-                <a:uFillTx/>
-                <a:latin typeface="New times roman"/>
-              </a:rPr>
-              <a:t>REQ-81: The information system will allow graphical visualization of active transport requests using an interactive grid or map module.</a:t>
-            </a:r>
-            <a:endParaRPr lang="en-US" sz="2000" b="0" u="none" strike="noStrike">
-              <a:solidFill>
-                <a:srgbClr val="000000"/>
-              </a:solidFill>
-              <a:effectLst/>
-              <a:uFillTx/>
-              <a:latin typeface="Times New Roman"/>
-            </a:endParaRPr>
-          </a:p>
-          <a:p>
-            <a:pPr indent="0" algn="l">
+            </a:pPr>
+            <a:r>
+              <a:rPr lang="en-US" sz="1000" dirty="0"/>
+              <a:t>✔</a:t>
+            </a:r>
+            <a:r>
+              <a:rPr lang="ro-RO" sz="1000" dirty="0"/>
+              <a:t> </a:t>
+            </a:r>
+            <a:r>
+              <a:rPr lang="en-US" sz="2000" b="0" u="none" strike="noStrike" dirty="0" smtClean="0">
+                <a:solidFill>
+                  <a:srgbClr val="000000"/>
+                </a:solidFill>
+                <a:effectLst/>
+                <a:uFillTx/>
+                <a:latin typeface="New times roman"/>
+              </a:rPr>
+              <a:t>REQ-81</a:t>
+            </a:r>
+            <a:r>
+              <a:rPr lang="en-US" sz="2000" b="0" u="none" strike="noStrike" dirty="0">
+                <a:solidFill>
+                  <a:srgbClr val="000000"/>
+                </a:solidFill>
+                <a:effectLst/>
+                <a:uFillTx/>
+                <a:latin typeface="New times roman"/>
+              </a:rPr>
+              <a:t>: The information system will allow graphical visualization of active transport requests using an interactive grid or map module.</a:t>
+            </a:r>
+            <a:endParaRPr lang="en-US" sz="2000" b="0" u="none" strike="noStrike" dirty="0">
+              <a:solidFill>
+                <a:srgbClr val="000000"/>
+              </a:solidFill>
+              <a:effectLst/>
+              <a:uFillTx/>
+              <a:latin typeface="Times New Roman"/>
+            </a:endParaRPr>
+          </a:p>
+          <a:p>
+            <a:pPr algn="l">
               <a:spcBef>
                 <a:spcPts val="879"/>
               </a:spcBef>
               <a:spcAft>
                 <a:spcPts val="879"/>
               </a:spcAft>
-              <a:buNone/>
-            </a:pPr>
-            <a:r>
-              <a:rPr lang="en-US" sz="2000" b="0" u="none" strike="noStrike">
-                <a:solidFill>
-                  <a:srgbClr val="000000"/>
-                </a:solidFill>
-                <a:effectLst/>
-                <a:uFillTx/>
-                <a:latin typeface="New times roman"/>
-              </a:rPr>
-              <a:t>REQ-82: Both the client and the server applications shall provide a simple and intuitive graphical interface for users.</a:t>
-            </a:r>
-            <a:endParaRPr lang="en-US" sz="2000" b="0" u="none" strike="noStrike">
+            </a:pPr>
+            <a:r>
+              <a:rPr lang="en-US" sz="1000" dirty="0"/>
+              <a:t>✔</a:t>
+            </a:r>
+            <a:r>
+              <a:rPr lang="ro-RO" sz="1000" dirty="0"/>
+              <a:t> </a:t>
+            </a:r>
+            <a:r>
+              <a:rPr lang="en-US" sz="2000" b="0" u="none" strike="noStrike" dirty="0" smtClean="0">
+                <a:solidFill>
+                  <a:srgbClr val="000000"/>
+                </a:solidFill>
+                <a:effectLst/>
+                <a:uFillTx/>
+                <a:latin typeface="New times roman"/>
+              </a:rPr>
+              <a:t>REQ-82</a:t>
+            </a:r>
+            <a:r>
+              <a:rPr lang="en-US" sz="2000" b="0" u="none" strike="noStrike" dirty="0">
+                <a:solidFill>
+                  <a:srgbClr val="000000"/>
+                </a:solidFill>
+                <a:effectLst/>
+                <a:uFillTx/>
+                <a:latin typeface="New times roman"/>
+              </a:rPr>
+              <a:t>: Both the client and the server applications shall provide a simple and intuitive graphical interface for users.</a:t>
+            </a:r>
+            <a:endParaRPr lang="en-US" sz="2000" b="0" u="none" strike="noStrike" dirty="0">
               <a:solidFill>
                 <a:srgbClr val="000000"/>
               </a:solidFill>
@@ -1932,19 +2304,29 @@
       </p:sp>
     </p:spTree>
   </p:cSld>
-  <mc:AlternateContent>
+  <p:clrMapOvr>
+    <a:masterClrMapping/>
+  </p:clrMapOvr>
+  <mc:AlternateContent xmlns:mc="http://schemas.openxmlformats.org/markup-compatibility/2006" xmlns:p14="http://schemas.microsoft.com/office/powerpoint/2010/main">
     <mc:Choice Requires="p14">
       <p:transition spd="slow" p14:dur="2000"/>
     </mc:Choice>
-    <mc:Fallback>
+    <mc:Fallback xmlns="" xmlns:p15="http://schemas.microsoft.com/office/powerpoint/2012/main">
       <p:transition spd="slow"/>
     </mc:Fallback>
   </mc:AlternateContent>
+  <p:timing>
+    <p:tnLst>
+      <p:par>
+        <p:cTn id="1" dur="indefinite" restart="never" nodeType="tmRoot"/>
+      </p:par>
+    </p:tnLst>
+  </p:timing>
 </p:sld>
 </file>
 
 <file path=ppt/slides/slide12.xml><?xml version="1.0" encoding="utf-8"?>
-<p:sld xmlns:a="http://schemas.openxmlformats.org/drawingml/2006/main" xmlns:p="http://schemas.openxmlformats.org/presentationml/2006/main" xmlns:r="http://schemas.openxmlformats.org/officeDocument/2006/relationships" xmlns:p14="http://schemas.microsoft.com/office/powerpoint/2010/main" xmlns:p15="http://schemas.microsoft.com/office/powerpoint/2012/main" xmlns:mc="http://schemas.openxmlformats.org/markup-compatibility/2006">
+<p:sld xmlns:a="http://schemas.openxmlformats.org/drawingml/2006/main" xmlns:r="http://schemas.openxmlformats.org/officeDocument/2006/relationships" xmlns:p="http://schemas.openxmlformats.org/presentationml/2006/main">
   <p:cSld>
     <p:spTree>
       <p:nvGrpSpPr>
@@ -1987,6 +2369,7 @@
           <a:bodyPr lIns="0" tIns="0" rIns="0" bIns="0" anchor="ctr">
             <a:spAutoFit/>
           </a:bodyPr>
+          <a:lstStyle/>
           <a:p>
             <a:pPr indent="0" algn="l">
               <a:buNone/>
@@ -2040,25 +2423,44 @@
           <a:bodyPr lIns="0" tIns="0" rIns="0" bIns="0" anchor="t">
             <a:normAutofit/>
           </a:bodyPr>
-          <a:p>
-            <a:pPr indent="0" algn="l">
+          <a:lstStyle/>
+          <a:p>
+            <a:pPr algn="l">
               <a:spcBef>
                 <a:spcPts val="1417"/>
               </a:spcBef>
-              <a:buNone/>
-            </a:pPr>
-            <a:r>
-              <a:rPr lang="en-US" sz="2000" b="0" u="none" strike="noStrike">
-                <a:solidFill>
-                  <a:srgbClr val="000000"/>
-                </a:solidFill>
-                <a:effectLst/>
-                <a:uFillTx/>
-                <a:latin typeface="New times roman"/>
-              </a:rPr>
-              <a:t>REQ-83: The system will allow administrators and company staff to generate reports regarding fleet usage.</a:t>
-            </a:r>
-            <a:endParaRPr lang="en-US" sz="2000" b="0" u="none" strike="noStrike">
+            </a:pPr>
+            <a:r>
+              <a:rPr lang="en-US" sz="2000" dirty="0"/>
+              <a:t>✔</a:t>
+            </a:r>
+            <a:r>
+              <a:rPr lang="ro-RO" sz="2000" dirty="0"/>
+              <a:t> </a:t>
+            </a:r>
+            <a:r>
+              <a:rPr lang="en-US" sz="2000" b="0" u="none" strike="noStrike" dirty="0" smtClean="0">
+                <a:solidFill>
+                  <a:srgbClr val="000000"/>
+                </a:solidFill>
+                <a:effectLst/>
+                <a:uFillTx/>
+                <a:latin typeface="New times roman"/>
+              </a:rPr>
+              <a:t>REQ-83</a:t>
+            </a:r>
+            <a:r>
+              <a:rPr lang="en-US" sz="2000" b="0" u="none" strike="noStrike" dirty="0">
+                <a:solidFill>
+                  <a:srgbClr val="000000"/>
+                </a:solidFill>
+                <a:effectLst/>
+                <a:uFillTx/>
+                <a:latin typeface="New times roman"/>
+              </a:rPr>
+              <a:t>: The system will allow administrators and company staff to generate reports regarding fleet usage.</a:t>
+            </a:r>
+            <a:endParaRPr lang="en-US" sz="2000" b="0" u="none" strike="noStrike" dirty="0">
               <a:solidFill>
                 <a:srgbClr val="000000"/>
               </a:solidFill>
@@ -2068,87 +2470,141 @@
             </a:endParaRPr>
           </a:p>
           <a:p>
-            <a:pPr indent="0" algn="l">
+            <a:pPr algn="l">
               <a:spcBef>
                 <a:spcPts val="879"/>
               </a:spcBef>
               <a:spcAft>
                 <a:spcPts val="879"/>
               </a:spcAft>
-              <a:buNone/>
-            </a:pPr>
-            <a:r>
-              <a:rPr lang="en-US" sz="2000" b="0" u="none" strike="noStrike">
-                <a:solidFill>
-                  <a:srgbClr val="000000"/>
-                </a:solidFill>
-                <a:effectLst/>
-                <a:uFillTx/>
-                <a:latin typeface="New times roman"/>
-              </a:rPr>
-              <a:t>REQ-84: The system will allow administrators and company staff to generate reports regarding driver activity.</a:t>
-            </a:r>
-            <a:endParaRPr lang="en-US" sz="2000" b="0" u="none" strike="noStrike">
-              <a:solidFill>
-                <a:srgbClr val="000000"/>
-              </a:solidFill>
-              <a:effectLst/>
-              <a:uFillTx/>
-              <a:latin typeface="Times New Roman"/>
-            </a:endParaRPr>
-          </a:p>
-          <a:p>
-            <a:pPr indent="0" algn="l">
+            </a:pPr>
+            <a:r>
+              <a:rPr lang="en-US" sz="2000" dirty="0"/>
+              <a:t>✔</a:t>
+            </a:r>
+            <a:r>
+              <a:rPr lang="ro-RO" sz="2000" dirty="0"/>
+              <a:t> </a:t>
+            </a:r>
+            <a:r>
+              <a:rPr lang="en-US" sz="2000" b="0" u="none" strike="noStrike" dirty="0" smtClean="0">
+                <a:solidFill>
+                  <a:srgbClr val="000000"/>
+                </a:solidFill>
+                <a:effectLst/>
+                <a:uFillTx/>
+                <a:latin typeface="New times roman"/>
+              </a:rPr>
+              <a:t>REQ-84</a:t>
+            </a:r>
+            <a:r>
+              <a:rPr lang="en-US" sz="2000" b="0" u="none" strike="noStrike" dirty="0">
+                <a:solidFill>
+                  <a:srgbClr val="000000"/>
+                </a:solidFill>
+                <a:effectLst/>
+                <a:uFillTx/>
+                <a:latin typeface="New times roman"/>
+              </a:rPr>
+              <a:t>: The system will allow administrators and company staff to generate reports regarding driver activity.</a:t>
+            </a:r>
+            <a:endParaRPr lang="en-US" sz="2000" b="0" u="none" strike="noStrike" dirty="0">
+              <a:solidFill>
+                <a:srgbClr val="000000"/>
+              </a:solidFill>
+              <a:effectLst/>
+              <a:uFillTx/>
+              <a:latin typeface="Times New Roman"/>
+            </a:endParaRPr>
+          </a:p>
+          <a:p>
+            <a:pPr algn="l">
               <a:spcBef>
                 <a:spcPts val="879"/>
               </a:spcBef>
               <a:spcAft>
                 <a:spcPts val="879"/>
               </a:spcAft>
-              <a:buNone/>
-            </a:pPr>
-            <a:r>
-              <a:rPr lang="en-US" sz="2000" b="0" u="none" strike="noStrike">
-                <a:solidFill>
-                  <a:srgbClr val="000000"/>
-                </a:solidFill>
-                <a:effectLst/>
-                <a:uFillTx/>
-                <a:latin typeface="New times roman"/>
-              </a:rPr>
-              <a:t>REQ-85: The system will allow administrators and company staff to generate reports regarding completed transport jobs.</a:t>
-            </a:r>
-            <a:endParaRPr lang="en-US" sz="2000" b="0" u="none" strike="noStrike">
-              <a:solidFill>
-                <a:srgbClr val="000000"/>
-              </a:solidFill>
-              <a:effectLst/>
-              <a:uFillTx/>
-              <a:latin typeface="Times New Roman"/>
-            </a:endParaRPr>
-          </a:p>
-          <a:p>
-            <a:pPr indent="0" algn="l">
+            </a:pPr>
+            <a:r>
+              <a:rPr lang="en-US" sz="2000" dirty="0"/>
+              <a:t>✔</a:t>
+            </a:r>
+            <a:r>
+              <a:rPr lang="ro-RO" sz="2000" dirty="0"/>
+              <a:t> </a:t>
+            </a:r>
+            <a:r>
+              <a:rPr lang="en-US" sz="2000" b="0" u="none" strike="noStrike" dirty="0" smtClean="0">
+                <a:solidFill>
+                  <a:srgbClr val="000000"/>
+                </a:solidFill>
+                <a:effectLst/>
+                <a:uFillTx/>
+                <a:latin typeface="New times roman"/>
+              </a:rPr>
+              <a:t>REQ-85</a:t>
+            </a:r>
+            <a:r>
+              <a:rPr lang="en-US" sz="2000" b="0" u="none" strike="noStrike" dirty="0">
+                <a:solidFill>
+                  <a:srgbClr val="000000"/>
+                </a:solidFill>
+                <a:effectLst/>
+                <a:uFillTx/>
+                <a:latin typeface="New times roman"/>
+              </a:rPr>
+              <a:t>: The system will allow administrators and company staff to generate reports regarding completed transport jobs.</a:t>
+            </a:r>
+            <a:endParaRPr lang="en-US" sz="2000" b="0" u="none" strike="noStrike" dirty="0">
+              <a:solidFill>
+                <a:srgbClr val="000000"/>
+              </a:solidFill>
+              <a:effectLst/>
+              <a:uFillTx/>
+              <a:latin typeface="Times New Roman"/>
+            </a:endParaRPr>
+          </a:p>
+          <a:p>
+            <a:pPr algn="l">
               <a:spcBef>
                 <a:spcPts val="879"/>
               </a:spcBef>
               <a:spcAft>
                 <a:spcPts val="879"/>
               </a:spcAft>
-              <a:buNone/>
-            </a:pPr>
-            <a:r>
-              <a:rPr lang="en-US" sz="2000" b="0" u="none" strike="noStrike">
-                <a:solidFill>
-                  <a:srgbClr val="000000"/>
-                </a:solidFill>
-                <a:effectLst/>
-                <a:uFillTx/>
-                <a:latin typeface="New times roman"/>
-              </a:rPr>
-              <a:t>REQ-86: The system shall allow users to export the generated reports to a standard local file format (e.g., CSV or TXT).</a:t>
-            </a:r>
-            <a:endParaRPr lang="en-US" sz="2000" b="0" u="none" strike="noStrike">
+            </a:pPr>
+            <a:r>
+              <a:rPr lang="en-US" sz="2000" dirty="0"/>
+              <a:t>✔</a:t>
+            </a:r>
+            <a:r>
+              <a:rPr lang="ro-RO" sz="2000" dirty="0"/>
+              <a:t> </a:t>
+            </a:r>
+            <a:r>
+              <a:rPr lang="en-US" sz="2000" b="0" u="none" strike="noStrike" dirty="0" smtClean="0">
+                <a:solidFill>
+                  <a:srgbClr val="000000"/>
+                </a:solidFill>
+                <a:effectLst/>
+                <a:uFillTx/>
+                <a:latin typeface="New times roman"/>
+              </a:rPr>
+              <a:t>REQ-86</a:t>
+            </a:r>
+            <a:r>
+              <a:rPr lang="en-US" sz="2000" b="0" u="none" strike="noStrike" dirty="0">
+                <a:solidFill>
+                  <a:srgbClr val="000000"/>
+                </a:solidFill>
+                <a:effectLst/>
+                <a:uFillTx/>
+                <a:latin typeface="New times roman"/>
+              </a:rPr>
+              <a:t>: The system shall allow users to export the generated reports to a standard local file format (e.g., CSV or TXT).</a:t>
+            </a:r>
+            <a:endParaRPr lang="en-US" sz="2000" b="0" u="none" strike="noStrike" dirty="0">
               <a:solidFill>
                 <a:srgbClr val="000000"/>
               </a:solidFill>
@@ -2161,11 +2617,14 @@
       </p:sp>
     </p:spTree>
   </p:cSld>
-  <mc:AlternateContent>
+  <p:clrMapOvr>
+    <a:masterClrMapping/>
+  </p:clrMapOvr>
+  <mc:AlternateContent xmlns:mc="http://schemas.openxmlformats.org/markup-compatibility/2006" xmlns:p14="http://schemas.microsoft.com/office/powerpoint/2010/main">
     <mc:Choice Requires="p14">
       <p:transition spd="slow" p14:dur="2000"/>
     </mc:Choice>
-    <mc:Fallback>
+    <mc:Fallback xmlns="" xmlns:p15="http://schemas.microsoft.com/office/powerpoint/2012/main">
       <p:transition spd="slow"/>
     </mc:Fallback>
   </mc:AlternateContent>
@@ -2173,7 +2632,7 @@
 </file>
 
 <file path=ppt/slides/slide13.xml><?xml version="1.0" encoding="utf-8"?>
-<p:sld xmlns:a="http://schemas.openxmlformats.org/drawingml/2006/main" xmlns:p="http://schemas.openxmlformats.org/presentationml/2006/main" xmlns:r="http://schemas.openxmlformats.org/officeDocument/2006/relationships" xmlns:p14="http://schemas.microsoft.com/office/powerpoint/2010/main" xmlns:p15="http://schemas.microsoft.com/office/powerpoint/2012/main" xmlns:mc="http://schemas.openxmlformats.org/markup-compatibility/2006">
+<p:sld xmlns:a="http://schemas.openxmlformats.org/drawingml/2006/main" xmlns:r="http://schemas.openxmlformats.org/officeDocument/2006/relationships" xmlns:p="http://schemas.openxmlformats.org/presentationml/2006/main">
   <p:cSld>
     <p:spTree>
       <p:nvGrpSpPr>
@@ -2201,7 +2660,7 @@
         </p:nvSpPr>
         <p:spPr>
           <a:xfrm>
-            <a:off x="504000" y="226080"/>
+            <a:off x="431800" y="98971"/>
             <a:ext cx="9071640" cy="946440"/>
           </a:xfrm>
           <a:prstGeom prst="rect">
@@ -2216,12 +2675,13 @@
           <a:bodyPr lIns="0" tIns="0" rIns="0" bIns="0" anchor="ctr">
             <a:spAutoFit/>
           </a:bodyPr>
+          <a:lstStyle/>
           <a:p>
             <a:pPr indent="0" algn="l">
               <a:buNone/>
             </a:pPr>
             <a:r>
-              <a:rPr lang="en-US" sz="3200" b="1" u="none" strike="noStrike">
+              <a:rPr lang="en-US" sz="3200" b="1" u="none" strike="noStrike" dirty="0">
                 <a:solidFill>
                   <a:srgbClr val="000000"/>
                 </a:solidFill>
@@ -2231,7 +2691,7 @@
               </a:rPr>
               <a:t>Additional Features</a:t>
             </a:r>
-            <a:endParaRPr lang="en-US" sz="3200" b="0" u="none" strike="noStrike">
+            <a:endParaRPr lang="en-US" sz="3200" b="0" u="none" strike="noStrike" dirty="0">
               <a:solidFill>
                 <a:srgbClr val="000000"/>
               </a:solidFill>
@@ -2254,8 +2714,8 @@
         </p:nvSpPr>
         <p:spPr>
           <a:xfrm>
-            <a:off x="504000" y="1326600"/>
-            <a:ext cx="9071640" cy="3288240"/>
+            <a:off x="504000" y="1179091"/>
+            <a:ext cx="9071640" cy="3888432"/>
           </a:xfrm>
           <a:prstGeom prst="rect">
             <a:avLst/>
@@ -2267,52 +2727,938 @@
         </p:spPr>
         <p:txBody>
           <a:bodyPr lIns="0" tIns="0" rIns="0" bIns="0" anchor="t">
-            <a:normAutofit/>
+            <a:normAutofit fontScale="70000" lnSpcReduction="20000"/>
           </a:bodyPr>
-          <a:p>
-            <a:pPr indent="0" algn="l">
-              <a:spcBef>
-                <a:spcPts val="1417"/>
-              </a:spcBef>
-              <a:buNone/>
-            </a:pPr>
-            <a:r>
-              <a:rPr lang="en-US" sz="2000" b="0" u="none" strike="noStrike">
-                <a:solidFill>
-                  <a:srgbClr val="000000"/>
-                </a:solidFill>
-                <a:effectLst/>
-                <a:uFillTx/>
-                <a:latin typeface="New times roman"/>
-              </a:rPr>
-              <a:t>Nothing</a:t>
-            </a:r>
-            <a:endParaRPr lang="en-US" sz="2000" b="0" u="none" strike="noStrike">
-              <a:solidFill>
-                <a:srgbClr val="000000"/>
-              </a:solidFill>
-              <a:effectLst/>
-              <a:uFillTx/>
-              <a:latin typeface="Arial"/>
-            </a:endParaRPr>
+          <a:lstStyle/>
+          <a:p>
+            <a:r>
+              <a:rPr lang="ro-RO" sz="2300" b="1" dirty="0" err="1" smtClean="0">
+                <a:latin typeface="Times New Roman" panose="02020603050405020304" pitchFamily="18" charset="0"/>
+                <a:cs typeface="Times New Roman" panose="02020603050405020304" pitchFamily="18" charset="0"/>
+              </a:rPr>
+              <a:t>Communication</a:t>
+            </a:r>
+            <a:r>
+              <a:rPr lang="ro-RO" sz="2300" b="1" dirty="0" smtClean="0">
+                <a:latin typeface="Times New Roman" panose="02020603050405020304" pitchFamily="18" charset="0"/>
+                <a:cs typeface="Times New Roman" panose="02020603050405020304" pitchFamily="18" charset="0"/>
+              </a:rPr>
+              <a:t> </a:t>
+            </a:r>
+            <a:r>
+              <a:rPr lang="ro-RO" sz="2300" b="1" dirty="0">
+                <a:latin typeface="Times New Roman" panose="02020603050405020304" pitchFamily="18" charset="0"/>
+                <a:cs typeface="Times New Roman" panose="02020603050405020304" pitchFamily="18" charset="0"/>
+              </a:rPr>
+              <a:t>&amp; </a:t>
+            </a:r>
+            <a:r>
+              <a:rPr lang="ro-RO" sz="2300" b="1" dirty="0" err="1">
+                <a:latin typeface="Times New Roman" panose="02020603050405020304" pitchFamily="18" charset="0"/>
+                <a:cs typeface="Times New Roman" panose="02020603050405020304" pitchFamily="18" charset="0"/>
+              </a:rPr>
+              <a:t>Support</a:t>
+            </a:r>
+            <a:r>
+              <a:rPr lang="ro-RO" sz="2300" b="1" dirty="0">
+                <a:latin typeface="Times New Roman" panose="02020603050405020304" pitchFamily="18" charset="0"/>
+                <a:cs typeface="Times New Roman" panose="02020603050405020304" pitchFamily="18" charset="0"/>
+              </a:rPr>
+              <a:t> Module (</a:t>
+            </a:r>
+            <a:r>
+              <a:rPr lang="ro-RO" sz="2300" b="1" dirty="0" err="1">
+                <a:latin typeface="Times New Roman" panose="02020603050405020304" pitchFamily="18" charset="0"/>
+                <a:cs typeface="Times New Roman" panose="02020603050405020304" pitchFamily="18" charset="0"/>
+              </a:rPr>
+              <a:t>Chats</a:t>
+            </a:r>
+            <a:r>
+              <a:rPr lang="ro-RO" sz="2300" b="1" dirty="0">
+                <a:latin typeface="Times New Roman" panose="02020603050405020304" pitchFamily="18" charset="0"/>
+                <a:cs typeface="Times New Roman" panose="02020603050405020304" pitchFamily="18" charset="0"/>
+              </a:rPr>
+              <a:t> &amp; </a:t>
+            </a:r>
+            <a:r>
+              <a:rPr lang="ro-RO" sz="2300" b="1" dirty="0" err="1">
+                <a:latin typeface="Times New Roman" panose="02020603050405020304" pitchFamily="18" charset="0"/>
+                <a:cs typeface="Times New Roman" panose="02020603050405020304" pitchFamily="18" charset="0"/>
+              </a:rPr>
+              <a:t>Tickets</a:t>
+            </a:r>
+            <a:r>
+              <a:rPr lang="ro-RO" sz="2300" b="1" dirty="0" smtClean="0">
+                <a:latin typeface="Times New Roman" panose="02020603050405020304" pitchFamily="18" charset="0"/>
+                <a:cs typeface="Times New Roman" panose="02020603050405020304" pitchFamily="18" charset="0"/>
+              </a:rPr>
+              <a:t>)</a:t>
+            </a:r>
+            <a:endParaRPr lang="" sz="2300" b="1" smtClean="0">
+              <a:latin typeface="Times New Roman" panose="02020603050405020304" pitchFamily="18" charset="0"/>
+              <a:cs typeface="Times New Roman" panose="02020603050405020304" pitchFamily="18" charset="0"/>
+            </a:endParaRPr>
+          </a:p>
+          <a:p>
+            <a:endParaRPr lang="ro-RO" sz="2300" b="1" dirty="0">
+              <a:latin typeface="Times New Roman" panose="02020603050405020304" pitchFamily="18" charset="0"/>
+              <a:cs typeface="Times New Roman" panose="02020603050405020304" pitchFamily="18" charset="0"/>
+            </a:endParaRPr>
+          </a:p>
+          <a:p>
+            <a:pPr algn="l"/>
+            <a:r>
+              <a:rPr lang="en-US" sz="1800" dirty="0"/>
+              <a:t>✔</a:t>
+            </a:r>
+            <a:r>
+              <a:rPr lang="ro-RO" sz="1800" dirty="0"/>
+              <a:t> </a:t>
+            </a:r>
+            <a:r>
+              <a:rPr lang="en-US" sz="2000" b="1" dirty="0" smtClean="0">
+                <a:latin typeface="New times roman"/>
+                <a:cs typeface="Times New Roman" panose="02020603050405020304" pitchFamily="18" charset="0"/>
+              </a:rPr>
+              <a:t>REQ-87:</a:t>
+            </a:r>
+            <a:r>
+              <a:rPr lang="en-US" sz="2000" dirty="0" smtClean="0">
+                <a:latin typeface="New times roman"/>
+                <a:cs typeface="Times New Roman" panose="02020603050405020304" pitchFamily="18" charset="0"/>
+              </a:rPr>
+              <a:t> The system shall provide a real-time Chat interface linking the Customer with the assigned Driver/Staff for a specific active transport job.</a:t>
+            </a:r>
+            <a:endParaRPr lang="" sz="2000" smtClean="0">
+              <a:latin typeface="New times roman"/>
+              <a:cs typeface="Times New Roman" panose="02020603050405020304" pitchFamily="18" charset="0"/>
+            </a:endParaRPr>
+          </a:p>
+          <a:p>
+            <a:pPr algn="l"/>
+            <a:endParaRPr lang="en-US" sz="2000" dirty="0" smtClean="0">
+              <a:latin typeface="New times roman"/>
+              <a:cs typeface="Times New Roman" panose="02020603050405020304" pitchFamily="18" charset="0"/>
+            </a:endParaRPr>
+          </a:p>
+          <a:p>
+            <a:pPr algn="l"/>
+            <a:r>
+              <a:rPr lang="en-US" sz="1800" dirty="0" smtClean="0">
+                <a:latin typeface="New times roman"/>
+                <a:cs typeface="Times New Roman" panose="02020603050405020304" pitchFamily="18" charset="0"/>
+              </a:rPr>
+              <a:t>✔</a:t>
+            </a:r>
+            <a:r>
+              <a:rPr lang="ro-RO" sz="1800" dirty="0" smtClean="0">
+                <a:latin typeface="New times roman"/>
+                <a:cs typeface="Times New Roman" panose="02020603050405020304" pitchFamily="18" charset="0"/>
+              </a:rPr>
+              <a:t> </a:t>
+            </a:r>
+            <a:r>
+              <a:rPr lang="en-US" sz="2000" b="1" dirty="0" smtClean="0">
+                <a:latin typeface="New times roman"/>
+                <a:cs typeface="Times New Roman" panose="02020603050405020304" pitchFamily="18" charset="0"/>
+              </a:rPr>
+              <a:t>REQ-88:</a:t>
+            </a:r>
+            <a:r>
+              <a:rPr lang="en-US" sz="2000" dirty="0" smtClean="0">
+                <a:latin typeface="New times roman"/>
+                <a:cs typeface="Times New Roman" panose="02020603050405020304" pitchFamily="18" charset="0"/>
+              </a:rPr>
+              <a:t> Customers will be able to open Support Tickets to report issues or ask questions.</a:t>
+            </a:r>
+            <a:endParaRPr lang="" sz="2000" smtClean="0">
+              <a:latin typeface="New times roman"/>
+              <a:cs typeface="Times New Roman" panose="02020603050405020304" pitchFamily="18" charset="0"/>
+            </a:endParaRPr>
+          </a:p>
+          <a:p>
+            <a:pPr algn="l"/>
+            <a:endParaRPr lang="en-US" sz="2000" dirty="0" smtClean="0">
+              <a:latin typeface="New times roman"/>
+              <a:cs typeface="Times New Roman" panose="02020603050405020304" pitchFamily="18" charset="0"/>
+            </a:endParaRPr>
+          </a:p>
+          <a:p>
+            <a:pPr algn="l"/>
+            <a:r>
+              <a:rPr lang="en-US" sz="1800" dirty="0" smtClean="0">
+                <a:latin typeface="New times roman"/>
+                <a:cs typeface="Times New Roman" panose="02020603050405020304" pitchFamily="18" charset="0"/>
+              </a:rPr>
+              <a:t>✔</a:t>
+            </a:r>
+            <a:r>
+              <a:rPr lang="ro-RO" sz="1800" dirty="0" smtClean="0">
+                <a:latin typeface="New times roman"/>
+                <a:cs typeface="Times New Roman" panose="02020603050405020304" pitchFamily="18" charset="0"/>
+              </a:rPr>
+              <a:t> </a:t>
+            </a:r>
+            <a:r>
+              <a:rPr lang="en-US" sz="2000" b="1" dirty="0" smtClean="0">
+                <a:latin typeface="New times roman"/>
+                <a:cs typeface="Times New Roman" panose="02020603050405020304" pitchFamily="18" charset="0"/>
+              </a:rPr>
+              <a:t>REQ-89:</a:t>
+            </a:r>
+            <a:r>
+              <a:rPr lang="en-US" sz="2000" dirty="0" smtClean="0">
+                <a:latin typeface="New times roman"/>
+                <a:cs typeface="Times New Roman" panose="02020603050405020304" pitchFamily="18" charset="0"/>
+              </a:rPr>
+              <a:t> Company staff and Administrators will be able to view, manage, and reply to customer Support Tickets from a dedicated dashboard.</a:t>
+            </a:r>
+            <a:endParaRPr lang="" sz="2000" smtClean="0">
+              <a:latin typeface="New times roman"/>
+              <a:cs typeface="Times New Roman" panose="02020603050405020304" pitchFamily="18" charset="0"/>
+            </a:endParaRPr>
+          </a:p>
+          <a:p>
+            <a:pPr algn="l"/>
+            <a:endParaRPr lang="" sz="2000" smtClean="0"/>
+          </a:p>
+          <a:p>
+            <a:r>
+              <a:rPr lang="ro-RO" sz="2300" b="1" dirty="0" err="1">
+                <a:latin typeface="New times roman"/>
+              </a:rPr>
+              <a:t>Invoicing</a:t>
+            </a:r>
+            <a:r>
+              <a:rPr lang="ro-RO" sz="2300" b="1" dirty="0">
+                <a:latin typeface="New times roman"/>
+              </a:rPr>
+              <a:t> &amp; </a:t>
+            </a:r>
+            <a:r>
+              <a:rPr lang="ro-RO" sz="2300" b="1" dirty="0" err="1">
+                <a:latin typeface="New times roman"/>
+              </a:rPr>
+              <a:t>Billing</a:t>
+            </a:r>
+            <a:r>
+              <a:rPr lang="ro-RO" sz="2300" b="1" dirty="0">
+                <a:latin typeface="New times roman"/>
+              </a:rPr>
+              <a:t> </a:t>
+            </a:r>
+            <a:r>
+              <a:rPr lang="ro-RO" sz="2300" b="1" dirty="0" smtClean="0">
+                <a:latin typeface="New times roman"/>
+              </a:rPr>
+              <a:t>Module</a:t>
+            </a:r>
+            <a:endParaRPr lang="" sz="2300" b="1" smtClean="0">
+              <a:latin typeface="New times roman"/>
+            </a:endParaRPr>
+          </a:p>
+          <a:p>
+            <a:endParaRPr lang="" sz="2600" b="1" smtClean="0">
+              <a:latin typeface="New times roman"/>
+            </a:endParaRPr>
+          </a:p>
+          <a:p>
+            <a:pPr algn="l"/>
+            <a:r>
+              <a:rPr lang="en-US" sz="1800" dirty="0"/>
+              <a:t>✔</a:t>
+            </a:r>
+            <a:r>
+              <a:rPr lang="ro-RO" sz="1800" dirty="0"/>
+              <a:t> </a:t>
+            </a:r>
+            <a:r>
+              <a:rPr lang="en-US" sz="2000" b="1" dirty="0" smtClean="0">
+                <a:latin typeface="New times roman"/>
+                <a:cs typeface="Times New Roman" panose="02020603050405020304" pitchFamily="18" charset="0"/>
+              </a:rPr>
+              <a:t>REQ-90</a:t>
+            </a:r>
+            <a:r>
+              <a:rPr lang="en-US" sz="2000" b="1" dirty="0">
+                <a:latin typeface="New times roman"/>
+                <a:cs typeface="Times New Roman" panose="02020603050405020304" pitchFamily="18" charset="0"/>
+              </a:rPr>
+              <a:t>:</a:t>
+            </a:r>
+            <a:r>
+              <a:rPr lang="en-US" sz="2000" dirty="0">
+                <a:latin typeface="New times roman"/>
+                <a:cs typeface="Times New Roman" panose="02020603050405020304" pitchFamily="18" charset="0"/>
+              </a:rPr>
+              <a:t> The system will automatically generate an invoice for the customer once a transport job is completed (Delivered</a:t>
+            </a:r>
+            <a:r>
+              <a:rPr lang="en-US" sz="2000" dirty="0" smtClean="0">
+                <a:latin typeface="New times roman"/>
+                <a:cs typeface="Times New Roman" panose="02020603050405020304" pitchFamily="18" charset="0"/>
+              </a:rPr>
+              <a:t>).</a:t>
+            </a:r>
+            <a:endParaRPr lang="" sz="2000" smtClean="0">
+              <a:latin typeface="New times roman"/>
+              <a:cs typeface="Times New Roman" panose="02020603050405020304" pitchFamily="18" charset="0"/>
+            </a:endParaRPr>
+          </a:p>
+          <a:p>
+            <a:pPr algn="l"/>
+            <a:endParaRPr lang="en-US" sz="2000" dirty="0">
+              <a:latin typeface="New times roman"/>
+              <a:cs typeface="Times New Roman" panose="02020603050405020304" pitchFamily="18" charset="0"/>
+            </a:endParaRPr>
+          </a:p>
+          <a:p>
+            <a:pPr algn="l"/>
+            <a:r>
+              <a:rPr lang="en-US" sz="1800" dirty="0">
+                <a:latin typeface="New times roman"/>
+                <a:cs typeface="Times New Roman" panose="02020603050405020304" pitchFamily="18" charset="0"/>
+              </a:rPr>
+              <a:t>✔</a:t>
+            </a:r>
+            <a:r>
+              <a:rPr lang="ro-RO" sz="1800" dirty="0">
+                <a:latin typeface="New times roman"/>
+                <a:cs typeface="Times New Roman" panose="02020603050405020304" pitchFamily="18" charset="0"/>
+              </a:rPr>
+              <a:t> </a:t>
+            </a:r>
+            <a:r>
+              <a:rPr lang="en-US" sz="2000" b="1" dirty="0" smtClean="0">
+                <a:latin typeface="New times roman"/>
+                <a:cs typeface="Times New Roman" panose="02020603050405020304" pitchFamily="18" charset="0"/>
+              </a:rPr>
+              <a:t>REQ-91</a:t>
+            </a:r>
+            <a:r>
+              <a:rPr lang="en-US" sz="2000" b="1" dirty="0">
+                <a:latin typeface="New times roman"/>
+                <a:cs typeface="Times New Roman" panose="02020603050405020304" pitchFamily="18" charset="0"/>
+              </a:rPr>
+              <a:t>:</a:t>
+            </a:r>
+            <a:r>
+              <a:rPr lang="en-US" sz="2000" dirty="0">
+                <a:latin typeface="New times roman"/>
+                <a:cs typeface="Times New Roman" panose="02020603050405020304" pitchFamily="18" charset="0"/>
+              </a:rPr>
+              <a:t> Customers will have a dedicated "Invoices &amp; Billing" dashboard to view their payment history</a:t>
+            </a:r>
+            <a:r>
+              <a:rPr lang="en-US" sz="2000" dirty="0" smtClean="0">
+                <a:latin typeface="New times roman"/>
+                <a:cs typeface="Times New Roman" panose="02020603050405020304" pitchFamily="18" charset="0"/>
+              </a:rPr>
+              <a:t>.</a:t>
+            </a:r>
+            <a:endParaRPr lang="" sz="2000" smtClean="0">
+              <a:latin typeface="New times roman"/>
+              <a:cs typeface="Times New Roman" panose="02020603050405020304" pitchFamily="18" charset="0"/>
+            </a:endParaRPr>
+          </a:p>
+          <a:p>
+            <a:pPr algn="l"/>
+            <a:endParaRPr lang="en-US" sz="2000" dirty="0">
+              <a:latin typeface="New times roman"/>
+              <a:cs typeface="Times New Roman" panose="02020603050405020304" pitchFamily="18" charset="0"/>
+            </a:endParaRPr>
+          </a:p>
+          <a:p>
+            <a:pPr algn="l"/>
+            <a:r>
+              <a:rPr lang="en-US" sz="1800" dirty="0">
+                <a:latin typeface="New times roman"/>
+                <a:cs typeface="Times New Roman" panose="02020603050405020304" pitchFamily="18" charset="0"/>
+              </a:rPr>
+              <a:t>✔</a:t>
+            </a:r>
+            <a:r>
+              <a:rPr lang="ro-RO" sz="1800" dirty="0">
+                <a:latin typeface="New times roman"/>
+                <a:cs typeface="Times New Roman" panose="02020603050405020304" pitchFamily="18" charset="0"/>
+              </a:rPr>
+              <a:t> </a:t>
+            </a:r>
+            <a:r>
+              <a:rPr lang="en-US" sz="2000" b="1" dirty="0" smtClean="0">
+                <a:latin typeface="New times roman"/>
+                <a:cs typeface="Times New Roman" panose="02020603050405020304" pitchFamily="18" charset="0"/>
+              </a:rPr>
+              <a:t>REQ-92</a:t>
+            </a:r>
+            <a:r>
+              <a:rPr lang="en-US" sz="2000" b="1" dirty="0">
+                <a:latin typeface="New times roman"/>
+                <a:cs typeface="Times New Roman" panose="02020603050405020304" pitchFamily="18" charset="0"/>
+              </a:rPr>
+              <a:t>:</a:t>
+            </a:r>
+            <a:r>
+              <a:rPr lang="en-US" sz="2000" dirty="0">
+                <a:latin typeface="New times roman"/>
+                <a:cs typeface="Times New Roman" panose="02020603050405020304" pitchFamily="18" charset="0"/>
+              </a:rPr>
+              <a:t> Customers will be able to process payments for pending invoices directly through the system</a:t>
+            </a:r>
+            <a:r>
+              <a:rPr lang="en-US" sz="2000" dirty="0" smtClean="0">
+                <a:latin typeface="New times roman"/>
+                <a:cs typeface="Times New Roman" panose="02020603050405020304" pitchFamily="18" charset="0"/>
+              </a:rPr>
+              <a:t>.</a:t>
+            </a:r>
+            <a:endParaRPr lang="" sz="2000" smtClean="0">
+              <a:latin typeface="New times roman"/>
+              <a:cs typeface="Times New Roman" panose="02020603050405020304" pitchFamily="18" charset="0"/>
+            </a:endParaRPr>
+          </a:p>
+          <a:p>
+            <a:pPr algn="l"/>
+            <a:endParaRPr lang="en-US" sz="2000" dirty="0">
+              <a:latin typeface="New times roman"/>
+              <a:cs typeface="Times New Roman" panose="02020603050405020304" pitchFamily="18" charset="0"/>
+            </a:endParaRPr>
+          </a:p>
+          <a:p>
+            <a:pPr algn="l"/>
+            <a:r>
+              <a:rPr lang="en-US" sz="1800" dirty="0">
+                <a:latin typeface="New times roman"/>
+                <a:cs typeface="Times New Roman" panose="02020603050405020304" pitchFamily="18" charset="0"/>
+              </a:rPr>
+              <a:t>✔</a:t>
+            </a:r>
+            <a:r>
+              <a:rPr lang="ro-RO" sz="1800" dirty="0">
+                <a:latin typeface="New times roman"/>
+                <a:cs typeface="Times New Roman" panose="02020603050405020304" pitchFamily="18" charset="0"/>
+              </a:rPr>
+              <a:t> </a:t>
+            </a:r>
+            <a:r>
+              <a:rPr lang="en-US" sz="2000" b="1" dirty="0" smtClean="0">
+                <a:latin typeface="New times roman"/>
+                <a:cs typeface="Times New Roman" panose="02020603050405020304" pitchFamily="18" charset="0"/>
+              </a:rPr>
+              <a:t>REQ-93</a:t>
+            </a:r>
+            <a:r>
+              <a:rPr lang="en-US" sz="2000" b="1" dirty="0">
+                <a:latin typeface="New times roman"/>
+                <a:cs typeface="Times New Roman" panose="02020603050405020304" pitchFamily="18" charset="0"/>
+              </a:rPr>
+              <a:t>:</a:t>
+            </a:r>
+            <a:r>
+              <a:rPr lang="en-US" sz="2000" dirty="0">
+                <a:latin typeface="New times roman"/>
+                <a:cs typeface="Times New Roman" panose="02020603050405020304" pitchFamily="18" charset="0"/>
+              </a:rPr>
+              <a:t> Staff and Administrators will have an interface to track unpaid and paid invoices across all clients.</a:t>
+            </a:r>
+          </a:p>
+          <a:p>
+            <a:pPr algn="l"/>
+            <a:endParaRPr lang="en-US" sz="2000" dirty="0"/>
           </a:p>
         </p:txBody>
       </p:sp>
     </p:spTree>
   </p:cSld>
-  <mc:AlternateContent>
+  <p:clrMapOvr>
+    <a:masterClrMapping/>
+  </p:clrMapOvr>
+  <mc:AlternateContent xmlns:mc="http://schemas.openxmlformats.org/markup-compatibility/2006" xmlns:p14="http://schemas.microsoft.com/office/powerpoint/2010/main">
     <mc:Choice Requires="p14">
       <p:transition spd="slow" p14:dur="2000"/>
     </mc:Choice>
-    <mc:Fallback>
+    <mc:Fallback xmlns="" xmlns:p15="http://schemas.microsoft.com/office/powerpoint/2012/main">
       <p:transition spd="slow"/>
     </mc:Fallback>
   </mc:AlternateContent>
 </p:sld>
 </file>
 
+<file path=ppt/slides/slide14.xml><?xml version="1.0" encoding="utf-8"?>
+<p:sld xmlns:a="http://schemas.openxmlformats.org/drawingml/2006/main" xmlns:r="http://schemas.openxmlformats.org/officeDocument/2006/relationships" xmlns:p="http://schemas.openxmlformats.org/presentationml/2006/main">
+  <p:cSld>
+    <p:spTree>
+      <p:nvGrpSpPr>
+        <p:cNvPr id="1" name=""/>
+        <p:cNvGrpSpPr/>
+        <p:nvPr/>
+      </p:nvGrpSpPr>
+      <p:grpSpPr>
+        <a:xfrm>
+          <a:off x="0" y="0"/>
+          <a:ext cx="0" cy="0"/>
+          <a:chOff x="0" y="0"/>
+          <a:chExt cx="0" cy="0"/>
+        </a:xfrm>
+      </p:grpSpPr>
+      <p:sp>
+        <p:nvSpPr>
+          <p:cNvPr id="4" name="CasetăText 3"/>
+          <p:cNvSpPr txBox="1"/>
+          <p:nvPr/>
+        </p:nvSpPr>
+        <p:spPr>
+          <a:xfrm>
+            <a:off x="71760" y="0"/>
+            <a:ext cx="9505056" cy="5816977"/>
+          </a:xfrm>
+          <a:prstGeom prst="rect">
+            <a:avLst/>
+          </a:prstGeom>
+          <a:noFill/>
+        </p:spPr>
+        <p:txBody>
+          <a:bodyPr wrap="square" rtlCol="0">
+            <a:spAutoFit/>
+          </a:bodyPr>
+          <a:lstStyle/>
+          <a:p>
+            <a:pPr algn="ctr"/>
+            <a:r>
+              <a:rPr lang="ro-RO" b="1" dirty="0" err="1"/>
+              <a:t>Advanced</a:t>
+            </a:r>
+            <a:r>
+              <a:rPr lang="ro-RO" b="1" dirty="0"/>
+              <a:t> </a:t>
+            </a:r>
+            <a:r>
+              <a:rPr lang="ro-RO" b="1" dirty="0" err="1"/>
+              <a:t>User</a:t>
+            </a:r>
+            <a:r>
+              <a:rPr lang="ro-RO" b="1" dirty="0"/>
+              <a:t> Profile &amp; Avatar Management</a:t>
+            </a:r>
+          </a:p>
+          <a:p>
+            <a:r>
+              <a:rPr lang="en-US" dirty="0"/>
+              <a:t>✔</a:t>
+            </a:r>
+            <a:r>
+              <a:rPr lang="ro-RO" dirty="0"/>
+              <a:t> </a:t>
+            </a:r>
+            <a:r>
+              <a:rPr lang="en-US" sz="1400" b="1" dirty="0" smtClean="0">
+                <a:latin typeface="New times roman"/>
+                <a:cs typeface="Times New Roman" panose="02020603050405020304" pitchFamily="18" charset="0"/>
+              </a:rPr>
+              <a:t>REQ-94:</a:t>
+            </a:r>
+            <a:r>
+              <a:rPr lang="en-US" sz="1400" dirty="0" smtClean="0">
+                <a:latin typeface="New times roman"/>
+                <a:cs typeface="Times New Roman" panose="02020603050405020304" pitchFamily="18" charset="0"/>
+              </a:rPr>
+              <a:t> The system shall allow all users (Customers, Staff, Drivers, Admins) to upload and update a custom profile picture (avatar).</a:t>
+            </a:r>
+            <a:endParaRPr lang="" sz="1400" smtClean="0">
+              <a:latin typeface="New times roman"/>
+              <a:cs typeface="Times New Roman" panose="02020603050405020304" pitchFamily="18" charset="0"/>
+            </a:endParaRPr>
+          </a:p>
+          <a:p>
+            <a:endParaRPr lang="en-US" sz="1400" dirty="0" smtClean="0">
+              <a:latin typeface="New times roman"/>
+              <a:cs typeface="Times New Roman" panose="02020603050405020304" pitchFamily="18" charset="0"/>
+            </a:endParaRPr>
+          </a:p>
+          <a:p>
+            <a:r>
+              <a:rPr lang="en-US" sz="1400" dirty="0" smtClean="0">
+                <a:latin typeface="New times roman"/>
+                <a:cs typeface="Times New Roman" panose="02020603050405020304" pitchFamily="18" charset="0"/>
+              </a:rPr>
+              <a:t>✔</a:t>
+            </a:r>
+            <a:r>
+              <a:rPr lang="ro-RO" sz="1400" dirty="0" smtClean="0">
+                <a:latin typeface="New times roman"/>
+                <a:cs typeface="Times New Roman" panose="02020603050405020304" pitchFamily="18" charset="0"/>
+              </a:rPr>
+              <a:t> </a:t>
+            </a:r>
+            <a:r>
+              <a:rPr lang="en-US" sz="1400" b="1" dirty="0" smtClean="0">
+                <a:latin typeface="New times roman"/>
+                <a:cs typeface="Times New Roman" panose="02020603050405020304" pitchFamily="18" charset="0"/>
+              </a:rPr>
+              <a:t>REQ-95:</a:t>
+            </a:r>
+            <a:r>
+              <a:rPr lang="en-US" sz="1400" dirty="0" smtClean="0">
+                <a:latin typeface="New times roman"/>
+                <a:cs typeface="Times New Roman" panose="02020603050405020304" pitchFamily="18" charset="0"/>
+              </a:rPr>
+              <a:t> The system shall dynamically display the user's profile picture and role in the top navigation bar across all pages.</a:t>
+            </a:r>
+            <a:endParaRPr lang="" sz="1400" smtClean="0">
+              <a:latin typeface="New times roman"/>
+              <a:cs typeface="Times New Roman" panose="02020603050405020304" pitchFamily="18" charset="0"/>
+            </a:endParaRPr>
+          </a:p>
+          <a:p>
+            <a:endParaRPr lang="en-US" sz="1400" dirty="0" smtClean="0">
+              <a:latin typeface="New times roman"/>
+              <a:cs typeface="Times New Roman" panose="02020603050405020304" pitchFamily="18" charset="0"/>
+            </a:endParaRPr>
+          </a:p>
+          <a:p>
+            <a:r>
+              <a:rPr lang="en-US" sz="1400" dirty="0" smtClean="0">
+                <a:latin typeface="New times roman"/>
+                <a:cs typeface="Times New Roman" panose="02020603050405020304" pitchFamily="18" charset="0"/>
+              </a:rPr>
+              <a:t>✔</a:t>
+            </a:r>
+            <a:r>
+              <a:rPr lang="ro-RO" sz="1400" dirty="0" smtClean="0">
+                <a:latin typeface="New times roman"/>
+                <a:cs typeface="Times New Roman" panose="02020603050405020304" pitchFamily="18" charset="0"/>
+              </a:rPr>
+              <a:t> </a:t>
+            </a:r>
+            <a:r>
+              <a:rPr lang="en-US" sz="1400" b="1" dirty="0" smtClean="0">
+                <a:latin typeface="New times roman"/>
+                <a:cs typeface="Times New Roman" panose="02020603050405020304" pitchFamily="18" charset="0"/>
+              </a:rPr>
+              <a:t>REQ-96:</a:t>
+            </a:r>
+            <a:r>
+              <a:rPr lang="en-US" sz="1400" dirty="0" smtClean="0">
+                <a:latin typeface="New times roman"/>
+                <a:cs typeface="Times New Roman" panose="02020603050405020304" pitchFamily="18" charset="0"/>
+              </a:rPr>
+              <a:t> Users will be able to update their personal information (email, phone, address, name) and securely change their password from a dedicated Profile page.</a:t>
+            </a:r>
+            <a:endParaRPr lang="" sz="1400" smtClean="0">
+              <a:latin typeface="New times roman"/>
+              <a:cs typeface="Times New Roman" panose="02020603050405020304" pitchFamily="18" charset="0"/>
+            </a:endParaRPr>
+          </a:p>
+          <a:p>
+            <a:endParaRPr lang="" smtClean="0">
+              <a:latin typeface="New times roman"/>
+              <a:cs typeface="Times New Roman" panose="02020603050405020304" pitchFamily="18" charset="0"/>
+            </a:endParaRPr>
+          </a:p>
+          <a:p>
+            <a:pPr algn="ctr"/>
+            <a:r>
+              <a:rPr lang="en-US" b="1" dirty="0" smtClean="0">
+                <a:latin typeface="New times roman"/>
+              </a:rPr>
+              <a:t>Live </a:t>
+            </a:r>
+            <a:r>
+              <a:rPr lang="en-US" b="1" dirty="0">
+                <a:latin typeface="New times roman"/>
+              </a:rPr>
+              <a:t>GPS Tracking &amp; Interactive Mapping</a:t>
+            </a:r>
+            <a:endParaRPr lang="" b="1" smtClean="0">
+              <a:latin typeface="New times roman"/>
+            </a:endParaRPr>
+          </a:p>
+          <a:p>
+            <a:r>
+              <a:rPr lang="en-US" dirty="0">
+                <a:latin typeface="New times roman"/>
+              </a:rPr>
+              <a:t>✔</a:t>
+            </a:r>
+            <a:r>
+              <a:rPr lang="ro-RO" dirty="0">
+                <a:latin typeface="New times roman"/>
+              </a:rPr>
+              <a:t> </a:t>
+            </a:r>
+            <a:r>
+              <a:rPr lang="en-US" sz="1400" b="1" dirty="0" smtClean="0">
+                <a:latin typeface="New times roman"/>
+                <a:cs typeface="Times New Roman" panose="02020603050405020304" pitchFamily="18" charset="0"/>
+              </a:rPr>
+              <a:t>REQ-97</a:t>
+            </a:r>
+            <a:r>
+              <a:rPr lang="en-US" sz="1400" b="1" dirty="0">
+                <a:latin typeface="New times roman"/>
+                <a:cs typeface="Times New Roman" panose="02020603050405020304" pitchFamily="18" charset="0"/>
+              </a:rPr>
+              <a:t>:</a:t>
+            </a:r>
+            <a:r>
+              <a:rPr lang="en-US" sz="1400" dirty="0">
+                <a:latin typeface="New times roman"/>
+                <a:cs typeface="Times New Roman" panose="02020603050405020304" pitchFamily="18" charset="0"/>
+              </a:rPr>
+              <a:t> The system shall integrate with a live map API (e.g., Leaflet/</a:t>
+            </a:r>
+            <a:r>
+              <a:rPr lang="en-US" sz="1400" dirty="0" err="1">
+                <a:latin typeface="New times roman"/>
+                <a:cs typeface="Times New Roman" panose="02020603050405020304" pitchFamily="18" charset="0"/>
+              </a:rPr>
+              <a:t>OpenStreetMap</a:t>
+            </a:r>
+            <a:r>
+              <a:rPr lang="en-US" sz="1400" dirty="0">
+                <a:latin typeface="New times roman"/>
+                <a:cs typeface="Times New Roman" panose="02020603050405020304" pitchFamily="18" charset="0"/>
+              </a:rPr>
+              <a:t>) to visually draw the exact road route between the pickup and delivery cities</a:t>
+            </a:r>
+            <a:r>
+              <a:rPr lang="en-US" sz="1400" dirty="0" smtClean="0">
+                <a:latin typeface="New times roman"/>
+                <a:cs typeface="Times New Roman" panose="02020603050405020304" pitchFamily="18" charset="0"/>
+              </a:rPr>
+              <a:t>.</a:t>
+            </a:r>
+            <a:endParaRPr lang="" sz="1400" smtClean="0">
+              <a:latin typeface="New times roman"/>
+              <a:cs typeface="Times New Roman" panose="02020603050405020304" pitchFamily="18" charset="0"/>
+            </a:endParaRPr>
+          </a:p>
+          <a:p>
+            <a:endParaRPr lang="en-US" sz="1400" dirty="0">
+              <a:latin typeface="New times roman"/>
+              <a:cs typeface="Times New Roman" panose="02020603050405020304" pitchFamily="18" charset="0"/>
+            </a:endParaRPr>
+          </a:p>
+          <a:p>
+            <a:r>
+              <a:rPr lang="en-US" sz="1400" dirty="0">
+                <a:latin typeface="New times roman"/>
+                <a:cs typeface="Times New Roman" panose="02020603050405020304" pitchFamily="18" charset="0"/>
+              </a:rPr>
+              <a:t>✔</a:t>
+            </a:r>
+            <a:r>
+              <a:rPr lang="ro-RO" sz="1400" dirty="0">
+                <a:latin typeface="New times roman"/>
+                <a:cs typeface="Times New Roman" panose="02020603050405020304" pitchFamily="18" charset="0"/>
+              </a:rPr>
+              <a:t> </a:t>
+            </a:r>
+            <a:r>
+              <a:rPr lang="en-US" sz="1400" b="1" dirty="0" smtClean="0">
+                <a:latin typeface="New times roman"/>
+                <a:cs typeface="Times New Roman" panose="02020603050405020304" pitchFamily="18" charset="0"/>
+              </a:rPr>
+              <a:t>REQ-98</a:t>
+            </a:r>
+            <a:r>
+              <a:rPr lang="en-US" sz="1400" b="1" dirty="0">
+                <a:latin typeface="New times roman"/>
+                <a:cs typeface="Times New Roman" panose="02020603050405020304" pitchFamily="18" charset="0"/>
+              </a:rPr>
+              <a:t>:</a:t>
+            </a:r>
+            <a:r>
+              <a:rPr lang="en-US" sz="1400" dirty="0">
+                <a:latin typeface="New times roman"/>
+                <a:cs typeface="Times New Roman" panose="02020603050405020304" pitchFamily="18" charset="0"/>
+              </a:rPr>
+              <a:t> The system shall feature a GPS Simulator that fetches real-time coordinates and moves a truck icon on the customer's map while the job is "In Transit</a:t>
+            </a:r>
+            <a:r>
+              <a:rPr lang="en-US" sz="1400" dirty="0" smtClean="0">
+                <a:latin typeface="New times roman"/>
+                <a:cs typeface="Times New Roman" panose="02020603050405020304" pitchFamily="18" charset="0"/>
+              </a:rPr>
+              <a:t>".</a:t>
+            </a:r>
+            <a:endParaRPr lang="" sz="1400" smtClean="0">
+              <a:latin typeface="New times roman"/>
+              <a:cs typeface="Times New Roman" panose="02020603050405020304" pitchFamily="18" charset="0"/>
+            </a:endParaRPr>
+          </a:p>
+          <a:p>
+            <a:endParaRPr lang="" smtClean="0">
+              <a:latin typeface="New times roman"/>
+              <a:cs typeface="Times New Roman" panose="02020603050405020304" pitchFamily="18" charset="0"/>
+            </a:endParaRPr>
+          </a:p>
+          <a:p>
+            <a:pPr algn="ctr"/>
+            <a:r>
+              <a:rPr lang="ro-RO" b="1" dirty="0" err="1">
+                <a:latin typeface="New times roman"/>
+              </a:rPr>
+              <a:t>System</a:t>
+            </a:r>
+            <a:r>
+              <a:rPr lang="ro-RO" b="1" dirty="0">
+                <a:latin typeface="New times roman"/>
+              </a:rPr>
+              <a:t> </a:t>
+            </a:r>
+            <a:r>
+              <a:rPr lang="ro-RO" b="1" dirty="0" err="1">
+                <a:latin typeface="New times roman"/>
+              </a:rPr>
+              <a:t>Logging</a:t>
+            </a:r>
+            <a:r>
+              <a:rPr lang="ro-RO" b="1" dirty="0">
+                <a:latin typeface="New times roman"/>
+              </a:rPr>
+              <a:t> </a:t>
+            </a:r>
+            <a:r>
+              <a:rPr lang="ro-RO" b="1" dirty="0" err="1">
+                <a:latin typeface="New times roman"/>
+              </a:rPr>
+              <a:t>Dashboard</a:t>
+            </a:r>
+            <a:r>
+              <a:rPr lang="ro-RO" b="1" dirty="0">
+                <a:latin typeface="New times roman"/>
+              </a:rPr>
+              <a:t> (</a:t>
+            </a:r>
+            <a:r>
+              <a:rPr lang="ro-RO" b="1" dirty="0" err="1">
+                <a:latin typeface="New times roman"/>
+              </a:rPr>
+              <a:t>Admin</a:t>
+            </a:r>
+            <a:r>
+              <a:rPr lang="ro-RO" b="1" dirty="0">
+                <a:latin typeface="New times roman"/>
+              </a:rPr>
+              <a:t>)</a:t>
+            </a:r>
+            <a:endParaRPr lang="en-US" b="1" dirty="0">
+              <a:latin typeface="New times roman"/>
+            </a:endParaRPr>
+          </a:p>
+          <a:p>
+            <a:r>
+              <a:rPr lang="en-US" sz="1400" dirty="0">
+                <a:latin typeface="New times roman"/>
+              </a:rPr>
+              <a:t>✔</a:t>
+            </a:r>
+            <a:r>
+              <a:rPr lang="ro-RO" sz="1400" dirty="0">
+                <a:latin typeface="New times roman"/>
+              </a:rPr>
+              <a:t> </a:t>
+            </a:r>
+            <a:r>
+              <a:rPr lang="en-US" sz="1400" b="1" dirty="0" smtClean="0">
+                <a:latin typeface="New times roman"/>
+                <a:cs typeface="Times New Roman" panose="02020603050405020304" pitchFamily="18" charset="0"/>
+              </a:rPr>
+              <a:t>REQ-99</a:t>
+            </a:r>
+            <a:r>
+              <a:rPr lang="en-US" sz="1400" b="1" dirty="0">
+                <a:latin typeface="New times roman"/>
+                <a:cs typeface="Times New Roman" panose="02020603050405020304" pitchFamily="18" charset="0"/>
+              </a:rPr>
+              <a:t>:</a:t>
+            </a:r>
+            <a:r>
+              <a:rPr lang="en-US" sz="1400" dirty="0">
+                <a:latin typeface="New times roman"/>
+                <a:cs typeface="Times New Roman" panose="02020603050405020304" pitchFamily="18" charset="0"/>
+              </a:rPr>
+              <a:t> The system shall provide a dedicated "System Logs" dashboard exclusive to Administrators</a:t>
+            </a:r>
+            <a:r>
+              <a:rPr lang="en-US" sz="1400" dirty="0" smtClean="0">
+                <a:latin typeface="New times roman"/>
+                <a:cs typeface="Times New Roman" panose="02020603050405020304" pitchFamily="18" charset="0"/>
+              </a:rPr>
+              <a:t>.</a:t>
+            </a:r>
+            <a:endParaRPr lang="" sz="1400" smtClean="0">
+              <a:latin typeface="New times roman"/>
+              <a:cs typeface="Times New Roman" panose="02020603050405020304" pitchFamily="18" charset="0"/>
+            </a:endParaRPr>
+          </a:p>
+          <a:p>
+            <a:endParaRPr lang="en-US" sz="1400" dirty="0">
+              <a:latin typeface="New times roman"/>
+              <a:cs typeface="Times New Roman" panose="02020603050405020304" pitchFamily="18" charset="0"/>
+            </a:endParaRPr>
+          </a:p>
+          <a:p>
+            <a:r>
+              <a:rPr lang="en-US" sz="1400" dirty="0">
+                <a:latin typeface="New times roman"/>
+                <a:cs typeface="Times New Roman" panose="02020603050405020304" pitchFamily="18" charset="0"/>
+              </a:rPr>
+              <a:t>✔</a:t>
+            </a:r>
+            <a:r>
+              <a:rPr lang="ro-RO" sz="1400" dirty="0">
+                <a:latin typeface="New times roman"/>
+                <a:cs typeface="Times New Roman" panose="02020603050405020304" pitchFamily="18" charset="0"/>
+              </a:rPr>
+              <a:t> </a:t>
+            </a:r>
+            <a:r>
+              <a:rPr lang="en-US" sz="1400" b="1" dirty="0" smtClean="0">
+                <a:latin typeface="New times roman"/>
+                <a:cs typeface="Times New Roman" panose="02020603050405020304" pitchFamily="18" charset="0"/>
+              </a:rPr>
+              <a:t>REQ-100</a:t>
+            </a:r>
+            <a:r>
+              <a:rPr lang="en-US" sz="1400" b="1" dirty="0">
+                <a:latin typeface="New times roman"/>
+                <a:cs typeface="Times New Roman" panose="02020603050405020304" pitchFamily="18" charset="0"/>
+              </a:rPr>
+              <a:t>:</a:t>
+            </a:r>
+            <a:r>
+              <a:rPr lang="en-US" sz="1400" dirty="0">
+                <a:latin typeface="New times roman"/>
+                <a:cs typeface="Times New Roman" panose="02020603050405020304" pitchFamily="18" charset="0"/>
+              </a:rPr>
+              <a:t> The system logs will visually track and display backend errors, database events, and security warnings for easier debugging and maintenance.</a:t>
+            </a:r>
+          </a:p>
+          <a:p>
+            <a:endParaRPr lang="en-US" dirty="0"/>
+          </a:p>
+          <a:p>
+            <a:endParaRPr lang="ro-RO" dirty="0"/>
+          </a:p>
+        </p:txBody>
+      </p:sp>
+    </p:spTree>
+    <p:extLst>
+      <p:ext uri="{BB962C8B-B14F-4D97-AF65-F5344CB8AC3E}">
+        <p14:creationId xmlns:p14="http://schemas.microsoft.com/office/powerpoint/2010/main" val="2808951063"/>
+      </p:ext>
+    </p:extLst>
+  </p:cSld>
+  <p:clrMapOvr>
+    <a:masterClrMapping/>
+  </p:clrMapOvr>
+</p:sld>
+</file>
+
 <file path=ppt/slides/slide2.xml><?xml version="1.0" encoding="utf-8"?>
-<p:sld xmlns:a="http://schemas.openxmlformats.org/drawingml/2006/main" xmlns:p="http://schemas.openxmlformats.org/presentationml/2006/main" xmlns:r="http://schemas.openxmlformats.org/officeDocument/2006/relationships" xmlns:p14="http://schemas.microsoft.com/office/powerpoint/2010/main" xmlns:p15="http://schemas.microsoft.com/office/powerpoint/2012/main" xmlns:mc="http://schemas.openxmlformats.org/markup-compatibility/2006">
+<p:sld xmlns:a="http://schemas.openxmlformats.org/drawingml/2006/main" xmlns:r="http://schemas.openxmlformats.org/officeDocument/2006/relationships" xmlns:p="http://schemas.openxmlformats.org/presentationml/2006/main">
   <p:cSld>
     <p:spTree>
       <p:nvGrpSpPr>
@@ -2355,12 +3701,13 @@
           <a:bodyPr lIns="0" tIns="0" rIns="0" bIns="0" anchor="ctr">
             <a:spAutoFit/>
           </a:bodyPr>
+          <a:lstStyle/>
           <a:p>
             <a:pPr indent="0" algn="l">
               <a:buNone/>
             </a:pPr>
             <a:r>
-              <a:rPr lang="en-US" sz="3200" b="1" u="none" strike="noStrike">
+              <a:rPr lang="en-US" sz="3200" b="1" u="none" strike="noStrike" dirty="0">
                 <a:solidFill>
                   <a:srgbClr val="000000"/>
                 </a:solidFill>
@@ -2368,9 +3715,20 @@
                 <a:uFillTx/>
                 <a:latin typeface="Arial"/>
               </a:rPr>
-              <a:t>User Authentification</a:t>
-            </a:r>
-            <a:endParaRPr lang="en-US" sz="3200" b="0" u="none" strike="noStrike">
+              <a:t>User </a:t>
+            </a:r>
+            <a:r>
+              <a:rPr lang="en-US" sz="3200" b="1" u="none" strike="noStrike" dirty="0" err="1">
+                <a:solidFill>
+                  <a:srgbClr val="000000"/>
+                </a:solidFill>
+                <a:effectLst/>
+                <a:uFillTx/>
+                <a:latin typeface="Arial"/>
+              </a:rPr>
+              <a:t>Authentification</a:t>
+            </a:r>
+            <a:endParaRPr lang="en-US" sz="3200" b="0" u="none" strike="noStrike" dirty="0">
               <a:solidFill>
                 <a:srgbClr val="000000"/>
               </a:solidFill>
@@ -2393,7 +3751,7 @@
         </p:nvSpPr>
         <p:spPr>
           <a:xfrm>
-            <a:off x="504000" y="1326600"/>
+            <a:off x="287784" y="1323107"/>
             <a:ext cx="9071640" cy="3288240"/>
           </a:xfrm>
           <a:prstGeom prst="rect">
@@ -2406,262 +3764,438 @@
         </p:spPr>
         <p:txBody>
           <a:bodyPr lIns="0" tIns="0" rIns="0" bIns="0" anchor="t">
-            <a:normAutofit/>
+            <a:normAutofit fontScale="85000" lnSpcReduction="20000"/>
           </a:bodyPr>
-          <a:p>
-            <a:pPr indent="0" algn="l">
+          <a:lstStyle/>
+          <a:p>
+            <a:pPr algn="l">
               <a:spcBef>
                 <a:spcPts val="1417"/>
               </a:spcBef>
-              <a:buNone/>
-            </a:pPr>
-            <a:r>
-              <a:rPr lang="en-US" sz="2000" b="0" u="none" strike="noStrike">
-                <a:solidFill>
-                  <a:srgbClr val="000000"/>
-                </a:solidFill>
-                <a:effectLst/>
-                <a:uFillTx/>
-                <a:latin typeface="New times roman"/>
-              </a:rPr>
-              <a:t>REQ-01: The app must have a text box for the username.</a:t>
-            </a:r>
-            <a:endParaRPr lang="en-US" sz="2000" b="0" u="none" strike="noStrike">
-              <a:solidFill>
-                <a:srgbClr val="000000"/>
-              </a:solidFill>
-              <a:effectLst/>
-              <a:uFillTx/>
-              <a:latin typeface="Arial"/>
-            </a:endParaRPr>
-          </a:p>
-          <a:p>
-            <a:pPr indent="0" algn="l">
+            </a:pPr>
+            <a:r>
+              <a:rPr lang="en-US" sz="2000" dirty="0" smtClean="0">
+                <a:solidFill>
+                  <a:schemeClr val="tx1"/>
+                </a:solidFill>
+                <a:latin typeface="Times New Roman" panose="02020603050405020304" pitchFamily="18" charset="0"/>
+                <a:cs typeface="Times New Roman" panose="02020603050405020304" pitchFamily="18" charset="0"/>
+              </a:rPr>
+              <a:t>✔</a:t>
+            </a:r>
+            <a:r>
+              <a:rPr lang="" sz="2000" dirty="0" smtClean="0">
+                <a:solidFill>
+                  <a:schemeClr val="tx1"/>
+                </a:solidFill>
+                <a:latin typeface="Times New Roman" panose="02020603050405020304" pitchFamily="18" charset="0"/>
+                <a:cs typeface="Times New Roman" panose="02020603050405020304" pitchFamily="18" charset="0"/>
+              </a:rPr>
+              <a:t> </a:t>
+            </a:r>
+            <a:r>
+              <a:rPr lang="en-US" sz="2000" dirty="0" smtClean="0">
+                <a:solidFill>
+                  <a:schemeClr val="tx1"/>
+                </a:solidFill>
+                <a:latin typeface="Times New Roman" panose="02020603050405020304" pitchFamily="18" charset="0"/>
+                <a:cs typeface="Times New Roman" panose="02020603050405020304" pitchFamily="18" charset="0"/>
+              </a:rPr>
+              <a:t>REQ-01</a:t>
+            </a:r>
+            <a:r>
+              <a:rPr lang="en-US" sz="2000" b="0" u="none" strike="noStrike" dirty="0">
+                <a:solidFill>
+                  <a:srgbClr val="000000"/>
+                </a:solidFill>
+                <a:effectLst/>
+                <a:uFillTx/>
+                <a:latin typeface="Times New Roman" panose="02020603050405020304" pitchFamily="18" charset="0"/>
+                <a:cs typeface="Times New Roman" panose="02020603050405020304" pitchFamily="18" charset="0"/>
+              </a:rPr>
+              <a:t>: The app must have a text box for the </a:t>
+            </a:r>
+            <a:r>
+              <a:rPr lang="en-US" sz="2000" b="0" u="none" strike="noStrike" dirty="0" smtClean="0">
+                <a:solidFill>
+                  <a:srgbClr val="000000"/>
+                </a:solidFill>
+                <a:effectLst/>
+                <a:uFillTx/>
+                <a:latin typeface="Times New Roman" panose="02020603050405020304" pitchFamily="18" charset="0"/>
+                <a:cs typeface="Times New Roman" panose="02020603050405020304" pitchFamily="18" charset="0"/>
+              </a:rPr>
+              <a:t>username</a:t>
+            </a:r>
+            <a:r>
+              <a:rPr lang="en-US" sz="2000" dirty="0">
+                <a:latin typeface="Times New Roman" panose="02020603050405020304" pitchFamily="18" charset="0"/>
+                <a:cs typeface="Times New Roman" panose="02020603050405020304" pitchFamily="18" charset="0"/>
+              </a:rPr>
+              <a:t>. </a:t>
+            </a:r>
+            <a:endParaRPr lang="en-US" sz="2000" b="0" u="none" strike="noStrike" dirty="0">
+              <a:solidFill>
+                <a:srgbClr val="000000"/>
+              </a:solidFill>
+              <a:effectLst/>
+              <a:uFillTx/>
+              <a:latin typeface="Times New Roman" panose="02020603050405020304" pitchFamily="18" charset="0"/>
+              <a:cs typeface="Times New Roman" panose="02020603050405020304" pitchFamily="18" charset="0"/>
+            </a:endParaRPr>
+          </a:p>
+          <a:p>
+            <a:pPr algn="l">
               <a:spcBef>
                 <a:spcPts val="879"/>
               </a:spcBef>
               <a:spcAft>
                 <a:spcPts val="879"/>
               </a:spcAft>
-              <a:buNone/>
-            </a:pPr>
-            <a:r>
-              <a:rPr lang="en-US" sz="2000" b="0" u="none" strike="noStrike">
-                <a:solidFill>
-                  <a:srgbClr val="000000"/>
-                </a:solidFill>
-                <a:effectLst/>
-                <a:uFillTx/>
+            </a:pPr>
+            <a:r>
+              <a:rPr lang="en-US" sz="2000" dirty="0" smtClean="0">
                 <a:latin typeface="Times New Roman"/>
               </a:rPr>
-              <a:t>REQ-02: The app must have a text box for the password.</a:t>
-            </a:r>
-            <a:endParaRPr lang="en-US" sz="2000" b="0" u="none" strike="noStrike">
-              <a:solidFill>
-                <a:srgbClr val="000000"/>
-              </a:solidFill>
-              <a:effectLst/>
-              <a:uFillTx/>
-              <a:latin typeface="Times New Roman"/>
-            </a:endParaRPr>
-          </a:p>
-          <a:p>
-            <a:pPr indent="0" algn="l">
+              <a:t>✔</a:t>
+            </a:r>
+            <a:r>
+              <a:rPr lang="" sz="2000" dirty="0" smtClean="0">
+                <a:latin typeface="Times New Roman"/>
+              </a:rPr>
+              <a:t> </a:t>
+            </a:r>
+            <a:r>
+              <a:rPr lang="en-US" sz="2000" dirty="0" smtClean="0">
+                <a:latin typeface="Times New Roman"/>
+              </a:rPr>
+              <a:t>REQ-02</a:t>
+            </a:r>
+            <a:r>
+              <a:rPr lang="en-US" sz="2000" b="0" u="none" strike="noStrike" dirty="0">
+                <a:solidFill>
+                  <a:srgbClr val="000000"/>
+                </a:solidFill>
+                <a:effectLst/>
+                <a:uFillTx/>
+                <a:latin typeface="Times New Roman"/>
+              </a:rPr>
+              <a:t>: The app must have a text box for the password</a:t>
+            </a:r>
+            <a:r>
+              <a:rPr lang="en-US" sz="2000" dirty="0">
+                <a:latin typeface="Times New Roman"/>
+              </a:rPr>
+              <a:t>. </a:t>
+            </a:r>
+            <a:endParaRPr lang="en-US" sz="2000" b="0" u="none" strike="noStrike" dirty="0">
+              <a:solidFill>
+                <a:srgbClr val="000000"/>
+              </a:solidFill>
+              <a:effectLst/>
+              <a:uFillTx/>
+              <a:latin typeface="Times New Roman"/>
+            </a:endParaRPr>
+          </a:p>
+          <a:p>
+            <a:pPr algn="l">
               <a:spcBef>
                 <a:spcPts val="879"/>
               </a:spcBef>
               <a:spcAft>
                 <a:spcPts val="879"/>
               </a:spcAft>
-              <a:buNone/>
-            </a:pPr>
-            <a:r>
-              <a:rPr lang="en-US" sz="2000" b="0" u="none" strike="noStrike">
-                <a:solidFill>
-                  <a:srgbClr val="000000"/>
-                </a:solidFill>
-                <a:effectLst/>
-                <a:uFillTx/>
+            </a:pPr>
+            <a:r>
+              <a:rPr lang="en-US" sz="2000" dirty="0" smtClean="0">
                 <a:latin typeface="Times New Roman"/>
               </a:rPr>
-              <a:t>REQ-03: The app must have a login button.</a:t>
-            </a:r>
-            <a:endParaRPr lang="en-US" sz="2000" b="0" u="none" strike="noStrike">
-              <a:solidFill>
-                <a:srgbClr val="000000"/>
-              </a:solidFill>
-              <a:effectLst/>
-              <a:uFillTx/>
-              <a:latin typeface="Times New Roman"/>
-            </a:endParaRPr>
-          </a:p>
-          <a:p>
-            <a:pPr indent="0" algn="l">
+              <a:t>✔</a:t>
+            </a:r>
+            <a:r>
+              <a:rPr lang="" sz="2000" dirty="0" smtClean="0">
+                <a:latin typeface="Times New Roman"/>
+              </a:rPr>
+              <a:t> </a:t>
+            </a:r>
+            <a:r>
+              <a:rPr lang="en-US" sz="2000" dirty="0" smtClean="0">
+                <a:latin typeface="Times New Roman"/>
+              </a:rPr>
+              <a:t>REQ-03</a:t>
+            </a:r>
+            <a:r>
+              <a:rPr lang="en-US" sz="2000" b="0" u="none" strike="noStrike" dirty="0">
+                <a:solidFill>
+                  <a:srgbClr val="000000"/>
+                </a:solidFill>
+                <a:effectLst/>
+                <a:uFillTx/>
+                <a:latin typeface="Times New Roman"/>
+              </a:rPr>
+              <a:t>: The app must have a login button.</a:t>
+            </a:r>
+          </a:p>
+          <a:p>
+            <a:pPr algn="l">
               <a:spcBef>
                 <a:spcPts val="879"/>
               </a:spcBef>
               <a:spcAft>
                 <a:spcPts val="879"/>
               </a:spcAft>
-              <a:buNone/>
-            </a:pPr>
-            <a:r>
-              <a:rPr lang="en-US" sz="2000" b="0" u="none" strike="noStrike">
-                <a:solidFill>
-                  <a:srgbClr val="000000"/>
-                </a:solidFill>
-                <a:effectLst/>
-                <a:uFillTx/>
+            </a:pPr>
+            <a:r>
+              <a:rPr lang="en-US" sz="2000" dirty="0" smtClean="0">
                 <a:latin typeface="Times New Roman"/>
               </a:rPr>
-              <a:t>REQ-04: The login function must take exactly 2 parameters.</a:t>
-            </a:r>
-            <a:endParaRPr lang="en-US" sz="2000" b="0" u="none" strike="noStrike">
-              <a:solidFill>
-                <a:srgbClr val="000000"/>
-              </a:solidFill>
-              <a:effectLst/>
-              <a:uFillTx/>
-              <a:latin typeface="Times New Roman"/>
-            </a:endParaRPr>
-          </a:p>
-          <a:p>
-            <a:pPr indent="0" algn="l">
+              <a:t>✔</a:t>
+            </a:r>
+            <a:r>
+              <a:rPr lang="" sz="2000" dirty="0" smtClean="0">
+                <a:latin typeface="Times New Roman"/>
+              </a:rPr>
+              <a:t> </a:t>
+            </a:r>
+            <a:r>
+              <a:rPr lang="en-US" sz="2000" dirty="0" smtClean="0">
+                <a:latin typeface="Times New Roman"/>
+              </a:rPr>
+              <a:t>REQ-04</a:t>
+            </a:r>
+            <a:r>
+              <a:rPr lang="en-US" sz="2000" b="0" u="none" strike="noStrike" dirty="0">
+                <a:solidFill>
+                  <a:srgbClr val="000000"/>
+                </a:solidFill>
+                <a:effectLst/>
+                <a:uFillTx/>
+                <a:latin typeface="Times New Roman"/>
+              </a:rPr>
+              <a:t>: The login function must take exactly 2 parameters.</a:t>
+            </a:r>
+          </a:p>
+          <a:p>
+            <a:pPr algn="l">
               <a:spcBef>
                 <a:spcPts val="879"/>
               </a:spcBef>
               <a:spcAft>
                 <a:spcPts val="879"/>
               </a:spcAft>
-              <a:buNone/>
-            </a:pPr>
-            <a:r>
-              <a:rPr lang="en-US" sz="2000" b="0" u="none" strike="noStrike">
-                <a:solidFill>
-                  <a:srgbClr val="000000"/>
-                </a:solidFill>
-                <a:effectLst/>
-                <a:uFillTx/>
+            </a:pPr>
+            <a:r>
+              <a:rPr lang="en-US" sz="2000" dirty="0" smtClean="0">
                 <a:latin typeface="Times New Roman"/>
               </a:rPr>
-              <a:t>REQ-05: The system must check the database to see if the user exists.</a:t>
-            </a:r>
-            <a:endParaRPr lang="en-US" sz="2000" b="0" u="none" strike="noStrike">
-              <a:solidFill>
-                <a:srgbClr val="000000"/>
-              </a:solidFill>
-              <a:effectLst/>
-              <a:uFillTx/>
-              <a:latin typeface="Times New Roman"/>
-            </a:endParaRPr>
-          </a:p>
-          <a:p>
-            <a:pPr indent="0" algn="l">
+              <a:t>✔</a:t>
+            </a:r>
+            <a:r>
+              <a:rPr lang="" sz="2000" dirty="0" smtClean="0">
+                <a:latin typeface="Times New Roman"/>
+              </a:rPr>
+              <a:t> </a:t>
+            </a:r>
+            <a:r>
+              <a:rPr lang="en-US" sz="2000" dirty="0" smtClean="0">
+                <a:latin typeface="Times New Roman"/>
+              </a:rPr>
+              <a:t>REQ-05</a:t>
+            </a:r>
+            <a:r>
+              <a:rPr lang="en-US" sz="2000" b="0" u="none" strike="noStrike" dirty="0">
+                <a:solidFill>
+                  <a:srgbClr val="000000"/>
+                </a:solidFill>
+                <a:effectLst/>
+                <a:uFillTx/>
+                <a:latin typeface="Times New Roman"/>
+              </a:rPr>
+              <a:t>: The system must check the database to see if the user exists</a:t>
+            </a:r>
+            <a:r>
+              <a:rPr lang="en-US" sz="2000" b="0" u="none" strike="noStrike" dirty="0" smtClean="0">
+                <a:solidFill>
+                  <a:srgbClr val="000000"/>
+                </a:solidFill>
+                <a:effectLst/>
+                <a:uFillTx/>
+                <a:latin typeface="Times New Roman"/>
+              </a:rPr>
+              <a:t>.</a:t>
+            </a:r>
+            <a:endParaRPr lang="en-US" sz="2000" b="0" u="none" strike="noStrike" dirty="0">
+              <a:solidFill>
+                <a:srgbClr val="000000"/>
+              </a:solidFill>
+              <a:effectLst/>
+              <a:uFillTx/>
+              <a:latin typeface="Times New Roman"/>
+            </a:endParaRPr>
+          </a:p>
+          <a:p>
+            <a:pPr algn="l">
               <a:spcBef>
                 <a:spcPts val="879"/>
               </a:spcBef>
               <a:spcAft>
                 <a:spcPts val="879"/>
               </a:spcAft>
-              <a:buNone/>
-            </a:pPr>
-            <a:r>
-              <a:rPr lang="en-US" sz="2000" b="0" u="none" strike="noStrike">
-                <a:solidFill>
-                  <a:srgbClr val="000000"/>
-                </a:solidFill>
-                <a:effectLst/>
-                <a:uFillTx/>
+            </a:pPr>
+            <a:r>
+              <a:rPr lang="en-US" sz="2000" dirty="0" smtClean="0">
                 <a:latin typeface="Times New Roman"/>
               </a:rPr>
-              <a:t>REQ-06: The system must block the user after 3 bad passwords.</a:t>
-            </a:r>
-            <a:endParaRPr lang="en-US" sz="2000" b="0" u="none" strike="noStrike">
-              <a:solidFill>
-                <a:srgbClr val="000000"/>
-              </a:solidFill>
-              <a:effectLst/>
-              <a:uFillTx/>
-              <a:latin typeface="Times New Roman"/>
-            </a:endParaRPr>
-          </a:p>
-          <a:p>
-            <a:pPr indent="0" algn="l">
+              <a:t>✔</a:t>
+            </a:r>
+            <a:r>
+              <a:rPr lang="" sz="2000" dirty="0" smtClean="0">
+                <a:latin typeface="Times New Roman"/>
+              </a:rPr>
+              <a:t> </a:t>
+            </a:r>
+            <a:r>
+              <a:rPr lang="en-US" sz="2000" dirty="0" smtClean="0">
+                <a:latin typeface="Times New Roman"/>
+              </a:rPr>
+              <a:t>REQ-06</a:t>
+            </a:r>
+            <a:r>
+              <a:rPr lang="en-US" sz="2000" b="0" u="none" strike="noStrike" dirty="0">
+                <a:solidFill>
+                  <a:srgbClr val="000000"/>
+                </a:solidFill>
+                <a:effectLst/>
+                <a:uFillTx/>
+                <a:latin typeface="Times New Roman"/>
+              </a:rPr>
+              <a:t>: The system must block the user after 3 bad passwords</a:t>
+            </a:r>
+            <a:r>
+              <a:rPr lang="en-US" sz="2000" b="0" u="none" strike="noStrike" dirty="0" smtClean="0">
+                <a:solidFill>
+                  <a:srgbClr val="000000"/>
+                </a:solidFill>
+                <a:effectLst/>
+                <a:uFillTx/>
+                <a:latin typeface="Times New Roman"/>
+              </a:rPr>
+              <a:t>.</a:t>
+            </a:r>
+            <a:endParaRPr lang="en-US" sz="2000" b="0" u="none" strike="noStrike" dirty="0">
+              <a:solidFill>
+                <a:srgbClr val="000000"/>
+              </a:solidFill>
+              <a:effectLst/>
+              <a:uFillTx/>
+              <a:latin typeface="Times New Roman"/>
+            </a:endParaRPr>
+          </a:p>
+          <a:p>
+            <a:pPr algn="l">
               <a:spcBef>
                 <a:spcPts val="879"/>
               </a:spcBef>
               <a:spcAft>
                 <a:spcPts val="879"/>
               </a:spcAft>
-              <a:buNone/>
-            </a:pPr>
-            <a:r>
-              <a:rPr lang="en-US" sz="2000" b="0" u="none" strike="noStrike">
-                <a:solidFill>
-                  <a:srgbClr val="000000"/>
-                </a:solidFill>
-                <a:effectLst/>
-                <a:uFillTx/>
+            </a:pPr>
+            <a:r>
+              <a:rPr lang="en-US" sz="2000" dirty="0" smtClean="0">
                 <a:latin typeface="Times New Roman"/>
               </a:rPr>
-              <a:t>REQ-07: The system must show the right screen depending on the user type.</a:t>
-            </a:r>
-            <a:endParaRPr lang="en-US" sz="2000" b="0" u="none" strike="noStrike">
-              <a:solidFill>
-                <a:srgbClr val="000000"/>
-              </a:solidFill>
-              <a:effectLst/>
-              <a:uFillTx/>
-              <a:latin typeface="Times New Roman"/>
-            </a:endParaRPr>
-          </a:p>
-          <a:p>
-            <a:pPr indent="0" algn="l">
+              <a:t>✔</a:t>
+            </a:r>
+            <a:r>
+              <a:rPr lang="" sz="2000" dirty="0" smtClean="0">
+                <a:latin typeface="Times New Roman"/>
+              </a:rPr>
+              <a:t> </a:t>
+            </a:r>
+            <a:r>
+              <a:rPr lang="en-US" sz="2000" dirty="0" smtClean="0">
+                <a:latin typeface="Times New Roman"/>
+              </a:rPr>
+              <a:t>REQ-07</a:t>
+            </a:r>
+            <a:r>
+              <a:rPr lang="en-US" sz="2000" b="0" u="none" strike="noStrike" dirty="0">
+                <a:solidFill>
+                  <a:srgbClr val="000000"/>
+                </a:solidFill>
+                <a:effectLst/>
+                <a:uFillTx/>
+                <a:latin typeface="Times New Roman"/>
+              </a:rPr>
+              <a:t>: The system must show the right screen depending on the user type.</a:t>
+            </a:r>
+          </a:p>
+          <a:p>
+            <a:pPr algn="l">
               <a:spcBef>
                 <a:spcPts val="879"/>
               </a:spcBef>
               <a:spcAft>
                 <a:spcPts val="879"/>
               </a:spcAft>
-              <a:buNone/>
-            </a:pPr>
-            <a:r>
-              <a:rPr lang="en-US" sz="2000" b="0" u="none" strike="noStrike">
-                <a:solidFill>
-                  <a:srgbClr val="000000"/>
-                </a:solidFill>
-                <a:effectLst/>
-                <a:uFillTx/>
+            </a:pPr>
+            <a:r>
+              <a:rPr lang="en-US" sz="2000" dirty="0" smtClean="0">
                 <a:latin typeface="Times New Roman"/>
               </a:rPr>
-              <a:t>REQ-08: The app must have a log out button.</a:t>
-            </a:r>
-            <a:endParaRPr lang="en-US" sz="2000" b="0" u="none" strike="noStrike">
-              <a:solidFill>
-                <a:srgbClr val="000000"/>
-              </a:solidFill>
-              <a:effectLst/>
-              <a:uFillTx/>
-              <a:latin typeface="Times New Roman"/>
-            </a:endParaRPr>
+              <a:t>✔</a:t>
+            </a:r>
+            <a:r>
+              <a:rPr lang="" sz="2000" dirty="0" smtClean="0">
+                <a:latin typeface="Times New Roman"/>
+              </a:rPr>
+              <a:t> </a:t>
+            </a:r>
+            <a:r>
+              <a:rPr lang="en-US" sz="2000" dirty="0" smtClean="0">
+                <a:latin typeface="Times New Roman"/>
+              </a:rPr>
+              <a:t>REQ-08</a:t>
+            </a:r>
+            <a:r>
+              <a:rPr lang="en-US" sz="2000" b="0" u="none" strike="noStrike" dirty="0">
+                <a:solidFill>
+                  <a:srgbClr val="000000"/>
+                </a:solidFill>
+                <a:effectLst/>
+                <a:uFillTx/>
+                <a:latin typeface="Times New Roman"/>
+              </a:rPr>
+              <a:t>: The app must have a log out button.</a:t>
+            </a:r>
           </a:p>
         </p:txBody>
       </p:sp>
     </p:spTree>
   </p:cSld>
-  <mc:AlternateContent>
+  <p:clrMapOvr>
+    <a:masterClrMapping/>
+  </p:clrMapOvr>
+  <mc:AlternateContent xmlns:mc="http://schemas.openxmlformats.org/markup-compatibility/2006" xmlns:p14="http://schemas.microsoft.com/office/powerpoint/2010/main">
     <mc:Choice Requires="p14">
       <p:transition spd="slow" p14:dur="2000"/>
     </mc:Choice>
-    <mc:Fallback>
+    <mc:Fallback xmlns="" xmlns:p15="http://schemas.microsoft.com/office/powerpoint/2012/main">
       <p:transition spd="slow"/>
     </mc:Fallback>
   </mc:AlternateContent>
+  <p:timing>
+    <p:tnLst>
+      <p:par>
+        <p:cTn id="1" dur="indefinite" restart="never" nodeType="tmRoot"/>
+      </p:par>
+    </p:tnLst>
+  </p:timing>
 </p:sld>
 </file>
 
 <file path=ppt/slides/slide3.xml><?xml version="1.0" encoding="utf-8"?>
-<p:sld xmlns:a="http://schemas.openxmlformats.org/drawingml/2006/main" xmlns:p="http://schemas.openxmlformats.org/presentationml/2006/main" xmlns:r="http://schemas.openxmlformats.org/officeDocument/2006/relationships" xmlns:p14="http://schemas.microsoft.com/office/powerpoint/2010/main" xmlns:p15="http://schemas.microsoft.com/office/powerpoint/2012/main" xmlns:mc="http://schemas.openxmlformats.org/markup-compatibility/2006">
+<p:sld xmlns:a="http://schemas.openxmlformats.org/drawingml/2006/main" xmlns:r="http://schemas.openxmlformats.org/officeDocument/2006/relationships" xmlns:p="http://schemas.openxmlformats.org/presentationml/2006/main">
   <p:cSld>
     <p:spTree>
       <p:nvGrpSpPr>
@@ -2704,12 +4238,13 @@
           <a:bodyPr lIns="0" tIns="0" rIns="0" bIns="0" anchor="ctr">
             <a:spAutoFit/>
           </a:bodyPr>
+          <a:lstStyle/>
           <a:p>
             <a:pPr indent="0" algn="l">
               <a:buNone/>
             </a:pPr>
             <a:r>
-              <a:rPr lang="en-US" sz="3200" b="1" u="none" strike="noStrike">
+              <a:rPr lang="en-US" sz="3200" b="1" u="none" strike="noStrike" dirty="0">
                 <a:solidFill>
                   <a:srgbClr val="000000"/>
                 </a:solidFill>
@@ -2719,7 +4254,7 @@
               </a:rPr>
               <a:t>Fleet Management</a:t>
             </a:r>
-            <a:endParaRPr lang="en-US" sz="3200" b="0" u="none" strike="noStrike">
+            <a:endParaRPr lang="en-US" sz="3200" b="0" u="none" strike="noStrike" dirty="0">
               <a:solidFill>
                 <a:srgbClr val="000000"/>
               </a:solidFill>
@@ -2755,189 +4290,340 @@
         </p:spPr>
         <p:txBody>
           <a:bodyPr lIns="0" tIns="0" rIns="0" bIns="0" anchor="t">
-            <a:normAutofit fontScale="85000" lnSpcReduction="19999"/>
+            <a:normAutofit fontScale="92500" lnSpcReduction="19999"/>
           </a:bodyPr>
-          <a:p>
-            <a:pPr indent="0" algn="l">
+          <a:lstStyle/>
+          <a:p>
+            <a:pPr algn="l">
               <a:spcBef>
                 <a:spcPts val="1417"/>
               </a:spcBef>
-              <a:buNone/>
-            </a:pPr>
-            <a:r>
-              <a:rPr lang="en-US" sz="2000" b="0" u="none" strike="noStrike">
-                <a:solidFill>
-                  <a:srgbClr val="000000"/>
-                </a:solidFill>
-                <a:effectLst/>
-                <a:uFillTx/>
-                <a:latin typeface="New times roman"/>
-              </a:rPr>
-              <a:t>REQ-09: Admins must choose the vehicle type only from: Truck, Van, Lorrie, Ship, Airplane, or Train.</a:t>
-            </a:r>
-            <a:endParaRPr lang="en-US" sz="2000" b="0" u="none" strike="noStrike">
-              <a:solidFill>
-                <a:srgbClr val="000000"/>
-              </a:solidFill>
-              <a:effectLst/>
-              <a:uFillTx/>
-              <a:latin typeface="Times New Roman"/>
-            </a:endParaRPr>
-          </a:p>
-          <a:p>
-            <a:pPr indent="0" algn="l">
+            </a:pPr>
+            <a:r>
+              <a:rPr lang="en-US" sz="2000" dirty="0" smtClean="0">
+                <a:latin typeface="New times roman"/>
+              </a:rPr>
+              <a:t>✔</a:t>
+            </a:r>
+            <a:r>
+              <a:rPr lang="" sz="2000" smtClean="0">
+                <a:latin typeface="New times roman"/>
+              </a:rPr>
+              <a:t> </a:t>
+            </a:r>
+            <a:r>
+              <a:rPr lang="en-US" sz="2000" dirty="0" smtClean="0">
+                <a:latin typeface="New times roman"/>
+              </a:rPr>
+              <a:t>REQ-09</a:t>
+            </a:r>
+            <a:r>
+              <a:rPr lang="en-US" sz="2000" b="0" u="none" strike="noStrike" dirty="0">
+                <a:solidFill>
+                  <a:srgbClr val="000000"/>
+                </a:solidFill>
+                <a:effectLst/>
+                <a:uFillTx/>
+                <a:latin typeface="New times roman"/>
+              </a:rPr>
+              <a:t>: Admins must choose the vehicle type only from: Truck, Van, Lorrie, Ship, Airplane, or Train.</a:t>
+            </a:r>
+            <a:endParaRPr lang="en-US" sz="2000" b="0" u="none" strike="noStrike" dirty="0">
+              <a:solidFill>
+                <a:srgbClr val="000000"/>
+              </a:solidFill>
+              <a:effectLst/>
+              <a:uFillTx/>
+              <a:latin typeface="Times New Roman"/>
+            </a:endParaRPr>
+          </a:p>
+          <a:p>
+            <a:pPr algn="l">
               <a:spcBef>
                 <a:spcPts val="1417"/>
               </a:spcBef>
-              <a:buNone/>
-            </a:pPr>
-            <a:r>
-              <a:rPr lang="en-US" sz="2000" b="0" u="none" strike="noStrike">
-                <a:solidFill>
-                  <a:srgbClr val="000000"/>
-                </a:solidFill>
-                <a:effectLst/>
-                <a:uFillTx/>
-                <a:latin typeface="New times roman"/>
-              </a:rPr>
-              <a:t>REQ-10: The system must save the name or ID of the vehicle.</a:t>
-            </a:r>
-            <a:endParaRPr lang="en-US" sz="2000" b="0" u="none" strike="noStrike">
-              <a:solidFill>
-                <a:srgbClr val="000000"/>
-              </a:solidFill>
-              <a:effectLst/>
-              <a:uFillTx/>
-              <a:latin typeface="Times New Roman"/>
-            </a:endParaRPr>
-          </a:p>
-          <a:p>
-            <a:pPr indent="0" algn="l">
+            </a:pPr>
+            <a:r>
+              <a:rPr lang="en-US" sz="2000" dirty="0" smtClean="0">
+                <a:latin typeface="New times roman"/>
+              </a:rPr>
+              <a:t>✔</a:t>
+            </a:r>
+            <a:r>
+              <a:rPr lang="" sz="2000" smtClean="0">
+                <a:latin typeface="New times roman"/>
+              </a:rPr>
+              <a:t> </a:t>
+            </a:r>
+            <a:r>
+              <a:rPr lang="en-US" sz="2000" dirty="0" smtClean="0">
+                <a:latin typeface="New times roman"/>
+              </a:rPr>
+              <a:t>REQ-10</a:t>
+            </a:r>
+            <a:r>
+              <a:rPr lang="en-US" sz="2000" b="0" u="none" strike="noStrike" dirty="0">
+                <a:solidFill>
+                  <a:srgbClr val="000000"/>
+                </a:solidFill>
+                <a:effectLst/>
+                <a:uFillTx/>
+                <a:latin typeface="New times roman"/>
+              </a:rPr>
+              <a:t>: The system must save the name or ID of the </a:t>
+            </a:r>
+            <a:r>
+              <a:rPr lang="en-US" sz="2000" b="0" u="none" strike="noStrike" dirty="0" smtClean="0">
+                <a:solidFill>
+                  <a:srgbClr val="000000"/>
+                </a:solidFill>
+                <a:effectLst/>
+                <a:uFillTx/>
+                <a:latin typeface="New times roman"/>
+              </a:rPr>
+              <a:t>vehicle.</a:t>
+            </a:r>
+            <a:endParaRPr lang="en-US" sz="2000" b="0" u="none" strike="noStrike" dirty="0" smtClean="0">
+              <a:solidFill>
+                <a:srgbClr val="000000"/>
+              </a:solidFill>
+              <a:effectLst/>
+              <a:uFillTx/>
+              <a:latin typeface="Times New Roman"/>
+            </a:endParaRPr>
+          </a:p>
+          <a:p>
+            <a:pPr algn="l">
               <a:spcBef>
                 <a:spcPts val="1417"/>
               </a:spcBef>
-              <a:buNone/>
-            </a:pPr>
-            <a:r>
-              <a:rPr lang="en-US" sz="2000" b="0" u="none" strike="noStrike">
-                <a:solidFill>
-                  <a:srgbClr val="000000"/>
-                </a:solidFill>
-                <a:effectLst/>
-                <a:uFillTx/>
-                <a:latin typeface="New times roman"/>
-              </a:rPr>
-              <a:t>REQ-11: The system must save the maximum cargo capacity (in kg or volume) the vehicle has.</a:t>
-            </a:r>
-            <a:endParaRPr lang="en-US" sz="2000" b="0" u="none" strike="noStrike">
-              <a:solidFill>
-                <a:srgbClr val="000000"/>
-              </a:solidFill>
-              <a:effectLst/>
-              <a:uFillTx/>
-              <a:latin typeface="Times New Roman"/>
-            </a:endParaRPr>
-          </a:p>
-          <a:p>
-            <a:pPr indent="0" algn="l">
+            </a:pPr>
+            <a:r>
+              <a:rPr lang="en-US" sz="2000" dirty="0" smtClean="0">
+                <a:latin typeface="New times roman"/>
+              </a:rPr>
+              <a:t>✔</a:t>
+            </a:r>
+            <a:r>
+              <a:rPr lang="" sz="2000" smtClean="0">
+                <a:latin typeface="New times roman"/>
+              </a:rPr>
+              <a:t> </a:t>
+            </a:r>
+            <a:r>
+              <a:rPr lang="en-US" sz="2000" dirty="0" smtClean="0">
+                <a:latin typeface="New times roman"/>
+              </a:rPr>
+              <a:t>REQ-11</a:t>
+            </a:r>
+            <a:r>
+              <a:rPr lang="en-US" sz="2000" b="0" u="none" strike="noStrike" dirty="0" smtClean="0">
+                <a:solidFill>
+                  <a:srgbClr val="000000"/>
+                </a:solidFill>
+                <a:effectLst/>
+                <a:uFillTx/>
+                <a:latin typeface="New times roman"/>
+              </a:rPr>
+              <a:t>: The system must save the maximum cargo capacity (in kg or volume) the vehicle has.</a:t>
+            </a:r>
+            <a:endParaRPr lang="en-US" sz="2000" b="0" u="none" strike="noStrike" dirty="0" smtClean="0">
+              <a:solidFill>
+                <a:srgbClr val="000000"/>
+              </a:solidFill>
+              <a:effectLst/>
+              <a:uFillTx/>
+              <a:latin typeface="Times New Roman"/>
+            </a:endParaRPr>
+          </a:p>
+          <a:p>
+            <a:pPr algn="l">
               <a:spcBef>
                 <a:spcPts val="1417"/>
               </a:spcBef>
-              <a:buNone/>
-            </a:pPr>
-            <a:r>
-              <a:rPr lang="en-US" sz="2000" b="0" u="none" strike="noStrike">
-                <a:solidFill>
-                  <a:srgbClr val="000000"/>
-                </a:solidFill>
-                <a:effectLst/>
-                <a:uFillTx/>
-                <a:latin typeface="New times roman"/>
-              </a:rPr>
-              <a:t>REQ-12: The system must show if the vehicle is free, has fuel or it's busy.</a:t>
-            </a:r>
-            <a:endParaRPr lang="en-US" sz="2000" b="0" u="none" strike="noStrike">
-              <a:solidFill>
-                <a:srgbClr val="000000"/>
-              </a:solidFill>
-              <a:effectLst/>
-              <a:uFillTx/>
-              <a:latin typeface="Times New Roman"/>
-            </a:endParaRPr>
-          </a:p>
-          <a:p>
-            <a:pPr indent="0" algn="l">
+            </a:pPr>
+            <a:r>
+              <a:rPr lang="en-US" sz="2000" dirty="0">
+                <a:latin typeface="New times roman"/>
+              </a:rPr>
+              <a:t>✔</a:t>
+            </a:r>
+            <a:r>
+              <a:rPr lang="" sz="2000" dirty="0">
+                <a:latin typeface="New times roman"/>
+              </a:rPr>
+              <a:t> </a:t>
+            </a:r>
+            <a:r>
+              <a:rPr lang="en-US" sz="2000" b="0" u="none" strike="noStrike" dirty="0" smtClean="0">
+                <a:solidFill>
+                  <a:srgbClr val="000000"/>
+                </a:solidFill>
+                <a:effectLst/>
+                <a:uFillTx/>
+                <a:latin typeface="New times roman"/>
+              </a:rPr>
+              <a:t>REQ-12</a:t>
+            </a:r>
+            <a:r>
+              <a:rPr lang="en-US" sz="2000" b="0" u="none" strike="noStrike" dirty="0">
+                <a:solidFill>
+                  <a:srgbClr val="000000"/>
+                </a:solidFill>
+                <a:effectLst/>
+                <a:uFillTx/>
+                <a:latin typeface="New times roman"/>
+              </a:rPr>
+              <a:t>: The system must show if the vehicle is free, has fuel or it's busy.</a:t>
+            </a:r>
+            <a:endParaRPr lang="en-US" sz="2000" b="0" u="none" strike="noStrike" dirty="0">
+              <a:solidFill>
+                <a:srgbClr val="000000"/>
+              </a:solidFill>
+              <a:effectLst/>
+              <a:uFillTx/>
+              <a:latin typeface="Times New Roman"/>
+            </a:endParaRPr>
+          </a:p>
+          <a:p>
+            <a:pPr algn="l">
               <a:spcBef>
                 <a:spcPts val="1417"/>
               </a:spcBef>
-              <a:buNone/>
-            </a:pPr>
-            <a:r>
-              <a:rPr lang="en-US" sz="2000" b="0" u="none" strike="noStrike">
-                <a:solidFill>
-                  <a:srgbClr val="000000"/>
-                </a:solidFill>
-                <a:effectLst/>
-                <a:uFillTx/>
-                <a:latin typeface="New times roman"/>
-              </a:rPr>
-              <a:t>REQ-13: The system must show if the vehicle is broken and needs repairs.</a:t>
-            </a:r>
-            <a:endParaRPr lang="en-US" sz="2000" b="0" u="none" strike="noStrike">
-              <a:solidFill>
-                <a:srgbClr val="000000"/>
-              </a:solidFill>
-              <a:effectLst/>
-              <a:uFillTx/>
-              <a:latin typeface="Times New Roman"/>
-            </a:endParaRPr>
-          </a:p>
-          <a:p>
-            <a:pPr indent="0" algn="l">
+            </a:pPr>
+            <a:r>
+              <a:rPr lang="en-US" sz="2000" dirty="0">
+                <a:latin typeface="New times roman"/>
+              </a:rPr>
+              <a:t>✔</a:t>
+            </a:r>
+            <a:r>
+              <a:rPr lang="" sz="2000" dirty="0">
+                <a:latin typeface="New times roman"/>
+              </a:rPr>
+              <a:t> </a:t>
+            </a:r>
+            <a:r>
+              <a:rPr lang="en-US" sz="2000" b="0" u="none" strike="noStrike" dirty="0" smtClean="0">
+                <a:solidFill>
+                  <a:srgbClr val="000000"/>
+                </a:solidFill>
+                <a:effectLst/>
+                <a:uFillTx/>
+                <a:latin typeface="New times roman"/>
+              </a:rPr>
+              <a:t>REQ-13</a:t>
+            </a:r>
+            <a:r>
+              <a:rPr lang="en-US" sz="2000" b="0" u="none" strike="noStrike" dirty="0">
+                <a:solidFill>
+                  <a:srgbClr val="000000"/>
+                </a:solidFill>
+                <a:effectLst/>
+                <a:uFillTx/>
+                <a:latin typeface="New times roman"/>
+              </a:rPr>
+              <a:t>: The system must show if the vehicle is broken and needs repairs.</a:t>
+            </a:r>
+            <a:endParaRPr lang="en-US" sz="2000" b="0" u="none" strike="noStrike" dirty="0">
+              <a:solidFill>
+                <a:srgbClr val="000000"/>
+              </a:solidFill>
+              <a:effectLst/>
+              <a:uFillTx/>
+              <a:latin typeface="Times New Roman"/>
+            </a:endParaRPr>
+          </a:p>
+          <a:p>
+            <a:pPr algn="l">
               <a:spcBef>
                 <a:spcPts val="1417"/>
               </a:spcBef>
-              <a:buNone/>
-            </a:pPr>
-            <a:r>
-              <a:rPr lang="en-US" sz="2000" b="0" u="none" strike="noStrike">
-                <a:solidFill>
-                  <a:srgbClr val="000000"/>
-                </a:solidFill>
-                <a:effectLst/>
-                <a:uFillTx/>
-                <a:latin typeface="New times roman"/>
-              </a:rPr>
-              <a:t>REQ-14: The system must show the assigned driver or pilot for each vehicle.</a:t>
-            </a:r>
-            <a:endParaRPr lang="en-US" sz="2000" b="0" u="none" strike="noStrike">
-              <a:solidFill>
-                <a:srgbClr val="000000"/>
-              </a:solidFill>
-              <a:effectLst/>
-              <a:uFillTx/>
-              <a:latin typeface="Times New Roman"/>
-            </a:endParaRPr>
-          </a:p>
-          <a:p>
-            <a:pPr indent="0" algn="l">
+            </a:pPr>
+            <a:r>
+              <a:rPr lang="en-US" sz="2000" dirty="0">
+                <a:latin typeface="New times roman"/>
+              </a:rPr>
+              <a:t>✔</a:t>
+            </a:r>
+            <a:r>
+              <a:rPr lang="" sz="2000" dirty="0">
+                <a:latin typeface="New times roman"/>
+              </a:rPr>
+              <a:t> </a:t>
+            </a:r>
+            <a:r>
+              <a:rPr lang="en-US" sz="2000" b="0" u="none" strike="noStrike" dirty="0" smtClean="0">
+                <a:solidFill>
+                  <a:srgbClr val="000000"/>
+                </a:solidFill>
+                <a:effectLst/>
+                <a:uFillTx/>
+                <a:latin typeface="New times roman"/>
+              </a:rPr>
+              <a:t>REQ-14</a:t>
+            </a:r>
+            <a:r>
+              <a:rPr lang="en-US" sz="2000" b="0" u="none" strike="noStrike" dirty="0">
+                <a:solidFill>
+                  <a:srgbClr val="000000"/>
+                </a:solidFill>
+                <a:effectLst/>
+                <a:uFillTx/>
+                <a:latin typeface="New times roman"/>
+              </a:rPr>
+              <a:t>: The system must show the assigned driver or pilot for each vehicle.</a:t>
+            </a:r>
+            <a:endParaRPr lang="en-US" sz="2000" b="0" u="none" strike="noStrike" dirty="0">
+              <a:solidFill>
+                <a:srgbClr val="000000"/>
+              </a:solidFill>
+              <a:effectLst/>
+              <a:uFillTx/>
+              <a:latin typeface="Times New Roman"/>
+            </a:endParaRPr>
+          </a:p>
+          <a:p>
+            <a:pPr algn="l">
               <a:spcBef>
                 <a:spcPts val="1417"/>
               </a:spcBef>
-              <a:buNone/>
-            </a:pPr>
-            <a:r>
-              <a:rPr lang="en-US" sz="2000" b="0" u="none" strike="noStrike">
-                <a:solidFill>
-                  <a:srgbClr val="000000"/>
-                </a:solidFill>
-                <a:effectLst/>
-                <a:uFillTx/>
-                <a:latin typeface="New times roman"/>
-              </a:rPr>
-              <a:t>REQ-15: The app must save all the vehicles in a local file.</a:t>
-            </a:r>
-            <a:endParaRPr lang="en-US" sz="2000" b="0" u="none" strike="noStrike">
+            </a:pPr>
+            <a:r>
+              <a:rPr lang="en-US" sz="2000" dirty="0">
+                <a:latin typeface="New times roman"/>
+              </a:rPr>
+              <a:t>✔</a:t>
+            </a:r>
+            <a:r>
+              <a:rPr lang="" sz="2000" dirty="0">
+                <a:latin typeface="New times roman"/>
+              </a:rPr>
+              <a:t> </a:t>
+            </a:r>
+            <a:r>
+              <a:rPr lang="en-US" sz="2000" b="0" u="none" strike="noStrike" dirty="0" smtClean="0">
+                <a:solidFill>
+                  <a:srgbClr val="000000"/>
+                </a:solidFill>
+                <a:effectLst/>
+                <a:uFillTx/>
+                <a:latin typeface="New times roman"/>
+              </a:rPr>
+              <a:t>REQ-15</a:t>
+            </a:r>
+            <a:r>
+              <a:rPr lang="en-US" sz="2000" b="0" u="none" strike="noStrike" dirty="0">
+                <a:solidFill>
+                  <a:srgbClr val="000000"/>
+                </a:solidFill>
+                <a:effectLst/>
+                <a:uFillTx/>
+                <a:latin typeface="New times roman"/>
+              </a:rPr>
+              <a:t>: The app must save all the vehicles in a local file.</a:t>
+            </a:r>
+            <a:endParaRPr lang="en-US" sz="2000" b="0" u="none" strike="noStrike" dirty="0">
               <a:solidFill>
                 <a:srgbClr val="000000"/>
               </a:solidFill>
@@ -2950,19 +4636,29 @@
       </p:sp>
     </p:spTree>
   </p:cSld>
-  <mc:AlternateContent>
+  <p:clrMapOvr>
+    <a:masterClrMapping/>
+  </p:clrMapOvr>
+  <mc:AlternateContent xmlns:mc="http://schemas.openxmlformats.org/markup-compatibility/2006" xmlns:p14="http://schemas.microsoft.com/office/powerpoint/2010/main">
     <mc:Choice Requires="p14">
       <p:transition spd="slow" p14:dur="2000"/>
     </mc:Choice>
-    <mc:Fallback>
+    <mc:Fallback xmlns="" xmlns:p15="http://schemas.microsoft.com/office/powerpoint/2012/main">
       <p:transition spd="slow"/>
     </mc:Fallback>
   </mc:AlternateContent>
+  <p:timing>
+    <p:tnLst>
+      <p:par>
+        <p:cTn id="1" dur="indefinite" restart="never" nodeType="tmRoot"/>
+      </p:par>
+    </p:tnLst>
+  </p:timing>
 </p:sld>
 </file>
 
 <file path=ppt/slides/slide4.xml><?xml version="1.0" encoding="utf-8"?>
-<p:sld xmlns:a="http://schemas.openxmlformats.org/drawingml/2006/main" xmlns:p="http://schemas.openxmlformats.org/presentationml/2006/main" xmlns:r="http://schemas.openxmlformats.org/officeDocument/2006/relationships" xmlns:p14="http://schemas.microsoft.com/office/powerpoint/2010/main" xmlns:p15="http://schemas.microsoft.com/office/powerpoint/2012/main" xmlns:mc="http://schemas.openxmlformats.org/markup-compatibility/2006">
+<p:sld xmlns:a="http://schemas.openxmlformats.org/drawingml/2006/main" xmlns:r="http://schemas.openxmlformats.org/officeDocument/2006/relationships" xmlns:p="http://schemas.openxmlformats.org/presentationml/2006/main">
   <p:cSld>
     <p:spTree>
       <p:nvGrpSpPr>
@@ -3005,6 +4701,7 @@
           <a:bodyPr lIns="0" tIns="0" rIns="0" bIns="0" anchor="ctr">
             <a:spAutoFit/>
           </a:bodyPr>
+          <a:lstStyle/>
           <a:p>
             <a:pPr indent="0" algn="l">
               <a:buNone/>
@@ -3056,216 +4753,361 @@
         </p:spPr>
         <p:txBody>
           <a:bodyPr lIns="0" tIns="0" rIns="0" bIns="0" anchor="t">
-            <a:normAutofit fontScale="85000" lnSpcReduction="9999"/>
+            <a:normAutofit fontScale="92500" lnSpcReduction="19999"/>
           </a:bodyPr>
-          <a:p>
-            <a:pPr indent="0" algn="l">
+          <a:lstStyle/>
+          <a:p>
+            <a:pPr algn="l">
               <a:spcBef>
                 <a:spcPts val="1417"/>
               </a:spcBef>
-              <a:buNone/>
-            </a:pPr>
-            <a:r>
-              <a:rPr lang="en-US" sz="2000" b="0" u="none" strike="noStrike">
-                <a:solidFill>
-                  <a:srgbClr val="000000"/>
-                </a:solidFill>
-                <a:effectLst/>
-                <a:uFillTx/>
-                <a:latin typeface="New times roman"/>
-              </a:rPr>
-              <a:t>REQ-16: Administrators will be able to add drivers.</a:t>
-            </a:r>
-            <a:endParaRPr lang="en-US" sz="2000" b="0" u="none" strike="noStrike">
-              <a:solidFill>
-                <a:srgbClr val="000000"/>
-              </a:solidFill>
-              <a:effectLst/>
-              <a:uFillTx/>
-              <a:latin typeface="Times New Roman"/>
-            </a:endParaRPr>
-          </a:p>
-          <a:p>
-            <a:pPr indent="0" algn="l">
+            </a:pPr>
+            <a:r>
+              <a:rPr lang="en-US" sz="2000" dirty="0"/>
+              <a:t>✔</a:t>
+            </a:r>
+            <a:r>
+              <a:rPr lang="ro-RO" sz="2000" dirty="0"/>
+              <a:t> </a:t>
+            </a:r>
+            <a:r>
+              <a:rPr lang="en-US" sz="2000" b="0" u="none" strike="noStrike" dirty="0" smtClean="0">
+                <a:solidFill>
+                  <a:srgbClr val="000000"/>
+                </a:solidFill>
+                <a:effectLst/>
+                <a:uFillTx/>
+                <a:latin typeface="New times roman"/>
+              </a:rPr>
+              <a:t>REQ-16</a:t>
+            </a:r>
+            <a:r>
+              <a:rPr lang="en-US" sz="2000" b="0" u="none" strike="noStrike" dirty="0">
+                <a:solidFill>
+                  <a:srgbClr val="000000"/>
+                </a:solidFill>
+                <a:effectLst/>
+                <a:uFillTx/>
+                <a:latin typeface="New times roman"/>
+              </a:rPr>
+              <a:t>: Administrators will be able to add drivers.</a:t>
+            </a:r>
+            <a:endParaRPr lang="en-US" sz="2000" b="0" u="none" strike="noStrike" dirty="0">
+              <a:solidFill>
+                <a:srgbClr val="000000"/>
+              </a:solidFill>
+              <a:effectLst/>
+              <a:uFillTx/>
+              <a:latin typeface="Times New Roman"/>
+            </a:endParaRPr>
+          </a:p>
+          <a:p>
+            <a:pPr algn="l">
               <a:spcBef>
                 <a:spcPts val="1417"/>
               </a:spcBef>
-              <a:buNone/>
-            </a:pPr>
-            <a:r>
-              <a:rPr lang="en-US" sz="2000" b="0" u="none" strike="noStrike">
-                <a:solidFill>
-                  <a:srgbClr val="000000"/>
-                </a:solidFill>
-                <a:effectLst/>
-                <a:uFillTx/>
-                <a:latin typeface="New times roman"/>
-              </a:rPr>
-              <a:t>REQ-17: Administrators will be able to modify drivers.</a:t>
-            </a:r>
-            <a:endParaRPr lang="en-US" sz="2000" b="0" u="none" strike="noStrike">
-              <a:solidFill>
-                <a:srgbClr val="000000"/>
-              </a:solidFill>
-              <a:effectLst/>
-              <a:uFillTx/>
-              <a:latin typeface="Times New Roman"/>
-            </a:endParaRPr>
-          </a:p>
-          <a:p>
-            <a:pPr indent="0" algn="l">
+            </a:pPr>
+            <a:r>
+              <a:rPr lang="en-US" sz="2000" dirty="0"/>
+              <a:t>✔</a:t>
+            </a:r>
+            <a:r>
+              <a:rPr lang="ro-RO" sz="2000" dirty="0"/>
+              <a:t> </a:t>
+            </a:r>
+            <a:r>
+              <a:rPr lang="en-US" sz="2000" b="0" u="none" strike="noStrike" dirty="0" smtClean="0">
+                <a:solidFill>
+                  <a:srgbClr val="000000"/>
+                </a:solidFill>
+                <a:effectLst/>
+                <a:uFillTx/>
+                <a:latin typeface="New times roman"/>
+              </a:rPr>
+              <a:t>REQ-17</a:t>
+            </a:r>
+            <a:r>
+              <a:rPr lang="en-US" sz="2000" b="0" u="none" strike="noStrike" dirty="0">
+                <a:solidFill>
+                  <a:srgbClr val="000000"/>
+                </a:solidFill>
+                <a:effectLst/>
+                <a:uFillTx/>
+                <a:latin typeface="New times roman"/>
+              </a:rPr>
+              <a:t>: Administrators will be able to modify drivers.</a:t>
+            </a:r>
+            <a:endParaRPr lang="en-US" sz="2000" b="0" u="none" strike="noStrike" dirty="0">
+              <a:solidFill>
+                <a:srgbClr val="000000"/>
+              </a:solidFill>
+              <a:effectLst/>
+              <a:uFillTx/>
+              <a:latin typeface="Times New Roman"/>
+            </a:endParaRPr>
+          </a:p>
+          <a:p>
+            <a:pPr algn="l">
               <a:spcBef>
                 <a:spcPts val="1417"/>
               </a:spcBef>
-              <a:buNone/>
-            </a:pPr>
-            <a:r>
-              <a:rPr lang="en-US" sz="2000" b="0" u="none" strike="noStrike">
-                <a:solidFill>
-                  <a:srgbClr val="000000"/>
-                </a:solidFill>
-                <a:effectLst/>
-                <a:uFillTx/>
-                <a:latin typeface="New times roman"/>
-              </a:rPr>
-              <a:t>REQ-18: Administrators will be able to activate drivers.</a:t>
-            </a:r>
-            <a:endParaRPr lang="en-US" sz="2000" b="0" u="none" strike="noStrike">
-              <a:solidFill>
-                <a:srgbClr val="000000"/>
-              </a:solidFill>
-              <a:effectLst/>
-              <a:uFillTx/>
-              <a:latin typeface="Times New Roman"/>
-            </a:endParaRPr>
-          </a:p>
-          <a:p>
-            <a:pPr indent="0" algn="l">
+            </a:pPr>
+            <a:r>
+              <a:rPr lang="en-US" sz="2000" dirty="0"/>
+              <a:t>✔</a:t>
+            </a:r>
+            <a:r>
+              <a:rPr lang="ro-RO" sz="2000" dirty="0"/>
+              <a:t> </a:t>
+            </a:r>
+            <a:r>
+              <a:rPr lang="en-US" sz="2000" b="0" u="none" strike="noStrike" dirty="0" smtClean="0">
+                <a:solidFill>
+                  <a:srgbClr val="000000"/>
+                </a:solidFill>
+                <a:effectLst/>
+                <a:uFillTx/>
+                <a:latin typeface="New times roman"/>
+              </a:rPr>
+              <a:t>REQ-18</a:t>
+            </a:r>
+            <a:r>
+              <a:rPr lang="en-US" sz="2000" b="0" u="none" strike="noStrike" dirty="0">
+                <a:solidFill>
+                  <a:srgbClr val="000000"/>
+                </a:solidFill>
+                <a:effectLst/>
+                <a:uFillTx/>
+                <a:latin typeface="New times roman"/>
+              </a:rPr>
+              <a:t>: Administrators will be able to activate drivers.</a:t>
+            </a:r>
+            <a:endParaRPr lang="en-US" sz="2000" b="0" u="none" strike="noStrike" dirty="0">
+              <a:solidFill>
+                <a:srgbClr val="000000"/>
+              </a:solidFill>
+              <a:effectLst/>
+              <a:uFillTx/>
+              <a:latin typeface="Times New Roman"/>
+            </a:endParaRPr>
+          </a:p>
+          <a:p>
+            <a:pPr algn="l">
               <a:spcBef>
                 <a:spcPts val="1417"/>
               </a:spcBef>
-              <a:buNone/>
-            </a:pPr>
-            <a:r>
-              <a:rPr lang="en-US" sz="2000" b="0" u="none" strike="noStrike">
-                <a:solidFill>
-                  <a:srgbClr val="000000"/>
-                </a:solidFill>
-                <a:effectLst/>
-                <a:uFillTx/>
-                <a:latin typeface="New times roman"/>
-              </a:rPr>
-              <a:t>REQ-19: Administrators will be able to deactivate drivers.</a:t>
-            </a:r>
-            <a:endParaRPr lang="en-US" sz="2000" b="0" u="none" strike="noStrike">
-              <a:solidFill>
-                <a:srgbClr val="000000"/>
-              </a:solidFill>
-              <a:effectLst/>
-              <a:uFillTx/>
-              <a:latin typeface="Times New Roman"/>
-            </a:endParaRPr>
-          </a:p>
-          <a:p>
-            <a:pPr indent="0" algn="l">
+            </a:pPr>
+            <a:r>
+              <a:rPr lang="en-US" sz="2000" dirty="0"/>
+              <a:t>✔</a:t>
+            </a:r>
+            <a:r>
+              <a:rPr lang="ro-RO" sz="2000" dirty="0"/>
+              <a:t> </a:t>
+            </a:r>
+            <a:r>
+              <a:rPr lang="en-US" sz="2000" b="0" u="none" strike="noStrike" dirty="0" smtClean="0">
+                <a:solidFill>
+                  <a:srgbClr val="000000"/>
+                </a:solidFill>
+                <a:effectLst/>
+                <a:uFillTx/>
+                <a:latin typeface="New times roman"/>
+              </a:rPr>
+              <a:t>REQ-19</a:t>
+            </a:r>
+            <a:r>
+              <a:rPr lang="en-US" sz="2000" b="0" u="none" strike="noStrike" dirty="0">
+                <a:solidFill>
+                  <a:srgbClr val="000000"/>
+                </a:solidFill>
+                <a:effectLst/>
+                <a:uFillTx/>
+                <a:latin typeface="New times roman"/>
+              </a:rPr>
+              <a:t>: Administrators will be able to deactivate drivers.</a:t>
+            </a:r>
+            <a:endParaRPr lang="en-US" sz="2000" b="0" u="none" strike="noStrike" dirty="0">
+              <a:solidFill>
+                <a:srgbClr val="000000"/>
+              </a:solidFill>
+              <a:effectLst/>
+              <a:uFillTx/>
+              <a:latin typeface="Times New Roman"/>
+            </a:endParaRPr>
+          </a:p>
+          <a:p>
+            <a:pPr algn="l">
               <a:spcBef>
                 <a:spcPts val="1417"/>
               </a:spcBef>
-              <a:buNone/>
-            </a:pPr>
-            <a:r>
-              <a:rPr lang="en-US" sz="2000" b="0" u="none" strike="noStrike">
-                <a:solidFill>
-                  <a:srgbClr val="000000"/>
-                </a:solidFill>
-                <a:effectLst/>
-                <a:uFillTx/>
-                <a:latin typeface="New times roman"/>
-              </a:rPr>
-              <a:t>REQ-20: Each driver will have a profile containing personal data.</a:t>
-            </a:r>
-            <a:endParaRPr lang="en-US" sz="2000" b="0" u="none" strike="noStrike">
-              <a:solidFill>
-                <a:srgbClr val="000000"/>
-              </a:solidFill>
-              <a:effectLst/>
-              <a:uFillTx/>
-              <a:latin typeface="Times New Roman"/>
-            </a:endParaRPr>
-          </a:p>
-          <a:p>
-            <a:pPr indent="0" algn="l">
+            </a:pPr>
+            <a:r>
+              <a:rPr lang="en-US" sz="2000" dirty="0"/>
+              <a:t>✔</a:t>
+            </a:r>
+            <a:r>
+              <a:rPr lang="ro-RO" sz="2000" dirty="0"/>
+              <a:t> </a:t>
+            </a:r>
+            <a:r>
+              <a:rPr lang="en-US" sz="2000" b="0" u="none" strike="noStrike" dirty="0" smtClean="0">
+                <a:solidFill>
+                  <a:srgbClr val="000000"/>
+                </a:solidFill>
+                <a:effectLst/>
+                <a:uFillTx/>
+                <a:latin typeface="New times roman"/>
+              </a:rPr>
+              <a:t>REQ-20</a:t>
+            </a:r>
+            <a:r>
+              <a:rPr lang="en-US" sz="2000" b="0" u="none" strike="noStrike" dirty="0">
+                <a:solidFill>
+                  <a:srgbClr val="000000"/>
+                </a:solidFill>
+                <a:effectLst/>
+                <a:uFillTx/>
+                <a:latin typeface="New times roman"/>
+              </a:rPr>
+              <a:t>: Each driver will have a profile containing personal data.</a:t>
+            </a:r>
+            <a:endParaRPr lang="en-US" sz="2000" b="0" u="none" strike="noStrike" dirty="0">
+              <a:solidFill>
+                <a:srgbClr val="000000"/>
+              </a:solidFill>
+              <a:effectLst/>
+              <a:uFillTx/>
+              <a:latin typeface="Times New Roman"/>
+            </a:endParaRPr>
+          </a:p>
+          <a:p>
+            <a:pPr algn="l">
               <a:spcBef>
                 <a:spcPts val="1417"/>
               </a:spcBef>
-              <a:buNone/>
-            </a:pPr>
-            <a:r>
-              <a:rPr lang="en-US" sz="2000" b="0" u="none" strike="noStrike">
-                <a:solidFill>
-                  <a:srgbClr val="000000"/>
-                </a:solidFill>
-                <a:effectLst/>
-                <a:uFillTx/>
-                <a:latin typeface="New times roman"/>
-              </a:rPr>
-              <a:t>REQ-21: Each driver will have a profile containing licenses.</a:t>
-            </a:r>
-            <a:endParaRPr lang="en-US" sz="2000" b="0" u="none" strike="noStrike">
-              <a:solidFill>
-                <a:srgbClr val="000000"/>
-              </a:solidFill>
-              <a:effectLst/>
-              <a:uFillTx/>
-              <a:latin typeface="Times New Roman"/>
-            </a:endParaRPr>
-          </a:p>
-          <a:p>
-            <a:pPr indent="0" algn="l">
+            </a:pPr>
+            <a:r>
+              <a:rPr lang="en-US" sz="2000" dirty="0"/>
+              <a:t>✔</a:t>
+            </a:r>
+            <a:r>
+              <a:rPr lang="ro-RO" sz="2000" dirty="0"/>
+              <a:t> </a:t>
+            </a:r>
+            <a:r>
+              <a:rPr lang="en-US" sz="2000" b="0" u="none" strike="noStrike" dirty="0" smtClean="0">
+                <a:solidFill>
+                  <a:srgbClr val="000000"/>
+                </a:solidFill>
+                <a:effectLst/>
+                <a:uFillTx/>
+                <a:latin typeface="New times roman"/>
+              </a:rPr>
+              <a:t>REQ-21</a:t>
+            </a:r>
+            <a:r>
+              <a:rPr lang="en-US" sz="2000" b="0" u="none" strike="noStrike" dirty="0">
+                <a:solidFill>
+                  <a:srgbClr val="000000"/>
+                </a:solidFill>
+                <a:effectLst/>
+                <a:uFillTx/>
+                <a:latin typeface="New times roman"/>
+              </a:rPr>
+              <a:t>: Each driver will have a profile containing licenses.</a:t>
+            </a:r>
+            <a:endParaRPr lang="en-US" sz="2000" b="0" u="none" strike="noStrike" dirty="0">
+              <a:solidFill>
+                <a:srgbClr val="000000"/>
+              </a:solidFill>
+              <a:effectLst/>
+              <a:uFillTx/>
+              <a:latin typeface="Times New Roman"/>
+            </a:endParaRPr>
+          </a:p>
+          <a:p>
+            <a:pPr algn="l">
               <a:spcBef>
                 <a:spcPts val="1417"/>
               </a:spcBef>
-              <a:buNone/>
-            </a:pPr>
-            <a:r>
-              <a:rPr lang="en-US" sz="2000" b="0" u="none" strike="noStrike">
-                <a:solidFill>
-                  <a:srgbClr val="000000"/>
-                </a:solidFill>
-                <a:effectLst/>
-                <a:uFillTx/>
-                <a:latin typeface="New times roman"/>
-              </a:rPr>
-              <a:t>REQ-22: Each driver will have a profile containing experience.</a:t>
-            </a:r>
-            <a:endParaRPr lang="en-US" sz="2000" b="0" u="none" strike="noStrike">
-              <a:solidFill>
-                <a:srgbClr val="000000"/>
-              </a:solidFill>
-              <a:effectLst/>
-              <a:uFillTx/>
-              <a:latin typeface="Times New Roman"/>
-            </a:endParaRPr>
-          </a:p>
-          <a:p>
-            <a:pPr indent="0" algn="l">
+            </a:pPr>
+            <a:r>
+              <a:rPr lang="en-US" sz="2000" dirty="0"/>
+              <a:t>✔</a:t>
+            </a:r>
+            <a:r>
+              <a:rPr lang="ro-RO" sz="2000" dirty="0"/>
+              <a:t> </a:t>
+            </a:r>
+            <a:r>
+              <a:rPr lang="en-US" sz="2000" b="0" u="none" strike="noStrike" dirty="0" smtClean="0">
+                <a:solidFill>
+                  <a:srgbClr val="000000"/>
+                </a:solidFill>
+                <a:effectLst/>
+                <a:uFillTx/>
+                <a:latin typeface="New times roman"/>
+              </a:rPr>
+              <a:t>REQ-22</a:t>
+            </a:r>
+            <a:r>
+              <a:rPr lang="en-US" sz="2000" b="0" u="none" strike="noStrike" dirty="0">
+                <a:solidFill>
+                  <a:srgbClr val="000000"/>
+                </a:solidFill>
+                <a:effectLst/>
+                <a:uFillTx/>
+                <a:latin typeface="New times roman"/>
+              </a:rPr>
+              <a:t>: Each driver will have a profile containing experience.</a:t>
+            </a:r>
+            <a:endParaRPr lang="en-US" sz="2000" b="0" u="none" strike="noStrike" dirty="0">
+              <a:solidFill>
+                <a:srgbClr val="000000"/>
+              </a:solidFill>
+              <a:effectLst/>
+              <a:uFillTx/>
+              <a:latin typeface="Times New Roman"/>
+            </a:endParaRPr>
+          </a:p>
+          <a:p>
+            <a:pPr algn="l">
               <a:spcBef>
                 <a:spcPts val="1417"/>
               </a:spcBef>
-              <a:buNone/>
-            </a:pPr>
-            <a:r>
-              <a:rPr lang="en-US" sz="2000" b="0" u="none" strike="noStrike">
-                <a:solidFill>
-                  <a:srgbClr val="000000"/>
-                </a:solidFill>
-                <a:effectLst/>
-                <a:uFillTx/>
-                <a:latin typeface="New times roman"/>
-              </a:rPr>
-              <a:t>REQ-23: Each driver will have a profile containing availability.</a:t>
-            </a:r>
-            <a:endParaRPr lang="en-US" sz="2000" b="0" u="none" strike="noStrike">
+            </a:pPr>
+            <a:r>
+              <a:rPr lang="en-US" sz="2000" dirty="0"/>
+              <a:t>✔</a:t>
+            </a:r>
+            <a:r>
+              <a:rPr lang="ro-RO" sz="2000" dirty="0"/>
+              <a:t> </a:t>
+            </a:r>
+            <a:r>
+              <a:rPr lang="en-US" sz="2000" b="0" u="none" strike="noStrike" dirty="0" smtClean="0">
+                <a:solidFill>
+                  <a:srgbClr val="000000"/>
+                </a:solidFill>
+                <a:effectLst/>
+                <a:uFillTx/>
+                <a:latin typeface="New times roman"/>
+              </a:rPr>
+              <a:t>REQ-23</a:t>
+            </a:r>
+            <a:r>
+              <a:rPr lang="en-US" sz="2000" b="0" u="none" strike="noStrike" dirty="0">
+                <a:solidFill>
+                  <a:srgbClr val="000000"/>
+                </a:solidFill>
+                <a:effectLst/>
+                <a:uFillTx/>
+                <a:latin typeface="New times roman"/>
+              </a:rPr>
+              <a:t>: Each driver will have a profile containing availability.</a:t>
+            </a:r>
+            <a:endParaRPr lang="en-US" sz="2000" b="0" u="none" strike="noStrike" dirty="0">
               <a:solidFill>
                 <a:srgbClr val="000000"/>
               </a:solidFill>
@@ -3278,19 +5120,29 @@
       </p:sp>
     </p:spTree>
   </p:cSld>
-  <mc:AlternateContent>
+  <p:clrMapOvr>
+    <a:masterClrMapping/>
+  </p:clrMapOvr>
+  <mc:AlternateContent xmlns:mc="http://schemas.openxmlformats.org/markup-compatibility/2006" xmlns:p14="http://schemas.microsoft.com/office/powerpoint/2010/main">
     <mc:Choice Requires="p14">
       <p:transition spd="slow" p14:dur="2000"/>
     </mc:Choice>
-    <mc:Fallback>
+    <mc:Fallback xmlns="" xmlns:p15="http://schemas.microsoft.com/office/powerpoint/2012/main">
       <p:transition spd="slow"/>
     </mc:Fallback>
   </mc:AlternateContent>
+  <p:timing>
+    <p:tnLst>
+      <p:par>
+        <p:cTn id="1" dur="indefinite" restart="never" nodeType="tmRoot"/>
+      </p:par>
+    </p:tnLst>
+  </p:timing>
 </p:sld>
 </file>
 
 <file path=ppt/slides/slide5.xml><?xml version="1.0" encoding="utf-8"?>
-<p:sld xmlns:a="http://schemas.openxmlformats.org/drawingml/2006/main" xmlns:p="http://schemas.openxmlformats.org/presentationml/2006/main" xmlns:r="http://schemas.openxmlformats.org/officeDocument/2006/relationships" xmlns:p14="http://schemas.microsoft.com/office/powerpoint/2010/main" xmlns:p15="http://schemas.microsoft.com/office/powerpoint/2012/main" xmlns:mc="http://schemas.openxmlformats.org/markup-compatibility/2006">
+<p:sld xmlns:a="http://schemas.openxmlformats.org/drawingml/2006/main" xmlns:r="http://schemas.openxmlformats.org/officeDocument/2006/relationships" xmlns:p="http://schemas.openxmlformats.org/presentationml/2006/main">
   <p:cSld>
     <p:spTree>
       <p:nvGrpSpPr>
@@ -3333,6 +5185,7 @@
           <a:bodyPr lIns="0" tIns="0" rIns="0" bIns="0" anchor="ctr">
             <a:spAutoFit/>
           </a:bodyPr>
+          <a:lstStyle/>
           <a:p>
             <a:pPr indent="0" algn="l">
               <a:buNone/>
@@ -3384,27 +5237,46 @@
         </p:spPr>
         <p:txBody>
           <a:bodyPr lIns="0" tIns="0" rIns="0" bIns="0" anchor="t">
-            <a:normAutofit fontScale="62500" lnSpcReduction="19999"/>
+            <a:normAutofit fontScale="55000" lnSpcReduction="20000"/>
           </a:bodyPr>
-          <a:p>
-            <a:pPr indent="0" algn="l">
+          <a:lstStyle/>
+          <a:p>
+            <a:pPr algn="l">
               <a:spcBef>
                 <a:spcPts val="1417"/>
               </a:spcBef>
-              <a:buNone/>
-            </a:pPr>
-            <a:r>
-              <a:rPr lang="en-US" sz="2000" b="0" u="none" strike="noStrike">
-                <a:solidFill>
-                  <a:srgbClr val="000000"/>
-                </a:solidFill>
-                <a:effectLst/>
-                <a:uFillTx/>
-                <a:latin typeface="New times roman"/>
-              </a:rPr>
-              <a:t>REQ-24: Customers will be able to create an account.</a:t>
-            </a:r>
-            <a:endParaRPr lang="en-US" sz="2000" b="0" u="none" strike="noStrike">
+            </a:pPr>
+            <a:r>
+              <a:rPr lang="en-US" sz="1100" dirty="0"/>
+              <a:t>✔</a:t>
+            </a:r>
+            <a:r>
+              <a:rPr lang="ro-RO" sz="1100" dirty="0"/>
+              <a:t> </a:t>
+            </a:r>
+            <a:r>
+              <a:rPr lang="en-US" sz="2000" b="0" u="none" strike="noStrike" dirty="0" smtClean="0">
+                <a:solidFill>
+                  <a:srgbClr val="000000"/>
+                </a:solidFill>
+                <a:effectLst/>
+                <a:uFillTx/>
+                <a:latin typeface="New times roman"/>
+              </a:rPr>
+              <a:t>REQ-24</a:t>
+            </a:r>
+            <a:r>
+              <a:rPr lang="en-US" sz="2000" b="0" u="none" strike="noStrike" dirty="0">
+                <a:solidFill>
+                  <a:srgbClr val="000000"/>
+                </a:solidFill>
+                <a:effectLst/>
+                <a:uFillTx/>
+                <a:latin typeface="New times roman"/>
+              </a:rPr>
+              <a:t>: Customers will be able to create an account.</a:t>
+            </a:r>
+            <a:endParaRPr lang="en-US" sz="2000" b="0" u="none" strike="noStrike" dirty="0">
               <a:solidFill>
                 <a:srgbClr val="000000"/>
               </a:solidFill>
@@ -3418,20 +5290,38 @@
               <a:spcBef>
                 <a:spcPts val="1417"/>
               </a:spcBef>
-              <a:buNone/>
-            </a:pPr>
-            <a:r>
-              <a:rPr lang="en-US" sz="2000" b="0" u="none" strike="noStrike">
-                <a:solidFill>
-                  <a:srgbClr val="000000"/>
-                </a:solidFill>
-                <a:effectLst/>
-                <a:uFillTx/>
-                <a:latin typeface="New times roman"/>
-              </a:rPr>
-              <a:t>REQ-24.1: The system shall require the customer to input their Date of Birth during account creation.</a:t>
-            </a:r>
-            <a:endParaRPr lang="en-US" sz="2000" b="0" u="none" strike="noStrike">
+            </a:pPr>
+            <a:r>
+              <a:rPr lang="en-US" sz="1100" dirty="0"/>
+              <a:t>✔</a:t>
+            </a:r>
+            <a:r>
+              <a:rPr lang="ro-RO" sz="1100" dirty="0"/>
+              <a:t> </a:t>
+            </a:r>
+            <a:r>
+              <a:rPr lang="en-US" sz="2000" b="0" u="none" strike="noStrike" dirty="0" smtClean="0">
+                <a:solidFill>
+                  <a:srgbClr val="000000"/>
+                </a:solidFill>
+                <a:effectLst/>
+                <a:uFillTx/>
+                <a:latin typeface="New times roman"/>
+              </a:rPr>
+              <a:t>REQ-24.1</a:t>
+            </a:r>
+            <a:r>
+              <a:rPr lang="en-US" sz="2000" b="0" u="none" strike="noStrike" dirty="0">
+                <a:solidFill>
+                  <a:srgbClr val="000000"/>
+                </a:solidFill>
+                <a:effectLst/>
+                <a:uFillTx/>
+                <a:latin typeface="New times roman"/>
+              </a:rPr>
+              <a:t>: The system shall require the customer to input their Date of Birth during account creation.</a:t>
+            </a:r>
+            <a:endParaRPr lang="en-US" sz="2000" b="0" u="none" strike="noStrike" dirty="0">
               <a:solidFill>
                 <a:srgbClr val="000000"/>
               </a:solidFill>
@@ -3445,209 +5335,353 @@
               <a:spcBef>
                 <a:spcPts val="1417"/>
               </a:spcBef>
-              <a:buNone/>
-            </a:pPr>
-            <a:r>
-              <a:rPr lang="en-US" sz="2000" b="0" u="none" strike="noStrike">
-                <a:solidFill>
-                  <a:srgbClr val="000000"/>
-                </a:solidFill>
-                <a:effectLst/>
-                <a:uFillTx/>
-                <a:latin typeface="New times roman"/>
-              </a:rPr>
-              <a:t>REQ-24.2: The system shall prevent users under the age of 13 from creating an account and submitting transport requests.</a:t>
-            </a:r>
-            <a:endParaRPr lang="en-US" sz="2000" b="0" u="none" strike="noStrike">
-              <a:solidFill>
-                <a:srgbClr val="000000"/>
-              </a:solidFill>
-              <a:effectLst/>
-              <a:uFillTx/>
-              <a:latin typeface="Times New Roman"/>
-            </a:endParaRPr>
-          </a:p>
-          <a:p>
-            <a:pPr indent="0" algn="l">
+            </a:pPr>
+            <a:r>
+              <a:rPr lang="en-US" sz="1100" dirty="0"/>
+              <a:t>✔</a:t>
+            </a:r>
+            <a:r>
+              <a:rPr lang="ro-RO" sz="1100" dirty="0"/>
+              <a:t> </a:t>
+            </a:r>
+            <a:r>
+              <a:rPr lang="en-US" sz="2000" b="0" u="none" strike="noStrike" dirty="0" smtClean="0">
+                <a:solidFill>
+                  <a:srgbClr val="000000"/>
+                </a:solidFill>
+                <a:effectLst/>
+                <a:uFillTx/>
+                <a:latin typeface="New times roman"/>
+              </a:rPr>
+              <a:t>REQ-24.2</a:t>
+            </a:r>
+            <a:r>
+              <a:rPr lang="en-US" sz="2000" b="0" u="none" strike="noStrike" dirty="0">
+                <a:solidFill>
+                  <a:srgbClr val="000000"/>
+                </a:solidFill>
+                <a:effectLst/>
+                <a:uFillTx/>
+                <a:latin typeface="New times roman"/>
+              </a:rPr>
+              <a:t>: The system shall prevent users under the age of 13 from creating an account and submitting transport requests.</a:t>
+            </a:r>
+            <a:endParaRPr lang="en-US" sz="2000" b="0" u="none" strike="noStrike" dirty="0">
+              <a:solidFill>
+                <a:srgbClr val="000000"/>
+              </a:solidFill>
+              <a:effectLst/>
+              <a:uFillTx/>
+              <a:latin typeface="Times New Roman"/>
+            </a:endParaRPr>
+          </a:p>
+          <a:p>
+            <a:pPr algn="l">
               <a:spcBef>
                 <a:spcPts val="1417"/>
               </a:spcBef>
-              <a:buNone/>
-            </a:pPr>
-            <a:r>
-              <a:rPr lang="en-US" sz="2000" b="0" u="none" strike="noStrike">
-                <a:solidFill>
-                  <a:srgbClr val="000000"/>
-                </a:solidFill>
-                <a:effectLst/>
-                <a:uFillTx/>
-                <a:latin typeface="New times roman"/>
-              </a:rPr>
-              <a:t>REQ-25: Customers will be able to submit transport requests specifying cargo details.</a:t>
-            </a:r>
-            <a:endParaRPr lang="en-US" sz="2000" b="0" u="none" strike="noStrike">
-              <a:solidFill>
-                <a:srgbClr val="000000"/>
-              </a:solidFill>
-              <a:effectLst/>
-              <a:uFillTx/>
-              <a:latin typeface="Times New Roman"/>
-            </a:endParaRPr>
-          </a:p>
-          <a:p>
-            <a:pPr indent="0" algn="l">
+            </a:pPr>
+            <a:r>
+              <a:rPr lang="en-US" sz="1100" dirty="0"/>
+              <a:t>✔</a:t>
+            </a:r>
+            <a:r>
+              <a:rPr lang="ro-RO" sz="1100" dirty="0"/>
+              <a:t> </a:t>
+            </a:r>
+            <a:r>
+              <a:rPr lang="en-US" sz="2000" b="0" u="none" strike="noStrike" dirty="0" smtClean="0">
+                <a:solidFill>
+                  <a:srgbClr val="000000"/>
+                </a:solidFill>
+                <a:effectLst/>
+                <a:uFillTx/>
+                <a:latin typeface="New times roman"/>
+              </a:rPr>
+              <a:t>REQ-25</a:t>
+            </a:r>
+            <a:r>
+              <a:rPr lang="en-US" sz="2000" b="0" u="none" strike="noStrike" dirty="0">
+                <a:solidFill>
+                  <a:srgbClr val="000000"/>
+                </a:solidFill>
+                <a:effectLst/>
+                <a:uFillTx/>
+                <a:latin typeface="New times roman"/>
+              </a:rPr>
+              <a:t>: Customers will be able to submit transport requests specifying cargo details.</a:t>
+            </a:r>
+            <a:endParaRPr lang="en-US" sz="2000" b="0" u="none" strike="noStrike" dirty="0">
+              <a:solidFill>
+                <a:srgbClr val="000000"/>
+              </a:solidFill>
+              <a:effectLst/>
+              <a:uFillTx/>
+              <a:latin typeface="Times New Roman"/>
+            </a:endParaRPr>
+          </a:p>
+          <a:p>
+            <a:pPr algn="l">
               <a:spcBef>
                 <a:spcPts val="1417"/>
               </a:spcBef>
-              <a:buNone/>
-            </a:pPr>
-            <a:r>
-              <a:rPr lang="en-US" sz="2000" b="0" u="none" strike="noStrike">
-                <a:solidFill>
-                  <a:srgbClr val="000000"/>
-                </a:solidFill>
-                <a:effectLst/>
-                <a:uFillTx/>
-                <a:latin typeface="New times roman"/>
-              </a:rPr>
-              <a:t>REQ-26: Customers will be able to submit transport requests specifying weight.</a:t>
-            </a:r>
-            <a:endParaRPr lang="en-US" sz="2000" b="0" u="none" strike="noStrike">
-              <a:solidFill>
-                <a:srgbClr val="000000"/>
-              </a:solidFill>
-              <a:effectLst/>
-              <a:uFillTx/>
-              <a:latin typeface="Times New Roman"/>
-            </a:endParaRPr>
-          </a:p>
-          <a:p>
-            <a:pPr indent="0" algn="l">
+            </a:pPr>
+            <a:r>
+              <a:rPr lang="en-US" sz="1100" dirty="0"/>
+              <a:t>✔</a:t>
+            </a:r>
+            <a:r>
+              <a:rPr lang="ro-RO" sz="1100" dirty="0"/>
+              <a:t> </a:t>
+            </a:r>
+            <a:r>
+              <a:rPr lang="en-US" sz="2000" b="0" u="none" strike="noStrike" dirty="0" smtClean="0">
+                <a:solidFill>
+                  <a:srgbClr val="000000"/>
+                </a:solidFill>
+                <a:effectLst/>
+                <a:uFillTx/>
+                <a:latin typeface="New times roman"/>
+              </a:rPr>
+              <a:t>REQ-26</a:t>
+            </a:r>
+            <a:r>
+              <a:rPr lang="en-US" sz="2000" b="0" u="none" strike="noStrike" dirty="0">
+                <a:solidFill>
+                  <a:srgbClr val="000000"/>
+                </a:solidFill>
+                <a:effectLst/>
+                <a:uFillTx/>
+                <a:latin typeface="New times roman"/>
+              </a:rPr>
+              <a:t>: Customers will be able to submit transport requests specifying weight.</a:t>
+            </a:r>
+            <a:endParaRPr lang="en-US" sz="2000" b="0" u="none" strike="noStrike" dirty="0">
+              <a:solidFill>
+                <a:srgbClr val="000000"/>
+              </a:solidFill>
+              <a:effectLst/>
+              <a:uFillTx/>
+              <a:latin typeface="Times New Roman"/>
+            </a:endParaRPr>
+          </a:p>
+          <a:p>
+            <a:pPr algn="l">
               <a:spcBef>
                 <a:spcPts val="1417"/>
               </a:spcBef>
-              <a:buNone/>
-            </a:pPr>
-            <a:r>
-              <a:rPr lang="en-US" sz="2000" b="0" u="none" strike="noStrike">
-                <a:solidFill>
-                  <a:srgbClr val="000000"/>
-                </a:solidFill>
-                <a:effectLst/>
-                <a:uFillTx/>
-                <a:latin typeface="New times roman"/>
-              </a:rPr>
-              <a:t>REQ-27: Customers will be able to submit transport requests specifying volume.</a:t>
-            </a:r>
-            <a:endParaRPr lang="en-US" sz="2000" b="0" u="none" strike="noStrike">
-              <a:solidFill>
-                <a:srgbClr val="000000"/>
-              </a:solidFill>
-              <a:effectLst/>
-              <a:uFillTx/>
-              <a:latin typeface="Times New Roman"/>
-            </a:endParaRPr>
-          </a:p>
-          <a:p>
-            <a:pPr indent="0" algn="l">
+            </a:pPr>
+            <a:r>
+              <a:rPr lang="en-US" sz="1100" dirty="0"/>
+              <a:t>✔</a:t>
+            </a:r>
+            <a:r>
+              <a:rPr lang="ro-RO" sz="1100" dirty="0"/>
+              <a:t> </a:t>
+            </a:r>
+            <a:r>
+              <a:rPr lang="en-US" sz="2000" b="0" u="none" strike="noStrike" dirty="0" smtClean="0">
+                <a:solidFill>
+                  <a:srgbClr val="000000"/>
+                </a:solidFill>
+                <a:effectLst/>
+                <a:uFillTx/>
+                <a:latin typeface="New times roman"/>
+              </a:rPr>
+              <a:t>REQ-27</a:t>
+            </a:r>
+            <a:r>
+              <a:rPr lang="en-US" sz="2000" b="0" u="none" strike="noStrike" dirty="0">
+                <a:solidFill>
+                  <a:srgbClr val="000000"/>
+                </a:solidFill>
+                <a:effectLst/>
+                <a:uFillTx/>
+                <a:latin typeface="New times roman"/>
+              </a:rPr>
+              <a:t>: Customers will be able to submit transport requests specifying volume.</a:t>
+            </a:r>
+            <a:endParaRPr lang="en-US" sz="2000" b="0" u="none" strike="noStrike" dirty="0">
+              <a:solidFill>
+                <a:srgbClr val="000000"/>
+              </a:solidFill>
+              <a:effectLst/>
+              <a:uFillTx/>
+              <a:latin typeface="Times New Roman"/>
+            </a:endParaRPr>
+          </a:p>
+          <a:p>
+            <a:pPr algn="l">
               <a:spcBef>
                 <a:spcPts val="1417"/>
               </a:spcBef>
-              <a:buNone/>
-            </a:pPr>
-            <a:r>
-              <a:rPr lang="en-US" sz="2000" b="0" u="none" strike="noStrike">
-                <a:solidFill>
-                  <a:srgbClr val="000000"/>
-                </a:solidFill>
-                <a:effectLst/>
-                <a:uFillTx/>
-                <a:latin typeface="New times roman"/>
-              </a:rPr>
-              <a:t>REQ-28: Customers will be able to submit transport requests specifying pickup locations.</a:t>
-            </a:r>
-            <a:endParaRPr lang="en-US" sz="2000" b="0" u="none" strike="noStrike">
-              <a:solidFill>
-                <a:srgbClr val="000000"/>
-              </a:solidFill>
-              <a:effectLst/>
-              <a:uFillTx/>
-              <a:latin typeface="Times New Roman"/>
-            </a:endParaRPr>
-          </a:p>
-          <a:p>
-            <a:pPr indent="0" algn="l">
+            </a:pPr>
+            <a:r>
+              <a:rPr lang="en-US" sz="1100" dirty="0"/>
+              <a:t>✔</a:t>
+            </a:r>
+            <a:r>
+              <a:rPr lang="ro-RO" sz="1100" dirty="0"/>
+              <a:t> </a:t>
+            </a:r>
+            <a:r>
+              <a:rPr lang="en-US" sz="2000" b="0" u="none" strike="noStrike" dirty="0" smtClean="0">
+                <a:solidFill>
+                  <a:srgbClr val="000000"/>
+                </a:solidFill>
+                <a:effectLst/>
+                <a:uFillTx/>
+                <a:latin typeface="New times roman"/>
+              </a:rPr>
+              <a:t>REQ-28</a:t>
+            </a:r>
+            <a:r>
+              <a:rPr lang="en-US" sz="2000" b="0" u="none" strike="noStrike" dirty="0">
+                <a:solidFill>
+                  <a:srgbClr val="000000"/>
+                </a:solidFill>
+                <a:effectLst/>
+                <a:uFillTx/>
+                <a:latin typeface="New times roman"/>
+              </a:rPr>
+              <a:t>: Customers will be able to submit transport requests specifying pickup locations.</a:t>
+            </a:r>
+            <a:endParaRPr lang="en-US" sz="2000" b="0" u="none" strike="noStrike" dirty="0">
+              <a:solidFill>
+                <a:srgbClr val="000000"/>
+              </a:solidFill>
+              <a:effectLst/>
+              <a:uFillTx/>
+              <a:latin typeface="Times New Roman"/>
+            </a:endParaRPr>
+          </a:p>
+          <a:p>
+            <a:pPr algn="l">
               <a:spcBef>
                 <a:spcPts val="1417"/>
               </a:spcBef>
-              <a:buNone/>
-            </a:pPr>
-            <a:r>
-              <a:rPr lang="en-US" sz="2000" b="0" u="none" strike="noStrike">
-                <a:solidFill>
-                  <a:srgbClr val="000000"/>
-                </a:solidFill>
-                <a:effectLst/>
-                <a:uFillTx/>
-                <a:latin typeface="New times roman"/>
-              </a:rPr>
-              <a:t>REQ-29: Customers will be able to submit transport requests specifying delivery locations.</a:t>
-            </a:r>
-            <a:endParaRPr lang="en-US" sz="2000" b="0" u="none" strike="noStrike">
-              <a:solidFill>
-                <a:srgbClr val="000000"/>
-              </a:solidFill>
-              <a:effectLst/>
-              <a:uFillTx/>
-              <a:latin typeface="Times New Roman"/>
-            </a:endParaRPr>
-          </a:p>
-          <a:p>
-            <a:pPr indent="0" algn="l">
+            </a:pPr>
+            <a:r>
+              <a:rPr lang="en-US" sz="1100" dirty="0"/>
+              <a:t>✔</a:t>
+            </a:r>
+            <a:r>
+              <a:rPr lang="ro-RO" sz="1100" dirty="0"/>
+              <a:t> </a:t>
+            </a:r>
+            <a:r>
+              <a:rPr lang="en-US" sz="2000" b="0" u="none" strike="noStrike" dirty="0" smtClean="0">
+                <a:solidFill>
+                  <a:srgbClr val="000000"/>
+                </a:solidFill>
+                <a:effectLst/>
+                <a:uFillTx/>
+                <a:latin typeface="New times roman"/>
+              </a:rPr>
+              <a:t>REQ-29</a:t>
+            </a:r>
+            <a:r>
+              <a:rPr lang="en-US" sz="2000" b="0" u="none" strike="noStrike" dirty="0">
+                <a:solidFill>
+                  <a:srgbClr val="000000"/>
+                </a:solidFill>
+                <a:effectLst/>
+                <a:uFillTx/>
+                <a:latin typeface="New times roman"/>
+              </a:rPr>
+              <a:t>: Customers will be able to submit transport requests specifying delivery locations.</a:t>
+            </a:r>
+            <a:endParaRPr lang="en-US" sz="2000" b="0" u="none" strike="noStrike" dirty="0">
+              <a:solidFill>
+                <a:srgbClr val="000000"/>
+              </a:solidFill>
+              <a:effectLst/>
+              <a:uFillTx/>
+              <a:latin typeface="Times New Roman"/>
+            </a:endParaRPr>
+          </a:p>
+          <a:p>
+            <a:pPr algn="l">
               <a:spcBef>
                 <a:spcPts val="1417"/>
               </a:spcBef>
-              <a:buNone/>
-            </a:pPr>
-            <a:r>
-              <a:rPr lang="en-US" sz="2000" b="0" u="none" strike="noStrike">
-                <a:solidFill>
-                  <a:srgbClr val="000000"/>
-                </a:solidFill>
-                <a:effectLst/>
-                <a:uFillTx/>
-                <a:latin typeface="New times roman"/>
-              </a:rPr>
-              <a:t>REQ-30: Customers will be able to submit transport requests specifying preferred dates.</a:t>
-            </a:r>
-            <a:endParaRPr lang="en-US" sz="2000" b="0" u="none" strike="noStrike">
-              <a:solidFill>
-                <a:srgbClr val="000000"/>
-              </a:solidFill>
-              <a:effectLst/>
-              <a:uFillTx/>
-              <a:latin typeface="Times New Roman"/>
-            </a:endParaRPr>
-          </a:p>
-          <a:p>
-            <a:pPr indent="0" algn="l">
+            </a:pPr>
+            <a:r>
+              <a:rPr lang="en-US" sz="1100" dirty="0"/>
+              <a:t>✔</a:t>
+            </a:r>
+            <a:r>
+              <a:rPr lang="ro-RO" sz="1100" dirty="0"/>
+              <a:t> </a:t>
+            </a:r>
+            <a:r>
+              <a:rPr lang="en-US" sz="2000" b="0" u="none" strike="noStrike" dirty="0" smtClean="0">
+                <a:solidFill>
+                  <a:srgbClr val="000000"/>
+                </a:solidFill>
+                <a:effectLst/>
+                <a:uFillTx/>
+                <a:latin typeface="New times roman"/>
+              </a:rPr>
+              <a:t>REQ-30</a:t>
+            </a:r>
+            <a:r>
+              <a:rPr lang="en-US" sz="2000" b="0" u="none" strike="noStrike" dirty="0">
+                <a:solidFill>
+                  <a:srgbClr val="000000"/>
+                </a:solidFill>
+                <a:effectLst/>
+                <a:uFillTx/>
+                <a:latin typeface="New times roman"/>
+              </a:rPr>
+              <a:t>: Customers will be able to submit transport requests specifying preferred dates.</a:t>
+            </a:r>
+            <a:endParaRPr lang="en-US" sz="2000" b="0" u="none" strike="noStrike" dirty="0">
+              <a:solidFill>
+                <a:srgbClr val="000000"/>
+              </a:solidFill>
+              <a:effectLst/>
+              <a:uFillTx/>
+              <a:latin typeface="Times New Roman"/>
+            </a:endParaRPr>
+          </a:p>
+          <a:p>
+            <a:pPr algn="l">
               <a:spcBef>
                 <a:spcPts val="1417"/>
               </a:spcBef>
-              <a:buNone/>
-            </a:pPr>
-            <a:r>
-              <a:rPr lang="en-US" sz="2000" b="0" u="none" strike="noStrike">
-                <a:solidFill>
-                  <a:srgbClr val="000000"/>
-                </a:solidFill>
-                <a:effectLst/>
-                <a:uFillTx/>
-                <a:latin typeface="New times roman"/>
-              </a:rPr>
-              <a:t>REQ-31: The system will allow clients to view the status of their submitted requests.</a:t>
-            </a:r>
-            <a:endParaRPr lang="en-US" sz="2000" b="0" u="none" strike="noStrike">
+            </a:pPr>
+            <a:r>
+              <a:rPr lang="en-US" sz="1100" dirty="0"/>
+              <a:t>✔</a:t>
+            </a:r>
+            <a:r>
+              <a:rPr lang="ro-RO" sz="1100" dirty="0"/>
+              <a:t> </a:t>
+            </a:r>
+            <a:r>
+              <a:rPr lang="en-US" sz="2000" b="0" u="none" strike="noStrike" dirty="0" smtClean="0">
+                <a:solidFill>
+                  <a:srgbClr val="000000"/>
+                </a:solidFill>
+                <a:effectLst/>
+                <a:uFillTx/>
+                <a:latin typeface="New times roman"/>
+              </a:rPr>
+              <a:t>REQ-31</a:t>
+            </a:r>
+            <a:r>
+              <a:rPr lang="en-US" sz="2000" b="0" u="none" strike="noStrike" dirty="0">
+                <a:solidFill>
+                  <a:srgbClr val="000000"/>
+                </a:solidFill>
+                <a:effectLst/>
+                <a:uFillTx/>
+                <a:latin typeface="New times roman"/>
+              </a:rPr>
+              <a:t>: The system will allow clients to view the status of their submitted requests.</a:t>
+            </a:r>
+            <a:endParaRPr lang="en-US" sz="2000" b="0" u="none" strike="noStrike" dirty="0">
               <a:solidFill>
                 <a:srgbClr val="000000"/>
               </a:solidFill>
@@ -3660,19 +5694,29 @@
       </p:sp>
     </p:spTree>
   </p:cSld>
-  <mc:AlternateContent>
+  <p:clrMapOvr>
+    <a:masterClrMapping/>
+  </p:clrMapOvr>
+  <mc:AlternateContent xmlns:mc="http://schemas.openxmlformats.org/markup-compatibility/2006" xmlns:p14="http://schemas.microsoft.com/office/powerpoint/2010/main">
     <mc:Choice Requires="p14">
       <p:transition spd="slow" p14:dur="2000"/>
     </mc:Choice>
-    <mc:Fallback>
+    <mc:Fallback xmlns="" xmlns:p15="http://schemas.microsoft.com/office/powerpoint/2012/main">
       <p:transition spd="slow"/>
     </mc:Fallback>
   </mc:AlternateContent>
+  <p:timing>
+    <p:tnLst>
+      <p:par>
+        <p:cTn id="1" dur="indefinite" restart="never" nodeType="tmRoot"/>
+      </p:par>
+    </p:tnLst>
+  </p:timing>
 </p:sld>
 </file>
 
 <file path=ppt/slides/slide6.xml><?xml version="1.0" encoding="utf-8"?>
-<p:sld xmlns:a="http://schemas.openxmlformats.org/drawingml/2006/main" xmlns:p="http://schemas.openxmlformats.org/presentationml/2006/main" xmlns:r="http://schemas.openxmlformats.org/officeDocument/2006/relationships" xmlns:p14="http://schemas.microsoft.com/office/powerpoint/2010/main" xmlns:p15="http://schemas.microsoft.com/office/powerpoint/2012/main" xmlns:mc="http://schemas.openxmlformats.org/markup-compatibility/2006">
+<p:sld xmlns:a="http://schemas.openxmlformats.org/drawingml/2006/main" xmlns:r="http://schemas.openxmlformats.org/officeDocument/2006/relationships" xmlns:p="http://schemas.openxmlformats.org/presentationml/2006/main">
   <p:cSld>
     <p:spTree>
       <p:nvGrpSpPr>
@@ -3715,6 +5759,7 @@
           <a:bodyPr lIns="0" tIns="0" rIns="0" bIns="0" anchor="ctr">
             <a:spAutoFit/>
           </a:bodyPr>
+          <a:lstStyle/>
           <a:p>
             <a:pPr indent="0" algn="l">
               <a:buNone/>
@@ -3768,214 +5813,351 @@
           <a:bodyPr lIns="0" tIns="0" rIns="0" bIns="0" anchor="t">
             <a:normAutofit fontScale="85000" lnSpcReduction="19999"/>
           </a:bodyPr>
-          <a:p>
-            <a:pPr indent="0" algn="l">
+          <a:lstStyle/>
+          <a:p>
+            <a:pPr algn="l">
               <a:spcBef>
                 <a:spcPts val="1417"/>
               </a:spcBef>
-              <a:buNone/>
-            </a:pPr>
-            <a:r>
-              <a:rPr lang="en-US" sz="2000" b="0" u="none" strike="noStrike">
-                <a:solidFill>
-                  <a:srgbClr val="000000"/>
-                </a:solidFill>
-                <a:effectLst/>
-                <a:uFillTx/>
-                <a:latin typeface="New times roman"/>
-              </a:rPr>
-              <a:t>REQ-32: The system will store all incoming requests.</a:t>
-            </a:r>
-            <a:endParaRPr lang="en-US" sz="2000" b="0" u="none" strike="noStrike">
-              <a:solidFill>
-                <a:srgbClr val="000000"/>
-              </a:solidFill>
-              <a:effectLst/>
-              <a:uFillTx/>
-              <a:latin typeface="Times New Roman"/>
-            </a:endParaRPr>
-          </a:p>
-          <a:p>
-            <a:pPr indent="0" algn="l">
+            </a:pPr>
+            <a:r>
+              <a:rPr lang="en-US" sz="1800" dirty="0"/>
+              <a:t>✔</a:t>
+            </a:r>
+            <a:r>
+              <a:rPr lang="ro-RO" sz="1800" dirty="0"/>
+              <a:t> </a:t>
+            </a:r>
+            <a:r>
+              <a:rPr lang="en-US" sz="2000" b="0" u="none" strike="noStrike" dirty="0" smtClean="0">
+                <a:solidFill>
+                  <a:srgbClr val="000000"/>
+                </a:solidFill>
+                <a:effectLst/>
+                <a:uFillTx/>
+                <a:latin typeface="New times roman"/>
+              </a:rPr>
+              <a:t>REQ-32</a:t>
+            </a:r>
+            <a:r>
+              <a:rPr lang="en-US" sz="2000" b="0" u="none" strike="noStrike" dirty="0">
+                <a:solidFill>
+                  <a:srgbClr val="000000"/>
+                </a:solidFill>
+                <a:effectLst/>
+                <a:uFillTx/>
+                <a:latin typeface="New times roman"/>
+              </a:rPr>
+              <a:t>: The system will store all incoming requests.</a:t>
+            </a:r>
+            <a:endParaRPr lang="en-US" sz="2000" b="0" u="none" strike="noStrike" dirty="0">
+              <a:solidFill>
+                <a:srgbClr val="000000"/>
+              </a:solidFill>
+              <a:effectLst/>
+              <a:uFillTx/>
+              <a:latin typeface="Times New Roman"/>
+            </a:endParaRPr>
+          </a:p>
+          <a:p>
+            <a:pPr algn="l">
               <a:spcBef>
                 <a:spcPts val="1417"/>
               </a:spcBef>
-              <a:buNone/>
-            </a:pPr>
-            <a:r>
-              <a:rPr lang="en-US" sz="2000" b="0" u="none" strike="noStrike">
-                <a:solidFill>
-                  <a:srgbClr val="000000"/>
-                </a:solidFill>
-                <a:effectLst/>
-                <a:uFillTx/>
-                <a:latin typeface="New times roman"/>
-              </a:rPr>
-              <a:t>REQ-33: The system will notify company staff for processing.</a:t>
-            </a:r>
-            <a:endParaRPr lang="en-US" sz="2000" b="0" u="none" strike="noStrike">
-              <a:solidFill>
-                <a:srgbClr val="000000"/>
-              </a:solidFill>
-              <a:effectLst/>
-              <a:uFillTx/>
-              <a:latin typeface="Times New Roman"/>
-            </a:endParaRPr>
-          </a:p>
-          <a:p>
-            <a:pPr indent="0" algn="l">
+            </a:pPr>
+            <a:r>
+              <a:rPr lang="en-US" sz="1800" dirty="0"/>
+              <a:t>✔</a:t>
+            </a:r>
+            <a:r>
+              <a:rPr lang="ro-RO" sz="1800" dirty="0"/>
+              <a:t> </a:t>
+            </a:r>
+            <a:r>
+              <a:rPr lang="en-US" sz="2000" b="0" u="none" strike="noStrike" dirty="0" smtClean="0">
+                <a:solidFill>
+                  <a:srgbClr val="000000"/>
+                </a:solidFill>
+                <a:effectLst/>
+                <a:uFillTx/>
+                <a:latin typeface="New times roman"/>
+              </a:rPr>
+              <a:t>REQ-33</a:t>
+            </a:r>
+            <a:r>
+              <a:rPr lang="en-US" sz="2000" b="0" u="none" strike="noStrike" dirty="0">
+                <a:solidFill>
+                  <a:srgbClr val="000000"/>
+                </a:solidFill>
+                <a:effectLst/>
+                <a:uFillTx/>
+                <a:latin typeface="New times roman"/>
+              </a:rPr>
+              <a:t>: The system will notify company staff for processing.</a:t>
+            </a:r>
+            <a:endParaRPr lang="en-US" sz="2000" b="0" u="none" strike="noStrike" dirty="0">
+              <a:solidFill>
+                <a:srgbClr val="000000"/>
+              </a:solidFill>
+              <a:effectLst/>
+              <a:uFillTx/>
+              <a:latin typeface="Times New Roman"/>
+            </a:endParaRPr>
+          </a:p>
+          <a:p>
+            <a:pPr algn="l">
               <a:spcBef>
                 <a:spcPts val="1417"/>
               </a:spcBef>
-              <a:buNone/>
-            </a:pPr>
-            <a:r>
-              <a:rPr lang="en-US" sz="2000" b="0" u="none" strike="noStrike">
-                <a:solidFill>
-                  <a:srgbClr val="000000"/>
-                </a:solidFill>
-                <a:effectLst/>
-                <a:uFillTx/>
-                <a:latin typeface="New times roman"/>
-              </a:rPr>
-              <a:t>REQ-34: The driver list will be saved in a file in a predetermined format.</a:t>
-            </a:r>
-            <a:endParaRPr lang="en-US" sz="2000" b="0" u="none" strike="noStrike">
-              <a:solidFill>
-                <a:srgbClr val="000000"/>
-              </a:solidFill>
-              <a:effectLst/>
-              <a:uFillTx/>
-              <a:latin typeface="Times New Roman"/>
-            </a:endParaRPr>
-          </a:p>
-          <a:p>
-            <a:pPr indent="0" algn="l">
+            </a:pPr>
+            <a:r>
+              <a:rPr lang="en-US" sz="2000" b="0" u="none" strike="noStrike" dirty="0" smtClean="0">
+                <a:solidFill>
+                  <a:srgbClr val="000000"/>
+                </a:solidFill>
+                <a:effectLst/>
+                <a:uFillTx/>
+                <a:latin typeface="New times roman"/>
+              </a:rPr>
+              <a:t>REQ-34</a:t>
+            </a:r>
+            <a:r>
+              <a:rPr lang="en-US" sz="2000" b="0" u="none" strike="noStrike" dirty="0">
+                <a:solidFill>
+                  <a:srgbClr val="000000"/>
+                </a:solidFill>
+                <a:effectLst/>
+                <a:uFillTx/>
+                <a:latin typeface="New times roman"/>
+              </a:rPr>
+              <a:t>: The driver list will be saved in a file in a predetermined format.</a:t>
+            </a:r>
+            <a:endParaRPr lang="en-US" sz="2000" b="0" u="none" strike="noStrike" dirty="0">
+              <a:solidFill>
+                <a:srgbClr val="000000"/>
+              </a:solidFill>
+              <a:effectLst/>
+              <a:uFillTx/>
+              <a:latin typeface="Times New Roman"/>
+            </a:endParaRPr>
+          </a:p>
+          <a:p>
+            <a:pPr algn="l">
               <a:spcBef>
                 <a:spcPts val="1417"/>
               </a:spcBef>
-              <a:buNone/>
-            </a:pPr>
-            <a:r>
-              <a:rPr lang="en-US" sz="2000" b="0" u="none" strike="noStrike">
-                <a:solidFill>
-                  <a:srgbClr val="000000"/>
-                </a:solidFill>
-                <a:effectLst/>
-                <a:uFillTx/>
-                <a:latin typeface="New times roman"/>
-              </a:rPr>
-              <a:t>REQ-35: A database server will be configured for storing and managing all information.</a:t>
-            </a:r>
-            <a:endParaRPr lang="en-US" sz="2000" b="0" u="none" strike="noStrike">
-              <a:solidFill>
-                <a:srgbClr val="000000"/>
-              </a:solidFill>
-              <a:effectLst/>
-              <a:uFillTx/>
-              <a:latin typeface="Times New Roman"/>
-            </a:endParaRPr>
-          </a:p>
-          <a:p>
-            <a:pPr indent="0" algn="l">
+            </a:pPr>
+            <a:r>
+              <a:rPr lang="en-US" sz="1800" dirty="0"/>
+              <a:t>✔</a:t>
+            </a:r>
+            <a:r>
+              <a:rPr lang="ro-RO" sz="1800" dirty="0"/>
+              <a:t> </a:t>
+            </a:r>
+            <a:r>
+              <a:rPr lang="en-US" sz="2000" b="0" u="none" strike="noStrike" dirty="0" smtClean="0">
+                <a:solidFill>
+                  <a:srgbClr val="000000"/>
+                </a:solidFill>
+                <a:effectLst/>
+                <a:uFillTx/>
+                <a:latin typeface="New times roman"/>
+              </a:rPr>
+              <a:t>REQ-35</a:t>
+            </a:r>
+            <a:r>
+              <a:rPr lang="en-US" sz="2000" b="0" u="none" strike="noStrike" dirty="0">
+                <a:solidFill>
+                  <a:srgbClr val="000000"/>
+                </a:solidFill>
+                <a:effectLst/>
+                <a:uFillTx/>
+                <a:latin typeface="New times roman"/>
+              </a:rPr>
+              <a:t>: A database server will be configured for storing and managing all information.</a:t>
+            </a:r>
+            <a:endParaRPr lang="en-US" sz="2000" b="0" u="none" strike="noStrike" dirty="0">
+              <a:solidFill>
+                <a:srgbClr val="000000"/>
+              </a:solidFill>
+              <a:effectLst/>
+              <a:uFillTx/>
+              <a:latin typeface="Times New Roman"/>
+            </a:endParaRPr>
+          </a:p>
+          <a:p>
+            <a:pPr algn="l">
               <a:spcBef>
                 <a:spcPts val="1417"/>
               </a:spcBef>
-              <a:buNone/>
-            </a:pPr>
-            <a:r>
-              <a:rPr lang="en-US" sz="2000" b="0" u="none" strike="noStrike">
-                <a:solidFill>
-                  <a:srgbClr val="000000"/>
-                </a:solidFill>
-                <a:effectLst/>
-                <a:uFillTx/>
-                <a:latin typeface="New times roman"/>
-              </a:rPr>
-              <a:t>REQ-36: The system shall provide a real-time alert (UI badge) to logistics staff when a new request arrives.</a:t>
-            </a:r>
-            <a:endParaRPr lang="en-US" sz="2000" b="0" u="none" strike="noStrike">
-              <a:solidFill>
-                <a:srgbClr val="000000"/>
-              </a:solidFill>
-              <a:effectLst/>
-              <a:uFillTx/>
-              <a:latin typeface="Times New Roman"/>
-            </a:endParaRPr>
-          </a:p>
-          <a:p>
-            <a:pPr indent="0" algn="l">
+            </a:pPr>
+            <a:r>
+              <a:rPr lang="en-US" sz="1800" dirty="0"/>
+              <a:t>✔</a:t>
+            </a:r>
+            <a:r>
+              <a:rPr lang="ro-RO" sz="1800" dirty="0"/>
+              <a:t> </a:t>
+            </a:r>
+            <a:r>
+              <a:rPr lang="en-US" sz="2000" b="0" u="none" strike="noStrike" dirty="0" smtClean="0">
+                <a:solidFill>
+                  <a:srgbClr val="000000"/>
+                </a:solidFill>
+                <a:effectLst/>
+                <a:uFillTx/>
+                <a:latin typeface="New times roman"/>
+              </a:rPr>
+              <a:t>REQ-36</a:t>
+            </a:r>
+            <a:r>
+              <a:rPr lang="en-US" sz="2000" b="0" u="none" strike="noStrike" dirty="0">
+                <a:solidFill>
+                  <a:srgbClr val="000000"/>
+                </a:solidFill>
+                <a:effectLst/>
+                <a:uFillTx/>
+                <a:latin typeface="New times roman"/>
+              </a:rPr>
+              <a:t>: The system shall provide a real-time alert (UI badge) to logistics staff when a new request arrives.</a:t>
+            </a:r>
+            <a:endParaRPr lang="en-US" sz="2000" b="0" u="none" strike="noStrike" dirty="0">
+              <a:solidFill>
+                <a:srgbClr val="000000"/>
+              </a:solidFill>
+              <a:effectLst/>
+              <a:uFillTx/>
+              <a:latin typeface="Times New Roman"/>
+            </a:endParaRPr>
+          </a:p>
+          <a:p>
+            <a:pPr algn="l">
               <a:spcBef>
                 <a:spcPts val="1417"/>
               </a:spcBef>
-              <a:buNone/>
-            </a:pPr>
-            <a:r>
-              <a:rPr lang="en-US" sz="2000" b="0" u="none" strike="noStrike">
-                <a:solidFill>
-                  <a:srgbClr val="000000"/>
-                </a:solidFill>
-                <a:effectLst/>
-                <a:uFillTx/>
-                <a:latin typeface="New times roman"/>
-              </a:rPr>
-              <a:t>REQ-37: The system shall log the timestamp of request creation.</a:t>
-            </a:r>
-            <a:endParaRPr lang="en-US" sz="2000" b="0" u="none" strike="noStrike">
-              <a:solidFill>
-                <a:srgbClr val="000000"/>
-              </a:solidFill>
-              <a:effectLst/>
-              <a:uFillTx/>
-              <a:latin typeface="Times New Roman"/>
-            </a:endParaRPr>
-          </a:p>
-          <a:p>
-            <a:pPr indent="0" algn="l">
+            </a:pPr>
+            <a:r>
+              <a:rPr lang="en-US" sz="1800" dirty="0"/>
+              <a:t>✔</a:t>
+            </a:r>
+            <a:r>
+              <a:rPr lang="ro-RO" sz="1800" dirty="0"/>
+              <a:t> </a:t>
+            </a:r>
+            <a:r>
+              <a:rPr lang="en-US" sz="2000" b="0" u="none" strike="noStrike" dirty="0" smtClean="0">
+                <a:solidFill>
+                  <a:srgbClr val="000000"/>
+                </a:solidFill>
+                <a:effectLst/>
+                <a:uFillTx/>
+                <a:latin typeface="New times roman"/>
+              </a:rPr>
+              <a:t>REQ-37</a:t>
+            </a:r>
+            <a:r>
+              <a:rPr lang="en-US" sz="2000" b="0" u="none" strike="noStrike" dirty="0">
+                <a:solidFill>
+                  <a:srgbClr val="000000"/>
+                </a:solidFill>
+                <a:effectLst/>
+                <a:uFillTx/>
+                <a:latin typeface="New times roman"/>
+              </a:rPr>
+              <a:t>: The system shall log the timestamp of request creation.</a:t>
+            </a:r>
+            <a:endParaRPr lang="en-US" sz="2000" b="0" u="none" strike="noStrike" dirty="0">
+              <a:solidFill>
+                <a:srgbClr val="000000"/>
+              </a:solidFill>
+              <a:effectLst/>
+              <a:uFillTx/>
+              <a:latin typeface="Times New Roman"/>
+            </a:endParaRPr>
+          </a:p>
+          <a:p>
+            <a:pPr algn="l">
               <a:spcBef>
                 <a:spcPts val="1417"/>
               </a:spcBef>
-              <a:buNone/>
-            </a:pPr>
-            <a:r>
-              <a:rPr lang="en-US" sz="2000" b="0" u="none" strike="noStrike">
-                <a:solidFill>
-                  <a:srgbClr val="000000"/>
-                </a:solidFill>
-                <a:effectLst/>
-                <a:uFillTx/>
-                <a:latin typeface="New times roman"/>
-              </a:rPr>
-              <a:t>REQ-38: The system shall assign a unique ID to every incoming transport request.</a:t>
-            </a:r>
-            <a:endParaRPr lang="en-US" sz="2000" b="0" u="none" strike="noStrike">
-              <a:solidFill>
-                <a:srgbClr val="000000"/>
-              </a:solidFill>
-              <a:effectLst/>
-              <a:uFillTx/>
-              <a:latin typeface="Times New Roman"/>
-            </a:endParaRPr>
-          </a:p>
-          <a:p>
-            <a:pPr indent="0" algn="l">
+            </a:pPr>
+            <a:r>
+              <a:rPr lang="en-US" sz="1800" dirty="0"/>
+              <a:t>✔</a:t>
+            </a:r>
+            <a:r>
+              <a:rPr lang="ro-RO" sz="1800" dirty="0"/>
+              <a:t> </a:t>
+            </a:r>
+            <a:r>
+              <a:rPr lang="en-US" sz="2000" b="0" u="none" strike="noStrike" dirty="0" smtClean="0">
+                <a:solidFill>
+                  <a:srgbClr val="000000"/>
+                </a:solidFill>
+                <a:effectLst/>
+                <a:uFillTx/>
+                <a:latin typeface="New times roman"/>
+              </a:rPr>
+              <a:t>REQ-38</a:t>
+            </a:r>
+            <a:r>
+              <a:rPr lang="en-US" sz="2000" b="0" u="none" strike="noStrike" dirty="0">
+                <a:solidFill>
+                  <a:srgbClr val="000000"/>
+                </a:solidFill>
+                <a:effectLst/>
+                <a:uFillTx/>
+                <a:latin typeface="New times roman"/>
+              </a:rPr>
+              <a:t>: The system shall assign a unique ID to every incoming transport request.</a:t>
+            </a:r>
+            <a:endParaRPr lang="en-US" sz="2000" b="0" u="none" strike="noStrike" dirty="0">
+              <a:solidFill>
+                <a:srgbClr val="000000"/>
+              </a:solidFill>
+              <a:effectLst/>
+              <a:uFillTx/>
+              <a:latin typeface="Times New Roman"/>
+            </a:endParaRPr>
+          </a:p>
+          <a:p>
+            <a:pPr algn="l">
               <a:spcBef>
                 <a:spcPts val="1417"/>
               </a:spcBef>
-              <a:buNone/>
-            </a:pPr>
-            <a:r>
-              <a:rPr lang="en-US" sz="2000" b="0" u="none" strike="noStrike">
-                <a:solidFill>
-                  <a:srgbClr val="000000"/>
-                </a:solidFill>
-                <a:effectLst/>
-                <a:uFillTx/>
-                <a:latin typeface="New times roman"/>
-              </a:rPr>
-              <a:t>REQ-39: The system shall encrypt stored passwords in the database.</a:t>
-            </a:r>
-            <a:endParaRPr lang="en-US" sz="2000" b="0" u="none" strike="noStrike">
+            </a:pPr>
+            <a:r>
+              <a:rPr lang="en-US" sz="1800" dirty="0"/>
+              <a:t>✔</a:t>
+            </a:r>
+            <a:r>
+              <a:rPr lang="ro-RO" sz="1800" dirty="0"/>
+              <a:t> </a:t>
+            </a:r>
+            <a:r>
+              <a:rPr lang="en-US" sz="2000" b="0" u="none" strike="noStrike" dirty="0" smtClean="0">
+                <a:solidFill>
+                  <a:srgbClr val="000000"/>
+                </a:solidFill>
+                <a:effectLst/>
+                <a:uFillTx/>
+                <a:latin typeface="New times roman"/>
+              </a:rPr>
+              <a:t>REQ-39</a:t>
+            </a:r>
+            <a:r>
+              <a:rPr lang="en-US" sz="2000" b="0" u="none" strike="noStrike" dirty="0">
+                <a:solidFill>
+                  <a:srgbClr val="000000"/>
+                </a:solidFill>
+                <a:effectLst/>
+                <a:uFillTx/>
+                <a:latin typeface="New times roman"/>
+              </a:rPr>
+              <a:t>: The system shall encrypt stored passwords in the database.</a:t>
+            </a:r>
+            <a:endParaRPr lang="en-US" sz="2000" b="0" u="none" strike="noStrike" dirty="0">
               <a:solidFill>
                 <a:srgbClr val="000000"/>
               </a:solidFill>
@@ -3988,11 +6170,14 @@
       </p:sp>
     </p:spTree>
   </p:cSld>
-  <mc:AlternateContent>
+  <p:clrMapOvr>
+    <a:masterClrMapping/>
+  </p:clrMapOvr>
+  <mc:AlternateContent xmlns:mc="http://schemas.openxmlformats.org/markup-compatibility/2006" xmlns:p14="http://schemas.microsoft.com/office/powerpoint/2010/main">
     <mc:Choice Requires="p14">
       <p:transition spd="slow" p14:dur="2000"/>
     </mc:Choice>
-    <mc:Fallback>
+    <mc:Fallback xmlns="" xmlns:p15="http://schemas.microsoft.com/office/powerpoint/2012/main">
       <p:transition spd="slow"/>
     </mc:Fallback>
   </mc:AlternateContent>
@@ -4000,7 +6185,7 @@
 </file>
 
 <file path=ppt/slides/slide7.xml><?xml version="1.0" encoding="utf-8"?>
-<p:sld xmlns:a="http://schemas.openxmlformats.org/drawingml/2006/main" xmlns:p="http://schemas.openxmlformats.org/presentationml/2006/main" xmlns:r="http://schemas.openxmlformats.org/officeDocument/2006/relationships" xmlns:p14="http://schemas.microsoft.com/office/powerpoint/2010/main" xmlns:p15="http://schemas.microsoft.com/office/powerpoint/2012/main" xmlns:mc="http://schemas.openxmlformats.org/markup-compatibility/2006">
+<p:sld xmlns:a="http://schemas.openxmlformats.org/drawingml/2006/main" xmlns:r="http://schemas.openxmlformats.org/officeDocument/2006/relationships" xmlns:p="http://schemas.openxmlformats.org/presentationml/2006/main">
   <p:cSld>
     <p:spTree>
       <p:nvGrpSpPr>
@@ -4043,6 +6228,7 @@
           <a:bodyPr lIns="0" tIns="0" rIns="0" bIns="0" anchor="ctr">
             <a:spAutoFit/>
           </a:bodyPr>
+          <a:lstStyle/>
           <a:p>
             <a:pPr indent="0" algn="l">
               <a:buNone/>
@@ -4094,216 +6280,361 @@
         </p:spPr>
         <p:txBody>
           <a:bodyPr lIns="0" tIns="0" rIns="0" bIns="0" anchor="t">
-            <a:normAutofit fontScale="77500" lnSpcReduction="19999"/>
+            <a:normAutofit fontScale="85000" lnSpcReduction="19999"/>
           </a:bodyPr>
-          <a:p>
-            <a:pPr indent="0" algn="l">
+          <a:lstStyle/>
+          <a:p>
+            <a:pPr algn="l">
               <a:spcBef>
                 <a:spcPts val="1417"/>
               </a:spcBef>
-              <a:buNone/>
-            </a:pPr>
-            <a:r>
-              <a:rPr lang="en-US" sz="2000" b="0" u="none" strike="noStrike">
-                <a:solidFill>
-                  <a:srgbClr val="000000"/>
-                </a:solidFill>
-                <a:effectLst/>
-                <a:uFillTx/>
-                <a:latin typeface="New times roman"/>
-              </a:rPr>
-              <a:t>REQ-40: Company staff will be able to allocate a vehicle to each request.</a:t>
-            </a:r>
-            <a:endParaRPr lang="en-US" sz="2000" b="0" u="none" strike="noStrike">
-              <a:solidFill>
-                <a:srgbClr val="000000"/>
-              </a:solidFill>
-              <a:effectLst/>
-              <a:uFillTx/>
-              <a:latin typeface="Times New Roman"/>
-            </a:endParaRPr>
-          </a:p>
-          <a:p>
-            <a:pPr indent="0" algn="l">
+            </a:pPr>
+            <a:r>
+              <a:rPr lang="en-US" sz="1800" dirty="0"/>
+              <a:t>✔</a:t>
+            </a:r>
+            <a:r>
+              <a:rPr lang="ro-RO" sz="1800" dirty="0"/>
+              <a:t> </a:t>
+            </a:r>
+            <a:r>
+              <a:rPr lang="en-US" sz="2000" b="0" u="none" strike="noStrike" dirty="0" smtClean="0">
+                <a:solidFill>
+                  <a:srgbClr val="000000"/>
+                </a:solidFill>
+                <a:effectLst/>
+                <a:uFillTx/>
+                <a:latin typeface="New times roman"/>
+              </a:rPr>
+              <a:t>REQ-40</a:t>
+            </a:r>
+            <a:r>
+              <a:rPr lang="en-US" sz="2000" b="0" u="none" strike="noStrike" dirty="0">
+                <a:solidFill>
+                  <a:srgbClr val="000000"/>
+                </a:solidFill>
+                <a:effectLst/>
+                <a:uFillTx/>
+                <a:latin typeface="New times roman"/>
+              </a:rPr>
+              <a:t>: Company staff will be able to allocate a vehicle to each request.</a:t>
+            </a:r>
+            <a:endParaRPr lang="en-US" sz="2000" b="0" u="none" strike="noStrike" dirty="0">
+              <a:solidFill>
+                <a:srgbClr val="000000"/>
+              </a:solidFill>
+              <a:effectLst/>
+              <a:uFillTx/>
+              <a:latin typeface="Times New Roman"/>
+            </a:endParaRPr>
+          </a:p>
+          <a:p>
+            <a:pPr algn="l">
               <a:spcBef>
                 <a:spcPts val="1417"/>
               </a:spcBef>
-              <a:buNone/>
-            </a:pPr>
-            <a:r>
-              <a:rPr lang="en-US" sz="2000" b="0" u="none" strike="noStrike">
-                <a:solidFill>
-                  <a:srgbClr val="000000"/>
-                </a:solidFill>
-                <a:effectLst/>
-                <a:uFillTx/>
-                <a:latin typeface="New times roman"/>
-              </a:rPr>
-              <a:t>REQ-41: Company staff will be able to allocate a driver to each request.</a:t>
-            </a:r>
-            <a:endParaRPr lang="en-US" sz="2000" b="0" u="none" strike="noStrike">
-              <a:solidFill>
-                <a:srgbClr val="000000"/>
-              </a:solidFill>
-              <a:effectLst/>
-              <a:uFillTx/>
-              <a:latin typeface="Times New Roman"/>
-            </a:endParaRPr>
-          </a:p>
-          <a:p>
-            <a:pPr indent="0" algn="l">
+            </a:pPr>
+            <a:r>
+              <a:rPr lang="en-US" sz="1800" dirty="0"/>
+              <a:t>✔</a:t>
+            </a:r>
+            <a:r>
+              <a:rPr lang="ro-RO" sz="1800" dirty="0"/>
+              <a:t> </a:t>
+            </a:r>
+            <a:r>
+              <a:rPr lang="en-US" sz="2000" b="0" u="none" strike="noStrike" dirty="0" smtClean="0">
+                <a:solidFill>
+                  <a:srgbClr val="000000"/>
+                </a:solidFill>
+                <a:effectLst/>
+                <a:uFillTx/>
+                <a:latin typeface="New times roman"/>
+              </a:rPr>
+              <a:t>REQ-41</a:t>
+            </a:r>
+            <a:r>
+              <a:rPr lang="en-US" sz="2000" b="0" u="none" strike="noStrike" dirty="0">
+                <a:solidFill>
+                  <a:srgbClr val="000000"/>
+                </a:solidFill>
+                <a:effectLst/>
+                <a:uFillTx/>
+                <a:latin typeface="New times roman"/>
+              </a:rPr>
+              <a:t>: Company staff will be able to allocate a driver to each request.</a:t>
+            </a:r>
+            <a:endParaRPr lang="en-US" sz="2000" b="0" u="none" strike="noStrike" dirty="0">
+              <a:solidFill>
+                <a:srgbClr val="000000"/>
+              </a:solidFill>
+              <a:effectLst/>
+              <a:uFillTx/>
+              <a:latin typeface="Times New Roman"/>
+            </a:endParaRPr>
+          </a:p>
+          <a:p>
+            <a:pPr algn="l">
               <a:spcBef>
                 <a:spcPts val="1417"/>
               </a:spcBef>
-              <a:buNone/>
-            </a:pPr>
-            <a:r>
-              <a:rPr lang="en-US" sz="2000" b="0" u="none" strike="noStrike">
-                <a:solidFill>
-                  <a:srgbClr val="000000"/>
-                </a:solidFill>
-                <a:effectLst/>
-                <a:uFillTx/>
-                <a:latin typeface="New times roman"/>
-              </a:rPr>
-              <a:t>REQ-42: The allocation must be based on availability constraints.</a:t>
-            </a:r>
-            <a:endParaRPr lang="en-US" sz="2000" b="0" u="none" strike="noStrike">
-              <a:solidFill>
-                <a:srgbClr val="000000"/>
-              </a:solidFill>
-              <a:effectLst/>
-              <a:uFillTx/>
-              <a:latin typeface="Times New Roman"/>
-            </a:endParaRPr>
-          </a:p>
-          <a:p>
-            <a:pPr indent="0" algn="l">
+            </a:pPr>
+            <a:r>
+              <a:rPr lang="en-US" sz="1800" dirty="0"/>
+              <a:t>✔</a:t>
+            </a:r>
+            <a:r>
+              <a:rPr lang="ro-RO" sz="1800" dirty="0"/>
+              <a:t> </a:t>
+            </a:r>
+            <a:r>
+              <a:rPr lang="en-US" sz="2000" b="0" u="none" strike="noStrike" dirty="0" smtClean="0">
+                <a:solidFill>
+                  <a:srgbClr val="000000"/>
+                </a:solidFill>
+                <a:effectLst/>
+                <a:uFillTx/>
+                <a:latin typeface="New times roman"/>
+              </a:rPr>
+              <a:t>REQ-42</a:t>
+            </a:r>
+            <a:r>
+              <a:rPr lang="en-US" sz="2000" b="0" u="none" strike="noStrike" dirty="0">
+                <a:solidFill>
+                  <a:srgbClr val="000000"/>
+                </a:solidFill>
+                <a:effectLst/>
+                <a:uFillTx/>
+                <a:latin typeface="New times roman"/>
+              </a:rPr>
+              <a:t>: The allocation must be based on availability constraints.</a:t>
+            </a:r>
+            <a:endParaRPr lang="en-US" sz="2000" b="0" u="none" strike="noStrike" dirty="0">
+              <a:solidFill>
+                <a:srgbClr val="000000"/>
+              </a:solidFill>
+              <a:effectLst/>
+              <a:uFillTx/>
+              <a:latin typeface="Times New Roman"/>
+            </a:endParaRPr>
+          </a:p>
+          <a:p>
+            <a:pPr algn="l">
               <a:spcBef>
                 <a:spcPts val="1417"/>
               </a:spcBef>
-              <a:buNone/>
-            </a:pPr>
-            <a:r>
-              <a:rPr lang="en-US" sz="2000" b="0" u="none" strike="noStrike">
-                <a:solidFill>
-                  <a:srgbClr val="000000"/>
-                </a:solidFill>
-                <a:effectLst/>
-                <a:uFillTx/>
-                <a:latin typeface="New times roman"/>
-              </a:rPr>
-              <a:t>REQ-43: The allocation must be based on capacity constraints.</a:t>
-            </a:r>
-            <a:endParaRPr lang="en-US" sz="2000" b="0" u="none" strike="noStrike">
-              <a:solidFill>
-                <a:srgbClr val="000000"/>
-              </a:solidFill>
-              <a:effectLst/>
-              <a:uFillTx/>
-              <a:latin typeface="Times New Roman"/>
-            </a:endParaRPr>
-          </a:p>
-          <a:p>
-            <a:pPr indent="0" algn="l">
+            </a:pPr>
+            <a:r>
+              <a:rPr lang="en-US" sz="1800" dirty="0"/>
+              <a:t>✔</a:t>
+            </a:r>
+            <a:r>
+              <a:rPr lang="ro-RO" sz="1800" dirty="0"/>
+              <a:t> </a:t>
+            </a:r>
+            <a:r>
+              <a:rPr lang="en-US" sz="2000" b="0" u="none" strike="noStrike" dirty="0" smtClean="0">
+                <a:solidFill>
+                  <a:srgbClr val="000000"/>
+                </a:solidFill>
+                <a:effectLst/>
+                <a:uFillTx/>
+                <a:latin typeface="New times roman"/>
+              </a:rPr>
+              <a:t>REQ-43</a:t>
+            </a:r>
+            <a:r>
+              <a:rPr lang="en-US" sz="2000" b="0" u="none" strike="noStrike" dirty="0">
+                <a:solidFill>
+                  <a:srgbClr val="000000"/>
+                </a:solidFill>
+                <a:effectLst/>
+                <a:uFillTx/>
+                <a:latin typeface="New times roman"/>
+              </a:rPr>
+              <a:t>: The allocation must be based on capacity constraints.</a:t>
+            </a:r>
+            <a:endParaRPr lang="en-US" sz="2000" b="0" u="none" strike="noStrike" dirty="0">
+              <a:solidFill>
+                <a:srgbClr val="000000"/>
+              </a:solidFill>
+              <a:effectLst/>
+              <a:uFillTx/>
+              <a:latin typeface="Times New Roman"/>
+            </a:endParaRPr>
+          </a:p>
+          <a:p>
+            <a:pPr algn="l">
               <a:spcBef>
                 <a:spcPts val="1417"/>
               </a:spcBef>
-              <a:buNone/>
-            </a:pPr>
-            <a:r>
-              <a:rPr lang="en-US" sz="2000" b="0" u="none" strike="noStrike">
-                <a:solidFill>
-                  <a:srgbClr val="000000"/>
-                </a:solidFill>
-                <a:effectLst/>
-                <a:uFillTx/>
-                <a:latin typeface="New times roman"/>
-              </a:rPr>
-              <a:t>REQ-44: The allocation must be based on route constraints.</a:t>
-            </a:r>
-            <a:endParaRPr lang="en-US" sz="2000" b="0" u="none" strike="noStrike">
-              <a:solidFill>
-                <a:srgbClr val="000000"/>
-              </a:solidFill>
-              <a:effectLst/>
-              <a:uFillTx/>
-              <a:latin typeface="Times New Roman"/>
-            </a:endParaRPr>
-          </a:p>
-          <a:p>
-            <a:pPr indent="0" algn="l">
+            </a:pPr>
+            <a:r>
+              <a:rPr lang="en-US" sz="1800" dirty="0"/>
+              <a:t>✔</a:t>
+            </a:r>
+            <a:r>
+              <a:rPr lang="ro-RO" sz="1800" dirty="0"/>
+              <a:t> </a:t>
+            </a:r>
+            <a:r>
+              <a:rPr lang="en-US" sz="2000" b="0" u="none" strike="noStrike" dirty="0" smtClean="0">
+                <a:solidFill>
+                  <a:srgbClr val="000000"/>
+                </a:solidFill>
+                <a:effectLst/>
+                <a:uFillTx/>
+                <a:latin typeface="New times roman"/>
+              </a:rPr>
+              <a:t>REQ-44</a:t>
+            </a:r>
+            <a:r>
+              <a:rPr lang="en-US" sz="2000" b="0" u="none" strike="noStrike" dirty="0">
+                <a:solidFill>
+                  <a:srgbClr val="000000"/>
+                </a:solidFill>
+                <a:effectLst/>
+                <a:uFillTx/>
+                <a:latin typeface="New times roman"/>
+              </a:rPr>
+              <a:t>: The allocation must be based on route constraints.</a:t>
+            </a:r>
+            <a:endParaRPr lang="en-US" sz="2000" b="0" u="none" strike="noStrike" dirty="0">
+              <a:solidFill>
+                <a:srgbClr val="000000"/>
+              </a:solidFill>
+              <a:effectLst/>
+              <a:uFillTx/>
+              <a:latin typeface="Times New Roman"/>
+            </a:endParaRPr>
+          </a:p>
+          <a:p>
+            <a:pPr algn="l">
               <a:spcBef>
                 <a:spcPts val="1417"/>
               </a:spcBef>
-              <a:buNone/>
-            </a:pPr>
-            <a:r>
-              <a:rPr lang="en-US" sz="2000" b="0" u="none" strike="noStrike">
-                <a:solidFill>
-                  <a:srgbClr val="000000"/>
-                </a:solidFill>
-                <a:effectLst/>
-                <a:uFillTx/>
-                <a:latin typeface="New times roman"/>
-              </a:rPr>
-              <a:t>REQ-45: The allocation must be based on scheduling constraints.</a:t>
-            </a:r>
-            <a:endParaRPr lang="en-US" sz="2000" b="0" u="none" strike="noStrike">
-              <a:solidFill>
-                <a:srgbClr val="000000"/>
-              </a:solidFill>
-              <a:effectLst/>
-              <a:uFillTx/>
-              <a:latin typeface="Times New Roman"/>
-            </a:endParaRPr>
-          </a:p>
-          <a:p>
-            <a:pPr indent="0" algn="l">
+            </a:pPr>
+            <a:r>
+              <a:rPr lang="en-US" sz="1800" dirty="0"/>
+              <a:t>✔</a:t>
+            </a:r>
+            <a:r>
+              <a:rPr lang="ro-RO" sz="1800" dirty="0"/>
+              <a:t> </a:t>
+            </a:r>
+            <a:r>
+              <a:rPr lang="en-US" sz="2000" b="0" u="none" strike="noStrike" dirty="0" smtClean="0">
+                <a:solidFill>
+                  <a:srgbClr val="000000"/>
+                </a:solidFill>
+                <a:effectLst/>
+                <a:uFillTx/>
+                <a:latin typeface="New times roman"/>
+              </a:rPr>
+              <a:t>REQ-45</a:t>
+            </a:r>
+            <a:r>
+              <a:rPr lang="en-US" sz="2000" b="0" u="none" strike="noStrike" dirty="0">
+                <a:solidFill>
+                  <a:srgbClr val="000000"/>
+                </a:solidFill>
+                <a:effectLst/>
+                <a:uFillTx/>
+                <a:latin typeface="New times roman"/>
+              </a:rPr>
+              <a:t>: The allocation must be based on scheduling constraints.</a:t>
+            </a:r>
+            <a:endParaRPr lang="en-US" sz="2000" b="0" u="none" strike="noStrike" dirty="0">
+              <a:solidFill>
+                <a:srgbClr val="000000"/>
+              </a:solidFill>
+              <a:effectLst/>
+              <a:uFillTx/>
+              <a:latin typeface="Times New Roman"/>
+            </a:endParaRPr>
+          </a:p>
+          <a:p>
+            <a:pPr algn="l">
               <a:spcBef>
                 <a:spcPts val="1417"/>
               </a:spcBef>
-              <a:buNone/>
-            </a:pPr>
-            <a:r>
-              <a:rPr lang="en-US" sz="2000" b="0" u="none" strike="noStrike">
-                <a:solidFill>
-                  <a:srgbClr val="000000"/>
-                </a:solidFill>
-                <a:effectLst/>
-                <a:uFillTx/>
-                <a:latin typeface="New times roman"/>
-              </a:rPr>
-              <a:t>REQ-46: The system shall prevent staff from assigning a vehicle that lacks sufficient capacity.</a:t>
-            </a:r>
-            <a:endParaRPr lang="en-US" sz="2000" b="0" u="none" strike="noStrike">
-              <a:solidFill>
-                <a:srgbClr val="000000"/>
-              </a:solidFill>
-              <a:effectLst/>
-              <a:uFillTx/>
-              <a:latin typeface="Times New Roman"/>
-            </a:endParaRPr>
-          </a:p>
-          <a:p>
-            <a:pPr indent="0" algn="l">
+            </a:pPr>
+            <a:r>
+              <a:rPr lang="en-US" sz="1800" dirty="0"/>
+              <a:t>✔</a:t>
+            </a:r>
+            <a:r>
+              <a:rPr lang="ro-RO" sz="1800" dirty="0"/>
+              <a:t> </a:t>
+            </a:r>
+            <a:r>
+              <a:rPr lang="en-US" sz="2000" b="0" u="none" strike="noStrike" dirty="0" smtClean="0">
+                <a:solidFill>
+                  <a:srgbClr val="000000"/>
+                </a:solidFill>
+                <a:effectLst/>
+                <a:uFillTx/>
+                <a:latin typeface="New times roman"/>
+              </a:rPr>
+              <a:t>REQ-46</a:t>
+            </a:r>
+            <a:r>
+              <a:rPr lang="en-US" sz="2000" b="0" u="none" strike="noStrike" dirty="0">
+                <a:solidFill>
+                  <a:srgbClr val="000000"/>
+                </a:solidFill>
+                <a:effectLst/>
+                <a:uFillTx/>
+                <a:latin typeface="New times roman"/>
+              </a:rPr>
+              <a:t>: The system shall prevent staff from assigning a vehicle that lacks sufficient capacity.</a:t>
+            </a:r>
+            <a:endParaRPr lang="en-US" sz="2000" b="0" u="none" strike="noStrike" dirty="0">
+              <a:solidFill>
+                <a:srgbClr val="000000"/>
+              </a:solidFill>
+              <a:effectLst/>
+              <a:uFillTx/>
+              <a:latin typeface="Times New Roman"/>
+            </a:endParaRPr>
+          </a:p>
+          <a:p>
+            <a:pPr algn="l">
               <a:spcBef>
                 <a:spcPts val="1417"/>
               </a:spcBef>
-              <a:buNone/>
-            </a:pPr>
-            <a:r>
-              <a:rPr lang="en-US" sz="2000" b="0" u="none" strike="noStrike">
-                <a:solidFill>
-                  <a:srgbClr val="000000"/>
-                </a:solidFill>
-                <a:effectLst/>
-                <a:uFillTx/>
-                <a:latin typeface="New times roman"/>
-              </a:rPr>
-              <a:t>REQ-47: The system shall visually distinguish between available and unavailable resources.</a:t>
-            </a:r>
-            <a:endParaRPr lang="en-US" sz="2000" b="0" u="none" strike="noStrike">
+            </a:pPr>
+            <a:r>
+              <a:rPr lang="en-US" sz="1800" dirty="0"/>
+              <a:t>✔</a:t>
+            </a:r>
+            <a:r>
+              <a:rPr lang="ro-RO" sz="1800" dirty="0"/>
+              <a:t> </a:t>
+            </a:r>
+            <a:r>
+              <a:rPr lang="en-US" sz="2000" b="0" u="none" strike="noStrike" dirty="0" smtClean="0">
+                <a:solidFill>
+                  <a:srgbClr val="000000"/>
+                </a:solidFill>
+                <a:effectLst/>
+                <a:uFillTx/>
+                <a:latin typeface="New times roman"/>
+              </a:rPr>
+              <a:t>REQ-47</a:t>
+            </a:r>
+            <a:r>
+              <a:rPr lang="en-US" sz="2000" b="0" u="none" strike="noStrike" dirty="0">
+                <a:solidFill>
+                  <a:srgbClr val="000000"/>
+                </a:solidFill>
+                <a:effectLst/>
+                <a:uFillTx/>
+                <a:latin typeface="New times roman"/>
+              </a:rPr>
+              <a:t>: The system shall visually distinguish between available and unavailable resources.</a:t>
+            </a:r>
+            <a:endParaRPr lang="en-US" sz="2000" b="0" u="none" strike="noStrike" dirty="0">
               <a:solidFill>
                 <a:srgbClr val="000000"/>
               </a:solidFill>
@@ -4316,11 +6647,14 @@
       </p:sp>
     </p:spTree>
   </p:cSld>
-  <mc:AlternateContent>
+  <p:clrMapOvr>
+    <a:masterClrMapping/>
+  </p:clrMapOvr>
+  <mc:AlternateContent xmlns:mc="http://schemas.openxmlformats.org/markup-compatibility/2006" xmlns:p14="http://schemas.microsoft.com/office/powerpoint/2010/main">
     <mc:Choice Requires="p14">
       <p:transition spd="slow" p14:dur="2000"/>
     </mc:Choice>
-    <mc:Fallback>
+    <mc:Fallback xmlns="" xmlns:p15="http://schemas.microsoft.com/office/powerpoint/2012/main">
       <p:transition spd="slow"/>
     </mc:Fallback>
   </mc:AlternateContent>
@@ -4328,7 +6662,7 @@
 </file>
 
 <file path=ppt/slides/slide8.xml><?xml version="1.0" encoding="utf-8"?>
-<p:sld xmlns:a="http://schemas.openxmlformats.org/drawingml/2006/main" xmlns:p="http://schemas.openxmlformats.org/presentationml/2006/main" xmlns:r="http://schemas.openxmlformats.org/officeDocument/2006/relationships" xmlns:p14="http://schemas.microsoft.com/office/powerpoint/2010/main" xmlns:p15="http://schemas.microsoft.com/office/powerpoint/2012/main" xmlns:mc="http://schemas.openxmlformats.org/markup-compatibility/2006">
+<p:sld xmlns:a="http://schemas.openxmlformats.org/drawingml/2006/main" xmlns:r="http://schemas.openxmlformats.org/officeDocument/2006/relationships" xmlns:p="http://schemas.openxmlformats.org/presentationml/2006/main">
   <p:cSld>
     <p:spTree>
       <p:nvGrpSpPr>
@@ -4371,6 +6705,7 @@
           <a:bodyPr lIns="0" tIns="0" rIns="0" bIns="0" anchor="ctr">
             <a:spAutoFit/>
           </a:bodyPr>
+          <a:lstStyle/>
           <a:p>
             <a:pPr indent="0" algn="l">
               <a:buNone/>
@@ -4424,214 +6759,359 @@
           <a:bodyPr lIns="0" tIns="0" rIns="0" bIns="0" anchor="t">
             <a:normAutofit fontScale="85000" lnSpcReduction="19999"/>
           </a:bodyPr>
-          <a:p>
-            <a:pPr indent="0" algn="l">
+          <a:lstStyle/>
+          <a:p>
+            <a:pPr algn="l">
               <a:spcBef>
                 <a:spcPts val="1417"/>
               </a:spcBef>
-              <a:buNone/>
-            </a:pPr>
-            <a:r>
-              <a:rPr lang="en-US" sz="2000" b="0" u="none" strike="noStrike">
-                <a:solidFill>
-                  <a:srgbClr val="000000"/>
-                </a:solidFill>
-                <a:effectLst/>
-                <a:uFillTx/>
-                <a:latin typeface="New times roman"/>
-              </a:rPr>
-              <a:t>REQ-48: The system will automatically generate a price offer for each request.</a:t>
-            </a:r>
-            <a:endParaRPr lang="en-US" sz="2000" b="0" u="none" strike="noStrike">
-              <a:solidFill>
-                <a:srgbClr val="000000"/>
-              </a:solidFill>
-              <a:effectLst/>
-              <a:uFillTx/>
-              <a:latin typeface="Times New Roman"/>
-            </a:endParaRPr>
-          </a:p>
-          <a:p>
-            <a:pPr indent="0" algn="l">
+            </a:pPr>
+            <a:r>
+              <a:rPr lang="en-US" sz="1800" dirty="0"/>
+              <a:t>✔</a:t>
+            </a:r>
+            <a:r>
+              <a:rPr lang="ro-RO" sz="1800" dirty="0"/>
+              <a:t> </a:t>
+            </a:r>
+            <a:r>
+              <a:rPr lang="en-US" sz="2000" b="0" u="none" strike="noStrike" dirty="0" smtClean="0">
+                <a:solidFill>
+                  <a:srgbClr val="000000"/>
+                </a:solidFill>
+                <a:effectLst/>
+                <a:uFillTx/>
+                <a:latin typeface="New times roman"/>
+              </a:rPr>
+              <a:t>REQ-48</a:t>
+            </a:r>
+            <a:r>
+              <a:rPr lang="en-US" sz="2000" b="0" u="none" strike="noStrike" dirty="0">
+                <a:solidFill>
+                  <a:srgbClr val="000000"/>
+                </a:solidFill>
+                <a:effectLst/>
+                <a:uFillTx/>
+                <a:latin typeface="New times roman"/>
+              </a:rPr>
+              <a:t>: The system will automatically generate a price offer for each request.</a:t>
+            </a:r>
+            <a:endParaRPr lang="en-US" sz="2000" b="0" u="none" strike="noStrike" dirty="0">
+              <a:solidFill>
+                <a:srgbClr val="000000"/>
+              </a:solidFill>
+              <a:effectLst/>
+              <a:uFillTx/>
+              <a:latin typeface="Times New Roman"/>
+            </a:endParaRPr>
+          </a:p>
+          <a:p>
+            <a:pPr algn="l">
               <a:spcBef>
                 <a:spcPts val="1417"/>
               </a:spcBef>
-              <a:buNone/>
-            </a:pPr>
-            <a:r>
-              <a:rPr lang="en-US" sz="2000" b="0" u="none" strike="noStrike">
-                <a:solidFill>
-                  <a:srgbClr val="000000"/>
-                </a:solidFill>
-                <a:effectLst/>
-                <a:uFillTx/>
-                <a:latin typeface="New times roman"/>
-              </a:rPr>
-              <a:t>REQ-49: The price offer will be based on distance.</a:t>
-            </a:r>
-            <a:endParaRPr lang="en-US" sz="2000" b="0" u="none" strike="noStrike">
-              <a:solidFill>
-                <a:srgbClr val="000000"/>
-              </a:solidFill>
-              <a:effectLst/>
-              <a:uFillTx/>
-              <a:latin typeface="Times New Roman"/>
-            </a:endParaRPr>
-          </a:p>
-          <a:p>
-            <a:pPr indent="0" algn="l">
+            </a:pPr>
+            <a:r>
+              <a:rPr lang="en-US" sz="1800" dirty="0"/>
+              <a:t>✔</a:t>
+            </a:r>
+            <a:r>
+              <a:rPr lang="ro-RO" sz="1800" dirty="0"/>
+              <a:t> </a:t>
+            </a:r>
+            <a:r>
+              <a:rPr lang="en-US" sz="2000" b="0" u="none" strike="noStrike" dirty="0" smtClean="0">
+                <a:solidFill>
+                  <a:srgbClr val="000000"/>
+                </a:solidFill>
+                <a:effectLst/>
+                <a:uFillTx/>
+                <a:latin typeface="New times roman"/>
+              </a:rPr>
+              <a:t>REQ-49</a:t>
+            </a:r>
+            <a:r>
+              <a:rPr lang="en-US" sz="2000" b="0" u="none" strike="noStrike" dirty="0">
+                <a:solidFill>
+                  <a:srgbClr val="000000"/>
+                </a:solidFill>
+                <a:effectLst/>
+                <a:uFillTx/>
+                <a:latin typeface="New times roman"/>
+              </a:rPr>
+              <a:t>: The price offer will be based on distance.</a:t>
+            </a:r>
+            <a:endParaRPr lang="en-US" sz="2000" b="0" u="none" strike="noStrike" dirty="0">
+              <a:solidFill>
+                <a:srgbClr val="000000"/>
+              </a:solidFill>
+              <a:effectLst/>
+              <a:uFillTx/>
+              <a:latin typeface="Times New Roman"/>
+            </a:endParaRPr>
+          </a:p>
+          <a:p>
+            <a:pPr algn="l">
               <a:spcBef>
                 <a:spcPts val="1417"/>
               </a:spcBef>
-              <a:buNone/>
-            </a:pPr>
-            <a:r>
-              <a:rPr lang="en-US" sz="2000" b="0" u="none" strike="noStrike">
-                <a:solidFill>
-                  <a:srgbClr val="000000"/>
-                </a:solidFill>
-                <a:effectLst/>
-                <a:uFillTx/>
-                <a:latin typeface="New times roman"/>
-              </a:rPr>
-              <a:t>REQ-50: The price offer will be based on cargo characteristics.</a:t>
-            </a:r>
-            <a:endParaRPr lang="en-US" sz="2000" b="0" u="none" strike="noStrike">
-              <a:solidFill>
-                <a:srgbClr val="000000"/>
-              </a:solidFill>
-              <a:effectLst/>
-              <a:uFillTx/>
-              <a:latin typeface="Times New Roman"/>
-            </a:endParaRPr>
-          </a:p>
-          <a:p>
-            <a:pPr indent="0" algn="l">
+            </a:pPr>
+            <a:r>
+              <a:rPr lang="en-US" sz="1800" dirty="0"/>
+              <a:t>✔</a:t>
+            </a:r>
+            <a:r>
+              <a:rPr lang="ro-RO" sz="1800" dirty="0"/>
+              <a:t> </a:t>
+            </a:r>
+            <a:r>
+              <a:rPr lang="en-US" sz="2000" b="0" u="none" strike="noStrike" dirty="0" smtClean="0">
+                <a:solidFill>
+                  <a:srgbClr val="000000"/>
+                </a:solidFill>
+                <a:effectLst/>
+                <a:uFillTx/>
+                <a:latin typeface="New times roman"/>
+              </a:rPr>
+              <a:t>REQ-50</a:t>
+            </a:r>
+            <a:r>
+              <a:rPr lang="en-US" sz="2000" b="0" u="none" strike="noStrike" dirty="0">
+                <a:solidFill>
+                  <a:srgbClr val="000000"/>
+                </a:solidFill>
+                <a:effectLst/>
+                <a:uFillTx/>
+                <a:latin typeface="New times roman"/>
+              </a:rPr>
+              <a:t>: The price offer will be based on cargo characteristics.</a:t>
+            </a:r>
+            <a:endParaRPr lang="en-US" sz="2000" b="0" u="none" strike="noStrike" dirty="0">
+              <a:solidFill>
+                <a:srgbClr val="000000"/>
+              </a:solidFill>
+              <a:effectLst/>
+              <a:uFillTx/>
+              <a:latin typeface="Times New Roman"/>
+            </a:endParaRPr>
+          </a:p>
+          <a:p>
+            <a:pPr algn="l">
               <a:spcBef>
                 <a:spcPts val="1417"/>
               </a:spcBef>
-              <a:buNone/>
-            </a:pPr>
-            <a:r>
-              <a:rPr lang="en-US" sz="2000" b="0" u="none" strike="noStrike">
-                <a:solidFill>
-                  <a:srgbClr val="000000"/>
-                </a:solidFill>
-                <a:effectLst/>
-                <a:uFillTx/>
-                <a:latin typeface="New times roman"/>
-              </a:rPr>
-              <a:t>REQ-51: The price offer will be based on resource usage.</a:t>
-            </a:r>
-            <a:endParaRPr lang="en-US" sz="2000" b="0" u="none" strike="noStrike">
-              <a:solidFill>
-                <a:srgbClr val="000000"/>
-              </a:solidFill>
-              <a:effectLst/>
-              <a:uFillTx/>
-              <a:latin typeface="Times New Roman"/>
-            </a:endParaRPr>
-          </a:p>
-          <a:p>
-            <a:pPr indent="0" algn="l">
+            </a:pPr>
+            <a:r>
+              <a:rPr lang="en-US" sz="1800" dirty="0"/>
+              <a:t>✔</a:t>
+            </a:r>
+            <a:r>
+              <a:rPr lang="ro-RO" sz="1800" dirty="0"/>
+              <a:t> </a:t>
+            </a:r>
+            <a:r>
+              <a:rPr lang="en-US" sz="2000" b="0" u="none" strike="noStrike" dirty="0" smtClean="0">
+                <a:solidFill>
+                  <a:srgbClr val="000000"/>
+                </a:solidFill>
+                <a:effectLst/>
+                <a:uFillTx/>
+                <a:latin typeface="New times roman"/>
+              </a:rPr>
+              <a:t>REQ-51</a:t>
+            </a:r>
+            <a:r>
+              <a:rPr lang="en-US" sz="2000" b="0" u="none" strike="noStrike" dirty="0">
+                <a:solidFill>
+                  <a:srgbClr val="000000"/>
+                </a:solidFill>
+                <a:effectLst/>
+                <a:uFillTx/>
+                <a:latin typeface="New times roman"/>
+              </a:rPr>
+              <a:t>: The price offer will be based on resource usage.</a:t>
+            </a:r>
+            <a:endParaRPr lang="en-US" sz="2000" b="0" u="none" strike="noStrike" dirty="0">
+              <a:solidFill>
+                <a:srgbClr val="000000"/>
+              </a:solidFill>
+              <a:effectLst/>
+              <a:uFillTx/>
+              <a:latin typeface="Times New Roman"/>
+            </a:endParaRPr>
+          </a:p>
+          <a:p>
+            <a:pPr algn="l">
               <a:spcBef>
                 <a:spcPts val="1417"/>
               </a:spcBef>
-              <a:buNone/>
-            </a:pPr>
-            <a:r>
-              <a:rPr lang="en-US" sz="2000" b="0" u="none" strike="noStrike">
-                <a:solidFill>
-                  <a:srgbClr val="000000"/>
-                </a:solidFill>
-                <a:effectLst/>
-                <a:uFillTx/>
-                <a:latin typeface="New times roman"/>
-              </a:rPr>
-              <a:t>REQ-52: The system shall allow staff to override the automatically generated price before sending.</a:t>
-            </a:r>
-            <a:endParaRPr lang="en-US" sz="2000" b="0" u="none" strike="noStrike">
-              <a:solidFill>
-                <a:srgbClr val="000000"/>
-              </a:solidFill>
-              <a:effectLst/>
-              <a:uFillTx/>
-              <a:latin typeface="Times New Roman"/>
-            </a:endParaRPr>
-          </a:p>
-          <a:p>
-            <a:pPr indent="0" algn="l">
+            </a:pPr>
+            <a:r>
+              <a:rPr lang="en-US" sz="1800" dirty="0"/>
+              <a:t>✔</a:t>
+            </a:r>
+            <a:r>
+              <a:rPr lang="ro-RO" sz="1800" dirty="0"/>
+              <a:t> </a:t>
+            </a:r>
+            <a:r>
+              <a:rPr lang="en-US" sz="2000" b="0" u="none" strike="noStrike" dirty="0" smtClean="0">
+                <a:solidFill>
+                  <a:srgbClr val="000000"/>
+                </a:solidFill>
+                <a:effectLst/>
+                <a:uFillTx/>
+                <a:latin typeface="New times roman"/>
+              </a:rPr>
+              <a:t>REQ-52</a:t>
+            </a:r>
+            <a:r>
+              <a:rPr lang="en-US" sz="2000" b="0" u="none" strike="noStrike" dirty="0">
+                <a:solidFill>
+                  <a:srgbClr val="000000"/>
+                </a:solidFill>
+                <a:effectLst/>
+                <a:uFillTx/>
+                <a:latin typeface="New times roman"/>
+              </a:rPr>
+              <a:t>: The system shall allow staff to override the automatically generated price before sending.</a:t>
+            </a:r>
+            <a:endParaRPr lang="en-US" sz="2000" b="0" u="none" strike="noStrike" dirty="0">
+              <a:solidFill>
+                <a:srgbClr val="000000"/>
+              </a:solidFill>
+              <a:effectLst/>
+              <a:uFillTx/>
+              <a:latin typeface="Times New Roman"/>
+            </a:endParaRPr>
+          </a:p>
+          <a:p>
+            <a:pPr algn="l">
               <a:spcBef>
                 <a:spcPts val="1417"/>
               </a:spcBef>
-              <a:buNone/>
-            </a:pPr>
-            <a:r>
-              <a:rPr lang="en-US" sz="2000" b="0" u="none" strike="noStrike">
-                <a:solidFill>
-                  <a:srgbClr val="000000"/>
-                </a:solidFill>
-                <a:effectLst/>
-                <a:uFillTx/>
-                <a:latin typeface="New times roman"/>
-              </a:rPr>
-              <a:t>REQ-53: The system shall attach a validity period to the generated price offer.</a:t>
-            </a:r>
-            <a:endParaRPr lang="en-US" sz="2000" b="0" u="none" strike="noStrike">
-              <a:solidFill>
-                <a:srgbClr val="000000"/>
-              </a:solidFill>
-              <a:effectLst/>
-              <a:uFillTx/>
-              <a:latin typeface="Times New Roman"/>
-            </a:endParaRPr>
-          </a:p>
-          <a:p>
-            <a:pPr indent="0" algn="l">
+            </a:pPr>
+            <a:r>
+              <a:rPr lang="en-US" sz="1800" dirty="0"/>
+              <a:t>✔</a:t>
+            </a:r>
+            <a:r>
+              <a:rPr lang="ro-RO" sz="1800" dirty="0"/>
+              <a:t> </a:t>
+            </a:r>
+            <a:r>
+              <a:rPr lang="en-US" sz="2000" b="0" u="none" strike="noStrike" dirty="0" smtClean="0">
+                <a:solidFill>
+                  <a:srgbClr val="000000"/>
+                </a:solidFill>
+                <a:effectLst/>
+                <a:uFillTx/>
+                <a:latin typeface="New times roman"/>
+              </a:rPr>
+              <a:t>REQ-53</a:t>
+            </a:r>
+            <a:r>
+              <a:rPr lang="en-US" sz="2000" b="0" u="none" strike="noStrike" dirty="0">
+                <a:solidFill>
+                  <a:srgbClr val="000000"/>
+                </a:solidFill>
+                <a:effectLst/>
+                <a:uFillTx/>
+                <a:latin typeface="New times roman"/>
+              </a:rPr>
+              <a:t>: The system shall attach a validity period to the generated price offer.</a:t>
+            </a:r>
+            <a:endParaRPr lang="en-US" sz="2000" b="0" u="none" strike="noStrike" dirty="0">
+              <a:solidFill>
+                <a:srgbClr val="000000"/>
+              </a:solidFill>
+              <a:effectLst/>
+              <a:uFillTx/>
+              <a:latin typeface="Times New Roman"/>
+            </a:endParaRPr>
+          </a:p>
+          <a:p>
+            <a:pPr algn="l">
               <a:spcBef>
                 <a:spcPts val="1417"/>
               </a:spcBef>
-              <a:buNone/>
-            </a:pPr>
-            <a:r>
-              <a:rPr lang="en-US" sz="2000" b="0" u="none" strike="noStrike">
-                <a:solidFill>
-                  <a:srgbClr val="000000"/>
-                </a:solidFill>
-                <a:effectLst/>
-                <a:uFillTx/>
-                <a:latin typeface="New times roman"/>
-              </a:rPr>
-              <a:t>REQ-54: The system shall store the history of generated price offers.</a:t>
-            </a:r>
-            <a:endParaRPr lang="en-US" sz="2000" b="0" u="none" strike="noStrike">
-              <a:solidFill>
-                <a:srgbClr val="000000"/>
-              </a:solidFill>
-              <a:effectLst/>
-              <a:uFillTx/>
-              <a:latin typeface="Times New Roman"/>
-            </a:endParaRPr>
-          </a:p>
-          <a:p>
-            <a:pPr indent="0" algn="l">
+            </a:pPr>
+            <a:r>
+              <a:rPr lang="en-US" sz="1800" dirty="0"/>
+              <a:t>✔</a:t>
+            </a:r>
+            <a:r>
+              <a:rPr lang="ro-RO" sz="1800" dirty="0"/>
+              <a:t> </a:t>
+            </a:r>
+            <a:r>
+              <a:rPr lang="en-US" sz="2000" b="0" u="none" strike="noStrike" dirty="0" smtClean="0">
+                <a:solidFill>
+                  <a:srgbClr val="000000"/>
+                </a:solidFill>
+                <a:effectLst/>
+                <a:uFillTx/>
+                <a:latin typeface="New times roman"/>
+              </a:rPr>
+              <a:t>REQ-54</a:t>
+            </a:r>
+            <a:r>
+              <a:rPr lang="en-US" sz="2000" b="0" u="none" strike="noStrike" dirty="0">
+                <a:solidFill>
+                  <a:srgbClr val="000000"/>
+                </a:solidFill>
+                <a:effectLst/>
+                <a:uFillTx/>
+                <a:latin typeface="New times roman"/>
+              </a:rPr>
+              <a:t>: The system shall store the history of generated price offers.</a:t>
+            </a:r>
+            <a:endParaRPr lang="en-US" sz="2000" b="0" u="none" strike="noStrike" dirty="0">
+              <a:solidFill>
+                <a:srgbClr val="000000"/>
+              </a:solidFill>
+              <a:effectLst/>
+              <a:uFillTx/>
+              <a:latin typeface="Times New Roman"/>
+            </a:endParaRPr>
+          </a:p>
+          <a:p>
+            <a:pPr algn="l">
               <a:spcBef>
                 <a:spcPts val="1417"/>
               </a:spcBef>
-              <a:buNone/>
-            </a:pPr>
-            <a:r>
-              <a:rPr lang="en-US" sz="2000" b="0" u="none" strike="noStrike">
-                <a:solidFill>
-                  <a:srgbClr val="000000"/>
-                </a:solidFill>
-                <a:effectLst/>
-                <a:uFillTx/>
-                <a:latin typeface="New times roman"/>
-              </a:rPr>
-              <a:t>REQ-55: The system shall ensure the price offer is communicated to the customer.</a:t>
-            </a:r>
-            <a:endParaRPr lang="en-US" sz="2000" b="0" u="none" strike="noStrike">
+            </a:pPr>
+            <a:r>
+              <a:rPr lang="en-US" sz="1800" dirty="0"/>
+              <a:t>✔</a:t>
+            </a:r>
+            <a:r>
+              <a:rPr lang="ro-RO" sz="1800" dirty="0"/>
+              <a:t> </a:t>
+            </a:r>
+            <a:r>
+              <a:rPr lang="en-US" sz="2000" b="0" u="none" strike="noStrike" dirty="0" smtClean="0">
+                <a:solidFill>
+                  <a:srgbClr val="000000"/>
+                </a:solidFill>
+                <a:effectLst/>
+                <a:uFillTx/>
+                <a:latin typeface="New times roman"/>
+              </a:rPr>
+              <a:t>REQ-55</a:t>
+            </a:r>
+            <a:r>
+              <a:rPr lang="en-US" sz="2000" b="0" u="none" strike="noStrike" dirty="0">
+                <a:solidFill>
+                  <a:srgbClr val="000000"/>
+                </a:solidFill>
+                <a:effectLst/>
+                <a:uFillTx/>
+                <a:latin typeface="New times roman"/>
+              </a:rPr>
+              <a:t>: The system shall ensure the price offer is communicated to the customer.</a:t>
+            </a:r>
+            <a:endParaRPr lang="en-US" sz="2000" b="0" u="none" strike="noStrike" dirty="0">
               <a:solidFill>
                 <a:srgbClr val="000000"/>
               </a:solidFill>
@@ -4644,11 +7124,14 @@
       </p:sp>
     </p:spTree>
   </p:cSld>
-  <mc:AlternateContent>
+  <p:clrMapOvr>
+    <a:masterClrMapping/>
+  </p:clrMapOvr>
+  <mc:AlternateContent xmlns:mc="http://schemas.openxmlformats.org/markup-compatibility/2006" xmlns:p14="http://schemas.microsoft.com/office/powerpoint/2010/main">
     <mc:Choice Requires="p14">
       <p:transition spd="slow" p14:dur="2000"/>
     </mc:Choice>
-    <mc:Fallback>
+    <mc:Fallback xmlns="" xmlns:p15="http://schemas.microsoft.com/office/powerpoint/2012/main">
       <p:transition spd="slow"/>
     </mc:Fallback>
   </mc:AlternateContent>
@@ -4656,7 +7139,7 @@
 </file>
 
 <file path=ppt/slides/slide9.xml><?xml version="1.0" encoding="utf-8"?>
-<p:sld xmlns:a="http://schemas.openxmlformats.org/drawingml/2006/main" xmlns:p="http://schemas.openxmlformats.org/presentationml/2006/main" xmlns:r="http://schemas.openxmlformats.org/officeDocument/2006/relationships" xmlns:p14="http://schemas.microsoft.com/office/powerpoint/2010/main" xmlns:p15="http://schemas.microsoft.com/office/powerpoint/2012/main" xmlns:mc="http://schemas.openxmlformats.org/markup-compatibility/2006">
+<p:sld xmlns:a="http://schemas.openxmlformats.org/drawingml/2006/main" xmlns:r="http://schemas.openxmlformats.org/officeDocument/2006/relationships" xmlns:p="http://schemas.openxmlformats.org/presentationml/2006/main">
   <p:cSld>
     <p:spTree>
       <p:nvGrpSpPr>
@@ -4699,6 +7182,7 @@
           <a:bodyPr lIns="0" tIns="0" rIns="0" bIns="0" anchor="ctr">
             <a:spAutoFit/>
           </a:bodyPr>
+          <a:lstStyle/>
           <a:p>
             <a:pPr indent="0" algn="l">
               <a:buNone/>
@@ -4750,216 +7234,361 @@
         </p:spPr>
         <p:txBody>
           <a:bodyPr lIns="0" tIns="0" rIns="0" bIns="0" anchor="t">
-            <a:normAutofit fontScale="77500" lnSpcReduction="19999"/>
+            <a:normAutofit fontScale="77500" lnSpcReduction="20000"/>
           </a:bodyPr>
-          <a:p>
-            <a:pPr indent="0" algn="l">
+          <a:lstStyle/>
+          <a:p>
+            <a:pPr algn="l">
               <a:spcBef>
                 <a:spcPts val="1417"/>
               </a:spcBef>
-              <a:buNone/>
-            </a:pPr>
-            <a:r>
-              <a:rPr lang="en-US" sz="2000" b="0" u="none" strike="noStrike">
-                <a:solidFill>
-                  <a:srgbClr val="000000"/>
-                </a:solidFill>
-                <a:effectLst/>
-                <a:uFillTx/>
-                <a:latin typeface="New times roman"/>
-              </a:rPr>
-              <a:t>REQ-56: Customers will receive the price offer.</a:t>
-            </a:r>
-            <a:endParaRPr lang="en-US" sz="2000" b="0" u="none" strike="noStrike">
-              <a:solidFill>
-                <a:srgbClr val="000000"/>
-              </a:solidFill>
-              <a:effectLst/>
-              <a:uFillTx/>
-              <a:latin typeface="Times New Roman"/>
-            </a:endParaRPr>
-          </a:p>
-          <a:p>
-            <a:pPr indent="0" algn="l">
+            </a:pPr>
+            <a:r>
+              <a:rPr lang="en-US" sz="1600" dirty="0"/>
+              <a:t>✔</a:t>
+            </a:r>
+            <a:r>
+              <a:rPr lang="ro-RO" sz="1600" dirty="0"/>
+              <a:t> </a:t>
+            </a:r>
+            <a:r>
+              <a:rPr lang="en-US" sz="2000" b="0" u="none" strike="noStrike" dirty="0" smtClean="0">
+                <a:solidFill>
+                  <a:srgbClr val="000000"/>
+                </a:solidFill>
+                <a:effectLst/>
+                <a:uFillTx/>
+                <a:latin typeface="New times roman"/>
+              </a:rPr>
+              <a:t>REQ-56</a:t>
+            </a:r>
+            <a:r>
+              <a:rPr lang="en-US" sz="2000" b="0" u="none" strike="noStrike" dirty="0">
+                <a:solidFill>
+                  <a:srgbClr val="000000"/>
+                </a:solidFill>
+                <a:effectLst/>
+                <a:uFillTx/>
+                <a:latin typeface="New times roman"/>
+              </a:rPr>
+              <a:t>: Customers will receive the price offer.</a:t>
+            </a:r>
+            <a:endParaRPr lang="en-US" sz="2000" b="0" u="none" strike="noStrike" dirty="0">
+              <a:solidFill>
+                <a:srgbClr val="000000"/>
+              </a:solidFill>
+              <a:effectLst/>
+              <a:uFillTx/>
+              <a:latin typeface="Times New Roman"/>
+            </a:endParaRPr>
+          </a:p>
+          <a:p>
+            <a:pPr algn="l">
               <a:spcBef>
                 <a:spcPts val="1417"/>
               </a:spcBef>
-              <a:buNone/>
-            </a:pPr>
-            <a:r>
-              <a:rPr lang="en-US" sz="2000" b="0" u="none" strike="noStrike">
-                <a:solidFill>
-                  <a:srgbClr val="000000"/>
-                </a:solidFill>
-                <a:effectLst/>
-                <a:uFillTx/>
-                <a:latin typeface="New times roman"/>
-              </a:rPr>
-              <a:t>REQ-57: Customers will be able to accept it through the system.</a:t>
-            </a:r>
-            <a:endParaRPr lang="en-US" sz="2000" b="0" u="none" strike="noStrike">
-              <a:solidFill>
-                <a:srgbClr val="000000"/>
-              </a:solidFill>
-              <a:effectLst/>
-              <a:uFillTx/>
-              <a:latin typeface="Times New Roman"/>
-            </a:endParaRPr>
-          </a:p>
-          <a:p>
-            <a:pPr indent="0" algn="l">
+            </a:pPr>
+            <a:r>
+              <a:rPr lang="en-US" sz="1600" dirty="0"/>
+              <a:t>✔</a:t>
+            </a:r>
+            <a:r>
+              <a:rPr lang="ro-RO" sz="1600" dirty="0"/>
+              <a:t> </a:t>
+            </a:r>
+            <a:r>
+              <a:rPr lang="en-US" sz="2000" b="0" u="none" strike="noStrike" dirty="0" smtClean="0">
+                <a:solidFill>
+                  <a:srgbClr val="000000"/>
+                </a:solidFill>
+                <a:effectLst/>
+                <a:uFillTx/>
+                <a:latin typeface="New times roman"/>
+              </a:rPr>
+              <a:t>REQ-57</a:t>
+            </a:r>
+            <a:r>
+              <a:rPr lang="en-US" sz="2000" b="0" u="none" strike="noStrike" dirty="0">
+                <a:solidFill>
+                  <a:srgbClr val="000000"/>
+                </a:solidFill>
+                <a:effectLst/>
+                <a:uFillTx/>
+                <a:latin typeface="New times roman"/>
+              </a:rPr>
+              <a:t>: Customers will be able to accept it through the system.</a:t>
+            </a:r>
+            <a:endParaRPr lang="en-US" sz="2000" b="0" u="none" strike="noStrike" dirty="0">
+              <a:solidFill>
+                <a:srgbClr val="000000"/>
+              </a:solidFill>
+              <a:effectLst/>
+              <a:uFillTx/>
+              <a:latin typeface="Times New Roman"/>
+            </a:endParaRPr>
+          </a:p>
+          <a:p>
+            <a:pPr algn="l">
               <a:spcBef>
                 <a:spcPts val="1417"/>
               </a:spcBef>
-              <a:buNone/>
-            </a:pPr>
-            <a:r>
-              <a:rPr lang="en-US" sz="2000" b="0" u="none" strike="noStrike">
-                <a:solidFill>
-                  <a:srgbClr val="000000"/>
-                </a:solidFill>
-                <a:effectLst/>
-                <a:uFillTx/>
-                <a:latin typeface="New times roman"/>
-              </a:rPr>
-              <a:t>REQ-58: Customers will be able to reject it through the system.</a:t>
-            </a:r>
-            <a:endParaRPr lang="en-US" sz="2000" b="0" u="none" strike="noStrike">
-              <a:solidFill>
-                <a:srgbClr val="000000"/>
-              </a:solidFill>
-              <a:effectLst/>
-              <a:uFillTx/>
-              <a:latin typeface="Times New Roman"/>
-            </a:endParaRPr>
-          </a:p>
-          <a:p>
-            <a:pPr indent="0" algn="l">
+            </a:pPr>
+            <a:r>
+              <a:rPr lang="en-US" sz="1600" dirty="0"/>
+              <a:t>✔</a:t>
+            </a:r>
+            <a:r>
+              <a:rPr lang="ro-RO" sz="1600" dirty="0"/>
+              <a:t> </a:t>
+            </a:r>
+            <a:r>
+              <a:rPr lang="en-US" sz="2000" b="0" u="none" strike="noStrike" dirty="0" smtClean="0">
+                <a:solidFill>
+                  <a:srgbClr val="000000"/>
+                </a:solidFill>
+                <a:effectLst/>
+                <a:uFillTx/>
+                <a:latin typeface="New times roman"/>
+              </a:rPr>
+              <a:t>REQ-58</a:t>
+            </a:r>
+            <a:r>
+              <a:rPr lang="en-US" sz="2000" b="0" u="none" strike="noStrike" dirty="0">
+                <a:solidFill>
+                  <a:srgbClr val="000000"/>
+                </a:solidFill>
+                <a:effectLst/>
+                <a:uFillTx/>
+                <a:latin typeface="New times roman"/>
+              </a:rPr>
+              <a:t>: Customers will be able to reject it through the system.</a:t>
+            </a:r>
+            <a:endParaRPr lang="en-US" sz="2000" b="0" u="none" strike="noStrike" dirty="0">
+              <a:solidFill>
+                <a:srgbClr val="000000"/>
+              </a:solidFill>
+              <a:effectLst/>
+              <a:uFillTx/>
+              <a:latin typeface="Times New Roman"/>
+            </a:endParaRPr>
+          </a:p>
+          <a:p>
+            <a:pPr algn="l">
               <a:spcBef>
                 <a:spcPts val="1417"/>
               </a:spcBef>
-              <a:buNone/>
-            </a:pPr>
-            <a:r>
-              <a:rPr lang="en-US" sz="2000" b="0" u="none" strike="noStrike">
-                <a:solidFill>
-                  <a:srgbClr val="000000"/>
-                </a:solidFill>
-                <a:effectLst/>
-                <a:uFillTx/>
-                <a:latin typeface="New times roman"/>
-              </a:rPr>
-              <a:t>REQ-59: The system shall update the status of the request to "Accepted" if the customer accepts.</a:t>
-            </a:r>
-            <a:endParaRPr lang="en-US" sz="2000" b="0" u="none" strike="noStrike">
-              <a:solidFill>
-                <a:srgbClr val="000000"/>
-              </a:solidFill>
-              <a:effectLst/>
-              <a:uFillTx/>
-              <a:latin typeface="Times New Roman"/>
-            </a:endParaRPr>
-          </a:p>
-          <a:p>
-            <a:pPr indent="0" algn="l">
+            </a:pPr>
+            <a:r>
+              <a:rPr lang="en-US" sz="1600" dirty="0"/>
+              <a:t>✔</a:t>
+            </a:r>
+            <a:r>
+              <a:rPr lang="ro-RO" sz="1600" dirty="0"/>
+              <a:t> </a:t>
+            </a:r>
+            <a:r>
+              <a:rPr lang="en-US" sz="2000" b="0" u="none" strike="noStrike" dirty="0" smtClean="0">
+                <a:solidFill>
+                  <a:srgbClr val="000000"/>
+                </a:solidFill>
+                <a:effectLst/>
+                <a:uFillTx/>
+                <a:latin typeface="New times roman"/>
+              </a:rPr>
+              <a:t>REQ-59</a:t>
+            </a:r>
+            <a:r>
+              <a:rPr lang="en-US" sz="2000" b="0" u="none" strike="noStrike" dirty="0">
+                <a:solidFill>
+                  <a:srgbClr val="000000"/>
+                </a:solidFill>
+                <a:effectLst/>
+                <a:uFillTx/>
+                <a:latin typeface="New times roman"/>
+              </a:rPr>
+              <a:t>: The system shall update the status of the request to "Accepted" if the customer accepts.</a:t>
+            </a:r>
+            <a:endParaRPr lang="en-US" sz="2000" b="0" u="none" strike="noStrike" dirty="0">
+              <a:solidFill>
+                <a:srgbClr val="000000"/>
+              </a:solidFill>
+              <a:effectLst/>
+              <a:uFillTx/>
+              <a:latin typeface="Times New Roman"/>
+            </a:endParaRPr>
+          </a:p>
+          <a:p>
+            <a:pPr algn="l">
               <a:spcBef>
                 <a:spcPts val="1417"/>
               </a:spcBef>
-              <a:buNone/>
-            </a:pPr>
-            <a:r>
-              <a:rPr lang="en-US" sz="2000" b="0" u="none" strike="noStrike">
-                <a:solidFill>
-                  <a:srgbClr val="000000"/>
-                </a:solidFill>
-                <a:effectLst/>
-                <a:uFillTx/>
-                <a:latin typeface="New times roman"/>
-              </a:rPr>
-              <a:t>REQ-60: The system shall update the status of the request to "Rejected" if the customer rejects.</a:t>
-            </a:r>
-            <a:endParaRPr lang="en-US" sz="2000" b="0" u="none" strike="noStrike">
-              <a:solidFill>
-                <a:srgbClr val="000000"/>
-              </a:solidFill>
-              <a:effectLst/>
-              <a:uFillTx/>
-              <a:latin typeface="Times New Roman"/>
-            </a:endParaRPr>
-          </a:p>
-          <a:p>
-            <a:pPr indent="0" algn="l">
+            </a:pPr>
+            <a:r>
+              <a:rPr lang="en-US" sz="1600" dirty="0"/>
+              <a:t>✔</a:t>
+            </a:r>
+            <a:r>
+              <a:rPr lang="ro-RO" sz="1600" dirty="0"/>
+              <a:t> </a:t>
+            </a:r>
+            <a:r>
+              <a:rPr lang="en-US" sz="2000" b="0" u="none" strike="noStrike" dirty="0" smtClean="0">
+                <a:solidFill>
+                  <a:srgbClr val="000000"/>
+                </a:solidFill>
+                <a:effectLst/>
+                <a:uFillTx/>
+                <a:latin typeface="New times roman"/>
+              </a:rPr>
+              <a:t>REQ-60</a:t>
+            </a:r>
+            <a:r>
+              <a:rPr lang="en-US" sz="2000" b="0" u="none" strike="noStrike" dirty="0">
+                <a:solidFill>
+                  <a:srgbClr val="000000"/>
+                </a:solidFill>
+                <a:effectLst/>
+                <a:uFillTx/>
+                <a:latin typeface="New times roman"/>
+              </a:rPr>
+              <a:t>: The system shall update the status of the request to "Rejected" if the customer rejects.</a:t>
+            </a:r>
+            <a:endParaRPr lang="en-US" sz="2000" b="0" u="none" strike="noStrike" dirty="0">
+              <a:solidFill>
+                <a:srgbClr val="000000"/>
+              </a:solidFill>
+              <a:effectLst/>
+              <a:uFillTx/>
+              <a:latin typeface="Times New Roman"/>
+            </a:endParaRPr>
+          </a:p>
+          <a:p>
+            <a:pPr algn="l">
               <a:spcBef>
                 <a:spcPts val="1417"/>
               </a:spcBef>
-              <a:buNone/>
-            </a:pPr>
-            <a:r>
-              <a:rPr lang="en-US" sz="2000" b="0" u="none" strike="noStrike">
-                <a:solidFill>
-                  <a:srgbClr val="000000"/>
-                </a:solidFill>
-                <a:effectLst/>
-                <a:uFillTx/>
-                <a:latin typeface="New times roman"/>
-              </a:rPr>
-              <a:t>REQ-61: The system shall notify logistics staff of the customer's decision.</a:t>
-            </a:r>
-            <a:endParaRPr lang="en-US" sz="2000" b="0" u="none" strike="noStrike">
-              <a:solidFill>
-                <a:srgbClr val="000000"/>
-              </a:solidFill>
-              <a:effectLst/>
-              <a:uFillTx/>
-              <a:latin typeface="Times New Roman"/>
-            </a:endParaRPr>
-          </a:p>
-          <a:p>
-            <a:pPr indent="0" algn="l">
+            </a:pPr>
+            <a:r>
+              <a:rPr lang="en-US" sz="1600" dirty="0"/>
+              <a:t>✔</a:t>
+            </a:r>
+            <a:r>
+              <a:rPr lang="ro-RO" sz="1600" dirty="0"/>
+              <a:t> </a:t>
+            </a:r>
+            <a:r>
+              <a:rPr lang="en-US" sz="2000" b="0" u="none" strike="noStrike" dirty="0" smtClean="0">
+                <a:solidFill>
+                  <a:srgbClr val="000000"/>
+                </a:solidFill>
+                <a:effectLst/>
+                <a:uFillTx/>
+                <a:latin typeface="New times roman"/>
+              </a:rPr>
+              <a:t>REQ-61</a:t>
+            </a:r>
+            <a:r>
+              <a:rPr lang="en-US" sz="2000" b="0" u="none" strike="noStrike" dirty="0">
+                <a:solidFill>
+                  <a:srgbClr val="000000"/>
+                </a:solidFill>
+                <a:effectLst/>
+                <a:uFillTx/>
+                <a:latin typeface="New times roman"/>
+              </a:rPr>
+              <a:t>: The system shall notify logistics staff of the customer's decision.</a:t>
+            </a:r>
+            <a:endParaRPr lang="en-US" sz="2000" b="0" u="none" strike="noStrike" dirty="0">
+              <a:solidFill>
+                <a:srgbClr val="000000"/>
+              </a:solidFill>
+              <a:effectLst/>
+              <a:uFillTx/>
+              <a:latin typeface="Times New Roman"/>
+            </a:endParaRPr>
+          </a:p>
+          <a:p>
+            <a:pPr algn="l">
               <a:spcBef>
                 <a:spcPts val="1417"/>
               </a:spcBef>
-              <a:buNone/>
-            </a:pPr>
-            <a:r>
-              <a:rPr lang="en-US" sz="2000" b="0" u="none" strike="noStrike">
-                <a:solidFill>
-                  <a:srgbClr val="000000"/>
-                </a:solidFill>
-                <a:effectLst/>
-                <a:uFillTx/>
-                <a:latin typeface="New times roman"/>
-              </a:rPr>
-              <a:t>REQ-62: The system shall prevent customers from modifying a request after an offer is generated.</a:t>
-            </a:r>
-            <a:endParaRPr lang="en-US" sz="2000" b="0" u="none" strike="noStrike">
-              <a:solidFill>
-                <a:srgbClr val="000000"/>
-              </a:solidFill>
-              <a:effectLst/>
-              <a:uFillTx/>
-              <a:latin typeface="Times New Roman"/>
-            </a:endParaRPr>
-          </a:p>
-          <a:p>
-            <a:pPr indent="0" algn="l">
+            </a:pPr>
+            <a:r>
+              <a:rPr lang="en-US" sz="1600" dirty="0"/>
+              <a:t>✔</a:t>
+            </a:r>
+            <a:r>
+              <a:rPr lang="ro-RO" sz="1600" dirty="0"/>
+              <a:t> </a:t>
+            </a:r>
+            <a:r>
+              <a:rPr lang="en-US" sz="2000" b="0" u="none" strike="noStrike" dirty="0" smtClean="0">
+                <a:solidFill>
+                  <a:srgbClr val="000000"/>
+                </a:solidFill>
+                <a:effectLst/>
+                <a:uFillTx/>
+                <a:latin typeface="New times roman"/>
+              </a:rPr>
+              <a:t>REQ-62</a:t>
+            </a:r>
+            <a:r>
+              <a:rPr lang="en-US" sz="2000" b="0" u="none" strike="noStrike" dirty="0">
+                <a:solidFill>
+                  <a:srgbClr val="000000"/>
+                </a:solidFill>
+                <a:effectLst/>
+                <a:uFillTx/>
+                <a:latin typeface="New times roman"/>
+              </a:rPr>
+              <a:t>: The system shall prevent customers from modifying a request after an offer is generated.</a:t>
+            </a:r>
+            <a:endParaRPr lang="en-US" sz="2000" b="0" u="none" strike="noStrike" dirty="0">
+              <a:solidFill>
+                <a:srgbClr val="000000"/>
+              </a:solidFill>
+              <a:effectLst/>
+              <a:uFillTx/>
+              <a:latin typeface="Times New Roman"/>
+            </a:endParaRPr>
+          </a:p>
+          <a:p>
+            <a:pPr algn="l">
               <a:spcBef>
                 <a:spcPts val="1417"/>
               </a:spcBef>
-              <a:buNone/>
-            </a:pPr>
-            <a:r>
-              <a:rPr lang="en-US" sz="2000" b="0" u="none" strike="noStrike">
-                <a:solidFill>
-                  <a:srgbClr val="000000"/>
-                </a:solidFill>
-                <a:effectLst/>
-                <a:uFillTx/>
-                <a:latin typeface="New times roman"/>
-              </a:rPr>
-              <a:t>REQ-63: The system shall cancel offers automatically if not accepted within the validity period.</a:t>
-            </a:r>
-            <a:endParaRPr lang="en-US" sz="2000" b="0" u="none" strike="noStrike">
+            </a:pPr>
+            <a:r>
+              <a:rPr lang="en-US" sz="1600" dirty="0"/>
+              <a:t>✔</a:t>
+            </a:r>
+            <a:r>
+              <a:rPr lang="ro-RO" sz="1600" dirty="0"/>
+              <a:t> </a:t>
+            </a:r>
+            <a:r>
+              <a:rPr lang="en-US" sz="2000" b="0" u="none" strike="noStrike" dirty="0" smtClean="0">
+                <a:solidFill>
+                  <a:srgbClr val="000000"/>
+                </a:solidFill>
+                <a:effectLst/>
+                <a:uFillTx/>
+                <a:latin typeface="New times roman"/>
+              </a:rPr>
+              <a:t>REQ-63</a:t>
+            </a:r>
+            <a:r>
+              <a:rPr lang="en-US" sz="2000" b="0" u="none" strike="noStrike" dirty="0">
+                <a:solidFill>
+                  <a:srgbClr val="000000"/>
+                </a:solidFill>
+                <a:effectLst/>
+                <a:uFillTx/>
+                <a:latin typeface="New times roman"/>
+              </a:rPr>
+              <a:t>: The system shall cancel offers automatically if not accepted within the validity period.</a:t>
+            </a:r>
+            <a:endParaRPr lang="en-US" sz="2000" b="0" u="none" strike="noStrike" dirty="0">
               <a:solidFill>
                 <a:srgbClr val="000000"/>
               </a:solidFill>
@@ -4972,11 +7601,14 @@
       </p:sp>
     </p:spTree>
   </p:cSld>
-  <mc:AlternateContent>
+  <p:clrMapOvr>
+    <a:masterClrMapping/>
+  </p:clrMapOvr>
+  <mc:AlternateContent xmlns:mc="http://schemas.openxmlformats.org/markup-compatibility/2006" xmlns:p14="http://schemas.microsoft.com/office/powerpoint/2010/main">
     <mc:Choice Requires="p14">
       <p:transition spd="slow" p14:dur="2000"/>
     </mc:Choice>
-    <mc:Fallback>
+    <mc:Fallback xmlns="" xmlns:p15="http://schemas.microsoft.com/office/powerpoint/2012/main">
       <p:transition spd="slow"/>
     </mc:Fallback>
   </mc:AlternateContent>
@@ -4984,7 +7616,7 @@
 </file>
 
 <file path=ppt/theme/theme1.xml><?xml version="1.0" encoding="utf-8"?>
-<a:theme xmlns:a="http://schemas.openxmlformats.org/drawingml/2006/main" xmlns:r="http://schemas.openxmlformats.org/officeDocument/2006/relationships" name="Office">
+<a:theme xmlns:a="http://schemas.openxmlformats.org/drawingml/2006/main" name="Office">
   <a:themeElements>
     <a:clrScheme name="LibreOffice">
       <a:dk1>
@@ -5026,14 +7658,14 @@
     </a:clrScheme>
     <a:fontScheme name="Office">
       <a:majorFont>
-        <a:latin typeface="Arial" pitchFamily="0" charset="1"/>
-        <a:ea typeface="DejaVu Sans" pitchFamily="0" charset="1"/>
-        <a:cs typeface="DejaVu Sans" pitchFamily="0" charset="1"/>
+        <a:latin typeface="Arial"/>
+        <a:ea typeface="DejaVu Sans"/>
+        <a:cs typeface="DejaVu Sans"/>
       </a:majorFont>
       <a:minorFont>
-        <a:latin typeface="Arial" pitchFamily="0" charset="1"/>
-        <a:ea typeface="DejaVu Sans" pitchFamily="0" charset="1"/>
-        <a:cs typeface="DejaVu Sans" pitchFamily="0" charset="1"/>
+        <a:latin typeface="Arial"/>
+        <a:ea typeface="DejaVu Sans"/>
+        <a:cs typeface="DejaVu Sans"/>
       </a:minorFont>
     </a:fontScheme>
     <a:fmtScheme>
@@ -5086,5 +7718,7 @@
       </a:bgFillStyleLst>
     </a:fmtScheme>
   </a:themeElements>
+  <a:objectDefaults/>
+  <a:extraClrSchemeLst/>
 </a:theme>
 </file>